--- a/docs/presentation/bruno-lms-presentation.pptx
+++ b/docs/presentation/bruno-lms-presentation.pptx
@@ -4,6 +4,9 @@
   <p:sldMasterIdLst>
     <p:sldMasterId id="2147483648" r:id="rId1"/>
   </p:sldMasterIdLst>
+  <p:notesMasterIdLst>
+    <p:notesMasterId r:id="rId20"/>
+  </p:notesMasterIdLst>
   <p:sldIdLst>
     <p:sldId id="256" r:id="rId2"/>
     <p:sldId id="257" r:id="rId3"/>
@@ -24,10 +27,7 @@
     <p:sldId id="272" r:id="rId18"/>
     <p:sldId id="273" r:id="rId19"/>
   </p:sldIdLst>
-  <p:notesMasterIdLst>
-    <p:notesMasterId r:id="rId20"/>
-  </p:notesMasterIdLst>
-  <p:sldSz cx="9144000" cy="5143500"/>
+  <p:sldSz cx="9144000" cy="5143500" type="screen16x9"/>
   <p:notesSz cx="5143500" cy="9144000"/>
   <p:defaultTextStyle>
     <a:lvl1pPr marL="0" algn="l" defTabSz="914400" rtl="0" eaLnBrk="1" latinLnBrk="0" hangingPunct="1">
@@ -121,6 +121,11 @@
       </a:defRPr>
     </a:lvl9pPr>
   </p:defaultTextStyle>
+  <p:extLst>
+    <p:ext uri="{EFAFB233-063F-42B5-8137-9DF3F51BA10A}">
+      <p15:sldGuideLst xmlns:p15="http://schemas.microsoft.com/office/powerpoint/2012/main"/>
+    </p:ext>
+  </p:extLst>
 </p:presentation>
 </file>
 
@@ -146,234 +151,10 @@
           <a:chExt cx="0" cy="0"/>
         </a:xfrm>
       </p:grpSpPr>
-      <p:sp>
-        <p:nvSpPr>
-          <p:cNvPr id="2" name="Header Placeholder 1"/>
-          <p:cNvSpPr>
-            <a:spLocks noGrp="1"/>
-          </p:cNvSpPr>
-          <p:nvPr>
-            <p:ph type="hdr" sz="quarter"/>
-          </p:nvPr>
-        </p:nvSpPr>
-        <p:spPr>
-          <a:xfrm>
-            <a:off x="0" y="0"/>
-            <a:ext cx="2971800" cy="458788"/>
-          </a:xfrm>
-          <a:prstGeom prst="rect">
-            <a:avLst/>
-          </a:prstGeom>
-        </p:spPr>
-        <p:txBody>
-          <a:bodyPr vert="horz" lIns="91440" tIns="45720" rIns="91440" bIns="45720" rtlCol="0"/>
-          <a:lstStyle>
-            <a:lvl1pPr algn="l">
-              <a:defRPr sz="1200"/>
-            </a:lvl1pPr>
-          </a:lstStyle>
-          <a:p>
-            <a:endParaRPr lang="en-US"/>
-          </a:p>
-        </p:txBody>
-      </p:sp>
-      <p:sp>
-        <p:nvSpPr>
-          <p:cNvPr id="3" name="Date Placeholder 2"/>
-          <p:cNvSpPr>
-            <a:spLocks noGrp="1"/>
-          </p:cNvSpPr>
-          <p:nvPr>
-            <p:ph type="dt" idx="1"/>
-          </p:nvPr>
-        </p:nvSpPr>
-        <p:spPr>
-          <a:xfrm>
-            <a:off x="3884613" y="0"/>
-            <a:ext cx="2971800" cy="458788"/>
-          </a:xfrm>
-          <a:prstGeom prst="rect">
-            <a:avLst/>
-          </a:prstGeom>
-        </p:spPr>
-        <p:txBody>
-          <a:bodyPr vert="horz" lIns="91440" tIns="45720" rIns="91440" bIns="45720" rtlCol="0"/>
-          <a:lstStyle>
-            <a:lvl1pPr algn="r">
-              <a:defRPr sz="1200"/>
-            </a:lvl1pPr>
-          </a:lstStyle>
-          <a:p>
-            <a:fld id="{5282F153-3F37-0F45-9E97-73ACFA13230C}" type="datetimeFigureOut">
-              <a:rPr lang="en-US"/>
-              <a:t>7/23/19</a:t>
-            </a:fld>
-            <a:endParaRPr lang="en-US"/>
-          </a:p>
-        </p:txBody>
-      </p:sp>
-      <p:sp>
-        <p:nvSpPr>
-          <p:cNvPr id="4" name="Slide Image Placeholder 3"/>
-          <p:cNvSpPr>
-            <a:spLocks noGrp="1" noRot="1" noChangeAspect="1"/>
-          </p:cNvSpPr>
-          <p:nvPr>
-            <p:ph type="sldImg" idx="2"/>
-          </p:nvPr>
-        </p:nvSpPr>
-        <p:spPr>
-          <a:xfrm>
-            <a:off x="685800" y="1143000"/>
-            <a:ext cx="5486400" cy="3086100"/>
-          </a:xfrm>
-          <a:prstGeom prst="rect">
-            <a:avLst/>
-          </a:prstGeom>
-          <a:noFill/>
-          <a:ln w="12700">
-            <a:solidFill>
-              <a:prstClr val="black"/>
-            </a:solidFill>
-          </a:ln>
-        </p:spPr>
-        <p:txBody>
-          <a:bodyPr vert="horz" lIns="91440" tIns="45720" rIns="91440" bIns="45720" rtlCol="0" anchor="ctr"/>
-          <a:lstStyle/>
-          <a:p>
-            <a:endParaRPr lang="en-US"/>
-          </a:p>
-        </p:txBody>
-      </p:sp>
-      <p:sp>
-        <p:nvSpPr>
-          <p:cNvPr id="5" name="Notes Placeholder 4"/>
-          <p:cNvSpPr>
-            <a:spLocks noGrp="1"/>
-          </p:cNvSpPr>
-          <p:nvPr>
-            <p:ph type="body" sz="quarter" idx="3"/>
-          </p:nvPr>
-        </p:nvSpPr>
-        <p:spPr>
-          <a:xfrm>
-            <a:off x="685800" y="4400550"/>
-            <a:ext cx="5486400" cy="3600450"/>
-          </a:xfrm>
-          <a:prstGeom prst="rect">
-            <a:avLst/>
-          </a:prstGeom>
-        </p:spPr>
-        <p:txBody>
-          <a:bodyPr vert="horz" lIns="91440" tIns="45720" rIns="91440" bIns="45720" rtlCol="0"/>
-          <a:lstStyle/>
-          <a:p>
-            <a:pPr lvl="0"/>
-            <a:r>
-              <a:rPr lang="en-US"/>
-              <a:t>Click to edit Master text styles</a:t>
-            </a:r>
-          </a:p>
-          <a:p>
-            <a:pPr lvl="1"/>
-            <a:r>
-              <a:rPr lang="en-US"/>
-              <a:t>Second level</a:t>
-            </a:r>
-          </a:p>
-          <a:p>
-            <a:pPr lvl="2"/>
-            <a:r>
-              <a:rPr lang="en-US"/>
-              <a:t>Third level</a:t>
-            </a:r>
-          </a:p>
-          <a:p>
-            <a:pPr lvl="3"/>
-            <a:r>
-              <a:rPr lang="en-US"/>
-              <a:t>Fourth level</a:t>
-            </a:r>
-          </a:p>
-          <a:p>
-            <a:pPr lvl="4"/>
-            <a:r>
-              <a:rPr lang="en-US"/>
-              <a:t>Fifth level</a:t>
-            </a:r>
-          </a:p>
-        </p:txBody>
-      </p:sp>
-      <p:sp>
-        <p:nvSpPr>
-          <p:cNvPr id="6" name="Footer Placeholder 5"/>
-          <p:cNvSpPr>
-            <a:spLocks noGrp="1"/>
-          </p:cNvSpPr>
-          <p:nvPr>
-            <p:ph type="ftr" sz="quarter" idx="4"/>
-          </p:nvPr>
-        </p:nvSpPr>
-        <p:spPr>
-          <a:xfrm>
-            <a:off x="0" y="8685213"/>
-            <a:ext cx="2971800" cy="458787"/>
-          </a:xfrm>
-          <a:prstGeom prst="rect">
-            <a:avLst/>
-          </a:prstGeom>
-        </p:spPr>
-        <p:txBody>
-          <a:bodyPr vert="horz" lIns="91440" tIns="45720" rIns="91440" bIns="45720" rtlCol="0" anchor="b"/>
-          <a:lstStyle>
-            <a:lvl1pPr algn="l">
-              <a:defRPr sz="1200"/>
-            </a:lvl1pPr>
-          </a:lstStyle>
-          <a:p>
-            <a:endParaRPr lang="en-US"/>
-          </a:p>
-        </p:txBody>
-      </p:sp>
-      <p:sp>
-        <p:nvSpPr>
-          <p:cNvPr id="7" name="Slide Number Placeholder 6"/>
-          <p:cNvSpPr>
-            <a:spLocks noGrp="1"/>
-          </p:cNvSpPr>
-          <p:nvPr>
-            <p:ph type="sldNum" sz="quarter" idx="5"/>
-          </p:nvPr>
-        </p:nvSpPr>
-        <p:spPr>
-          <a:xfrm>
-            <a:off x="3884613" y="8685213"/>
-            <a:ext cx="2971800" cy="458787"/>
-          </a:xfrm>
-          <a:prstGeom prst="rect">
-            <a:avLst/>
-          </a:prstGeom>
-        </p:spPr>
-        <p:txBody>
-          <a:bodyPr vert="horz" lIns="91440" tIns="45720" rIns="91440" bIns="45720" rtlCol="0" anchor="b"/>
-          <a:lstStyle>
-            <a:lvl1pPr algn="r">
-              <a:defRPr sz="1200"/>
-            </a:lvl1pPr>
-          </a:lstStyle>
-          <a:p>
-            <a:fld id="{CE5E9CC1-C706-0F49-92D6-E571CC5EEA8F}" type="slidenum">
-              <a:rPr lang="en-US"/>
-              <a:t>‹#›</a:t>
-            </a:fld>
-            <a:endParaRPr lang="en-US"/>
-          </a:p>
-        </p:txBody>
-      </p:sp>
     </p:spTree>
     <p:extLst>
       <p:ext uri="{BB962C8B-B14F-4D97-AF65-F5344CB8AC3E}">
-        <p14:creationId xmlns:p14="http://schemas.microsoft.com/office/powerpoint/2010/main" val="1024086991"/>
+        <p14:creationId xmlns:p14="http://schemas.microsoft.com/office/powerpoint/2010/main" val="4143508320"/>
       </p:ext>
     </p:extLst>
   </p:cSld>
@@ -517,10 +298,6 @@
           <a:bodyPr/>
           <a:lstStyle/>
           <a:p>
-            <a:r>
-              <a:rPr lang="en-US" dirty="0"/>
-              <a:t/>
-            </a:r>
             <a:endParaRPr lang="en-US" dirty="0"/>
           </a:p>
         </p:txBody>
@@ -605,10 +382,6 @@
           <a:bodyPr/>
           <a:lstStyle/>
           <a:p>
-            <a:r>
-              <a:rPr lang="en-US" dirty="0"/>
-              <a:t/>
-            </a:r>
             <a:endParaRPr lang="en-US" dirty="0"/>
           </a:p>
         </p:txBody>
@@ -693,10 +466,6 @@
           <a:bodyPr/>
           <a:lstStyle/>
           <a:p>
-            <a:r>
-              <a:rPr lang="en-US" dirty="0"/>
-              <a:t/>
-            </a:r>
             <a:endParaRPr lang="en-US" dirty="0"/>
           </a:p>
         </p:txBody>
@@ -781,10 +550,6 @@
           <a:bodyPr/>
           <a:lstStyle/>
           <a:p>
-            <a:r>
-              <a:rPr lang="en-US" dirty="0"/>
-              <a:t/>
-            </a:r>
             <a:endParaRPr lang="en-US" dirty="0"/>
           </a:p>
         </p:txBody>
@@ -869,10 +634,6 @@
           <a:bodyPr/>
           <a:lstStyle/>
           <a:p>
-            <a:r>
-              <a:rPr lang="en-US" dirty="0"/>
-              <a:t/>
-            </a:r>
             <a:endParaRPr lang="en-US" dirty="0"/>
           </a:p>
         </p:txBody>
@@ -957,10 +718,6 @@
           <a:bodyPr/>
           <a:lstStyle/>
           <a:p>
-            <a:r>
-              <a:rPr lang="en-US" dirty="0"/>
-              <a:t/>
-            </a:r>
             <a:endParaRPr lang="en-US" dirty="0"/>
           </a:p>
         </p:txBody>
@@ -1045,10 +802,6 @@
           <a:bodyPr/>
           <a:lstStyle/>
           <a:p>
-            <a:r>
-              <a:rPr lang="en-US" dirty="0"/>
-              <a:t/>
-            </a:r>
             <a:endParaRPr lang="en-US" dirty="0"/>
           </a:p>
         </p:txBody>
@@ -1133,10 +886,6 @@
           <a:bodyPr/>
           <a:lstStyle/>
           <a:p>
-            <a:r>
-              <a:rPr lang="en-US" dirty="0"/>
-              <a:t/>
-            </a:r>
             <a:endParaRPr lang="en-US" dirty="0"/>
           </a:p>
         </p:txBody>
@@ -1221,10 +970,6 @@
           <a:bodyPr/>
           <a:lstStyle/>
           <a:p>
-            <a:r>
-              <a:rPr lang="en-US" dirty="0"/>
-              <a:t/>
-            </a:r>
             <a:endParaRPr lang="en-US" dirty="0"/>
           </a:p>
         </p:txBody>
@@ -1309,10 +1054,6 @@
           <a:bodyPr/>
           <a:lstStyle/>
           <a:p>
-            <a:r>
-              <a:rPr lang="en-US" dirty="0"/>
-              <a:t/>
-            </a:r>
             <a:endParaRPr lang="en-US" dirty="0"/>
           </a:p>
         </p:txBody>
@@ -1397,10 +1138,6 @@
           <a:bodyPr/>
           <a:lstStyle/>
           <a:p>
-            <a:r>
-              <a:rPr lang="en-US" dirty="0"/>
-              <a:t/>
-            </a:r>
             <a:endParaRPr lang="en-US" dirty="0"/>
           </a:p>
         </p:txBody>
@@ -1485,10 +1222,6 @@
           <a:bodyPr/>
           <a:lstStyle/>
           <a:p>
-            <a:r>
-              <a:rPr lang="en-US" dirty="0"/>
-              <a:t/>
-            </a:r>
             <a:endParaRPr lang="en-US" dirty="0"/>
           </a:p>
         </p:txBody>
@@ -1573,10 +1306,6 @@
           <a:bodyPr/>
           <a:lstStyle/>
           <a:p>
-            <a:r>
-              <a:rPr lang="en-US" dirty="0"/>
-              <a:t/>
-            </a:r>
             <a:endParaRPr lang="en-US" dirty="0"/>
           </a:p>
         </p:txBody>
@@ -1661,10 +1390,6 @@
           <a:bodyPr/>
           <a:lstStyle/>
           <a:p>
-            <a:r>
-              <a:rPr lang="en-US" dirty="0"/>
-              <a:t/>
-            </a:r>
             <a:endParaRPr lang="en-US" dirty="0"/>
           </a:p>
         </p:txBody>
@@ -1749,10 +1474,6 @@
           <a:bodyPr/>
           <a:lstStyle/>
           <a:p>
-            <a:r>
-              <a:rPr lang="en-US" dirty="0"/>
-              <a:t/>
-            </a:r>
             <a:endParaRPr lang="en-US" dirty="0"/>
           </a:p>
         </p:txBody>
@@ -1837,10 +1558,6 @@
           <a:bodyPr/>
           <a:lstStyle/>
           <a:p>
-            <a:r>
-              <a:rPr lang="en-US" dirty="0"/>
-              <a:t/>
-            </a:r>
             <a:endParaRPr lang="en-US" dirty="0"/>
           </a:p>
         </p:txBody>
@@ -1925,10 +1642,6 @@
           <a:bodyPr/>
           <a:lstStyle/>
           <a:p>
-            <a:r>
-              <a:rPr lang="en-US" dirty="0"/>
-              <a:t/>
-            </a:r>
             <a:endParaRPr lang="en-US" dirty="0"/>
           </a:p>
         </p:txBody>
@@ -2013,10 +1726,6 @@
           <a:bodyPr/>
           <a:lstStyle/>
           <a:p>
-            <a:r>
-              <a:rPr lang="en-US" dirty="0"/>
-              <a:t/>
-            </a:r>
             <a:endParaRPr lang="en-US" dirty="0"/>
           </a:p>
         </p:txBody>
@@ -2090,6 +1799,11 @@
 <file path=ppt/slideMasters/slideMaster1.xml><?xml version="1.0" encoding="utf-8"?>
 <p:sldMaster xmlns:a="http://schemas.openxmlformats.org/drawingml/2006/main" xmlns:r="http://schemas.openxmlformats.org/officeDocument/2006/relationships" xmlns:p="http://schemas.openxmlformats.org/presentationml/2006/main">
   <p:cSld>
+    <p:bg>
+      <p:bgRef idx="1001">
+        <a:schemeClr val="bg1"/>
+      </p:bgRef>
+    </p:bg>
     <p:spTree>
       <p:nvGrpSpPr>
         <p:cNvPr id="1" name=""/>
@@ -2372,6 +2086,7 @@
         <a:solidFill>
           <a:srgbClr val="F8F9FD"/>
         </a:solidFill>
+        <a:effectLst/>
       </p:bgPr>
     </p:bg>
     <p:spTree>
@@ -2390,14 +2105,14 @@
       </p:grpSpPr>
       <p:sp>
         <p:nvSpPr>
-          <p:cNvPr id="2" name="Text 0"/>
-          <p:cNvSpPr/>
-          <p:nvPr/>
-        </p:nvSpPr>
-        <p:spPr>
-          <a:xfrm>
-            <a:off x="731520" y="914400"/>
-            <a:ext cx="7680960" cy="274320"/>
+          <p:cNvPr id="3" name="Text 1"/>
+          <p:cNvSpPr/>
+          <p:nvPr/>
+        </p:nvSpPr>
+        <p:spPr>
+          <a:xfrm>
+            <a:off x="731520" y="1234440"/>
+            <a:ext cx="7680960" cy="1371600"/>
           </a:xfrm>
           <a:prstGeom prst="rect">
             <a:avLst/>
@@ -2409,52 +2124,24 @@
           <a:bodyPr wrap="square" rtlCol="0" anchor="ctr"/>
           <a:lstStyle/>
           <a:p>
-            <a:pPr indent="0" marL="0">
-              <a:buNone/>
-            </a:pPr>
-            <a:r>
-              <a:rPr lang="en-US" sz="1100" b="1" dirty="0">
-                <a:solidFill>
-                  <a:srgbClr val="7B61FF"/>
-                </a:solidFill>
-                <a:latin typeface="Arial" pitchFamily="34" charset="0"/>
-                <a:ea typeface="Arial" pitchFamily="34" charset="-122"/>
-                <a:cs typeface="Arial" pitchFamily="34" charset="-120"/>
-              </a:rPr>
-              <a:t>BÁO CÁO BÀI TẬP LỚN MÔN HỌC</a:t>
-            </a:r>
-            <a:endParaRPr lang="en-US" sz="1100" dirty="0"/>
-          </a:p>
-        </p:txBody>
-      </p:sp>
-      <p:sp>
-        <p:nvSpPr>
-          <p:cNvPr id="3" name="Text 1"/>
-          <p:cNvSpPr/>
-          <p:nvPr/>
-        </p:nvSpPr>
-        <p:spPr>
-          <a:xfrm>
-            <a:off x="731520" y="1234440"/>
-            <a:ext cx="7680960" cy="1371600"/>
-          </a:xfrm>
-          <a:prstGeom prst="rect">
-            <a:avLst/>
-          </a:prstGeom>
-          <a:noFill/>
-          <a:ln/>
-        </p:spPr>
-        <p:txBody>
-          <a:bodyPr wrap="square" rtlCol="0" anchor="ctr"/>
-          <a:lstStyle/>
-          <a:p>
-            <a:pPr indent="0" marL="0">
+            <a:pPr marL="0" indent="0">
               <a:lnSpc>
                 <a:spcPts val="3400"/>
               </a:lnSpc>
               <a:buNone/>
             </a:pPr>
             <a:r>
+              <a:rPr lang="en-US" sz="2800" b="1" dirty="0" err="1">
+                <a:solidFill>
+                  <a:srgbClr val="0B1354"/>
+                </a:solidFill>
+                <a:latin typeface="Arial" pitchFamily="34" charset="0"/>
+                <a:ea typeface="Arial" pitchFamily="34" charset="-122"/>
+                <a:cs typeface="Arial" pitchFamily="34" charset="-120"/>
+              </a:rPr>
+              <a:t>Nghiên</a:t>
+            </a:r>
+            <a:r>
               <a:rPr lang="en-US" sz="2800" b="1" dirty="0">
                 <a:solidFill>
                   <a:srgbClr val="0B1354"/>
@@ -2463,17 +2150,19 @@
                 <a:ea typeface="Arial" pitchFamily="34" charset="-122"/>
                 <a:cs typeface="Arial" pitchFamily="34" charset="-120"/>
               </a:rPr>
-              <a:t>KIỂM THỬ API TỰ ĐỘNG VỚI BRUNO</a:t>
-            </a:r>
-            <a:endParaRPr lang="en-US" sz="2800" dirty="0"/>
-          </a:p>
-          <a:p>
-            <a:pPr indent="0" marL="0">
-              <a:lnSpc>
-                <a:spcPts val="3400"/>
-              </a:lnSpc>
-              <a:buNone/>
-            </a:pPr>
+              <a:t> </a:t>
+            </a:r>
+            <a:r>
+              <a:rPr lang="en-US" sz="2800" b="1" dirty="0" err="1">
+                <a:solidFill>
+                  <a:srgbClr val="0B1354"/>
+                </a:solidFill>
+                <a:latin typeface="Arial" pitchFamily="34" charset="0"/>
+                <a:ea typeface="Arial" pitchFamily="34" charset="-122"/>
+                <a:cs typeface="Arial" pitchFamily="34" charset="-120"/>
+              </a:rPr>
+              <a:t>cứu</a:t>
+            </a:r>
             <a:r>
               <a:rPr lang="en-US" sz="2800" b="1" dirty="0">
                 <a:solidFill>
@@ -2483,7 +2172,205 @@
                 <a:ea typeface="Arial" pitchFamily="34" charset="-122"/>
                 <a:cs typeface="Arial" pitchFamily="34" charset="-120"/>
               </a:rPr>
-              <a:t>TRÊN HỆ THỐNG LMS</a:t>
+              <a:t> </a:t>
+            </a:r>
+            <a:r>
+              <a:rPr lang="en-US" sz="2800" b="1" dirty="0" err="1">
+                <a:solidFill>
+                  <a:srgbClr val="0B1354"/>
+                </a:solidFill>
+                <a:latin typeface="Arial" pitchFamily="34" charset="0"/>
+                <a:ea typeface="Arial" pitchFamily="34" charset="-122"/>
+                <a:cs typeface="Arial" pitchFamily="34" charset="-120"/>
+              </a:rPr>
+              <a:t>giải</a:t>
+            </a:r>
+            <a:r>
+              <a:rPr lang="en-US" sz="2800" b="1" dirty="0">
+                <a:solidFill>
+                  <a:srgbClr val="0B1354"/>
+                </a:solidFill>
+                <a:latin typeface="Arial" pitchFamily="34" charset="0"/>
+                <a:ea typeface="Arial" pitchFamily="34" charset="-122"/>
+                <a:cs typeface="Arial" pitchFamily="34" charset="-120"/>
+              </a:rPr>
+              <a:t> </a:t>
+            </a:r>
+            <a:r>
+              <a:rPr lang="en-US" sz="2800" b="1" dirty="0" err="1">
+                <a:solidFill>
+                  <a:srgbClr val="0B1354"/>
+                </a:solidFill>
+                <a:latin typeface="Arial" pitchFamily="34" charset="0"/>
+                <a:ea typeface="Arial" pitchFamily="34" charset="-122"/>
+                <a:cs typeface="Arial" pitchFamily="34" charset="-120"/>
+              </a:rPr>
+              <a:t>pháp</a:t>
+            </a:r>
+            <a:r>
+              <a:rPr lang="en-US" sz="2800" b="1" dirty="0">
+                <a:solidFill>
+                  <a:srgbClr val="0B1354"/>
+                </a:solidFill>
+                <a:latin typeface="Arial" pitchFamily="34" charset="0"/>
+                <a:ea typeface="Arial" pitchFamily="34" charset="-122"/>
+                <a:cs typeface="Arial" pitchFamily="34" charset="-120"/>
+              </a:rPr>
+              <a:t> </a:t>
+            </a:r>
+            <a:r>
+              <a:rPr lang="en-US" sz="2800" b="1" dirty="0" err="1">
+                <a:solidFill>
+                  <a:srgbClr val="0B1354"/>
+                </a:solidFill>
+                <a:latin typeface="Arial" pitchFamily="34" charset="0"/>
+                <a:ea typeface="Arial" pitchFamily="34" charset="-122"/>
+                <a:cs typeface="Arial" pitchFamily="34" charset="-120"/>
+              </a:rPr>
+              <a:t>kiểm</a:t>
+            </a:r>
+            <a:r>
+              <a:rPr lang="en-US" sz="2800" b="1" dirty="0">
+                <a:solidFill>
+                  <a:srgbClr val="0B1354"/>
+                </a:solidFill>
+                <a:latin typeface="Arial" pitchFamily="34" charset="0"/>
+                <a:ea typeface="Arial" pitchFamily="34" charset="-122"/>
+                <a:cs typeface="Arial" pitchFamily="34" charset="-120"/>
+              </a:rPr>
+              <a:t> </a:t>
+            </a:r>
+            <a:r>
+              <a:rPr lang="en-US" sz="2800" b="1" dirty="0" err="1">
+                <a:solidFill>
+                  <a:srgbClr val="0B1354"/>
+                </a:solidFill>
+                <a:latin typeface="Arial" pitchFamily="34" charset="0"/>
+                <a:ea typeface="Arial" pitchFamily="34" charset="-122"/>
+                <a:cs typeface="Arial" pitchFamily="34" charset="-120"/>
+              </a:rPr>
+              <a:t>thử</a:t>
+            </a:r>
+            <a:r>
+              <a:rPr lang="en-US" sz="2800" b="1" dirty="0">
+                <a:solidFill>
+                  <a:srgbClr val="0B1354"/>
+                </a:solidFill>
+                <a:latin typeface="Arial" pitchFamily="34" charset="0"/>
+                <a:ea typeface="Arial" pitchFamily="34" charset="-122"/>
+                <a:cs typeface="Arial" pitchFamily="34" charset="-120"/>
+              </a:rPr>
+              <a:t> API </a:t>
+            </a:r>
+            <a:r>
+              <a:rPr lang="en-US" sz="2800" b="1" dirty="0" err="1">
+                <a:solidFill>
+                  <a:srgbClr val="0B1354"/>
+                </a:solidFill>
+                <a:latin typeface="Arial" pitchFamily="34" charset="0"/>
+                <a:ea typeface="Arial" pitchFamily="34" charset="-122"/>
+                <a:cs typeface="Arial" pitchFamily="34" charset="-120"/>
+              </a:rPr>
+              <a:t>tự</a:t>
+            </a:r>
+            <a:r>
+              <a:rPr lang="en-US" sz="2800" b="1" dirty="0">
+                <a:solidFill>
+                  <a:srgbClr val="0B1354"/>
+                </a:solidFill>
+                <a:latin typeface="Arial" pitchFamily="34" charset="0"/>
+                <a:ea typeface="Arial" pitchFamily="34" charset="-122"/>
+                <a:cs typeface="Arial" pitchFamily="34" charset="-120"/>
+              </a:rPr>
+              <a:t> </a:t>
+            </a:r>
+            <a:r>
+              <a:rPr lang="en-US" sz="2800" b="1" dirty="0" err="1">
+                <a:solidFill>
+                  <a:srgbClr val="0B1354"/>
+                </a:solidFill>
+                <a:latin typeface="Arial" pitchFamily="34" charset="0"/>
+                <a:ea typeface="Arial" pitchFamily="34" charset="-122"/>
+                <a:cs typeface="Arial" pitchFamily="34" charset="-120"/>
+              </a:rPr>
+              <a:t>động</a:t>
+            </a:r>
+            <a:r>
+              <a:rPr lang="en-US" sz="2800" b="1" dirty="0">
+                <a:solidFill>
+                  <a:srgbClr val="0B1354"/>
+                </a:solidFill>
+                <a:latin typeface="Arial" pitchFamily="34" charset="0"/>
+                <a:ea typeface="Arial" pitchFamily="34" charset="-122"/>
+                <a:cs typeface="Arial" pitchFamily="34" charset="-120"/>
+              </a:rPr>
+              <a:t> </a:t>
+            </a:r>
+            <a:r>
+              <a:rPr lang="en-US" sz="2800" b="1" dirty="0" err="1">
+                <a:solidFill>
+                  <a:srgbClr val="0B1354"/>
+                </a:solidFill>
+                <a:latin typeface="Arial" pitchFamily="34" charset="0"/>
+                <a:ea typeface="Arial" pitchFamily="34" charset="-122"/>
+                <a:cs typeface="Arial" pitchFamily="34" charset="-120"/>
+              </a:rPr>
+              <a:t>dựa</a:t>
+            </a:r>
+            <a:r>
+              <a:rPr lang="en-US" sz="2800" b="1" dirty="0">
+                <a:solidFill>
+                  <a:srgbClr val="0B1354"/>
+                </a:solidFill>
+                <a:latin typeface="Arial" pitchFamily="34" charset="0"/>
+                <a:ea typeface="Arial" pitchFamily="34" charset="-122"/>
+                <a:cs typeface="Arial" pitchFamily="34" charset="-120"/>
+              </a:rPr>
+              <a:t> </a:t>
+            </a:r>
+            <a:r>
+              <a:rPr lang="en-US" sz="2800" b="1" dirty="0" err="1">
+                <a:solidFill>
+                  <a:srgbClr val="0B1354"/>
+                </a:solidFill>
+                <a:latin typeface="Arial" pitchFamily="34" charset="0"/>
+                <a:ea typeface="Arial" pitchFamily="34" charset="-122"/>
+                <a:cs typeface="Arial" pitchFamily="34" charset="-120"/>
+              </a:rPr>
+              <a:t>trên</a:t>
+            </a:r>
+            <a:r>
+              <a:rPr lang="en-US" sz="2800" b="1" dirty="0">
+                <a:solidFill>
+                  <a:srgbClr val="0B1354"/>
+                </a:solidFill>
+                <a:latin typeface="Arial" pitchFamily="34" charset="0"/>
+                <a:ea typeface="Arial" pitchFamily="34" charset="-122"/>
+                <a:cs typeface="Arial" pitchFamily="34" charset="-120"/>
+              </a:rPr>
+              <a:t> Git-friendly workflow </a:t>
+            </a:r>
+            <a:r>
+              <a:rPr lang="en-US" sz="2800" b="1" dirty="0" err="1">
+                <a:solidFill>
+                  <a:srgbClr val="0B1354"/>
+                </a:solidFill>
+                <a:latin typeface="Arial" pitchFamily="34" charset="0"/>
+                <a:ea typeface="Arial" pitchFamily="34" charset="-122"/>
+                <a:cs typeface="Arial" pitchFamily="34" charset="-120"/>
+              </a:rPr>
+              <a:t>với</a:t>
+            </a:r>
+            <a:r>
+              <a:rPr lang="en-US" sz="2800" b="1" dirty="0">
+                <a:solidFill>
+                  <a:srgbClr val="0B1354"/>
+                </a:solidFill>
+                <a:latin typeface="Arial" pitchFamily="34" charset="0"/>
+                <a:ea typeface="Arial" pitchFamily="34" charset="-122"/>
+                <a:cs typeface="Arial" pitchFamily="34" charset="-120"/>
+              </a:rPr>
+              <a:t> Bruno</a:t>
             </a:r>
             <a:endParaRPr lang="en-US" sz="2800" dirty="0"/>
           </a:p>
@@ -2508,6 +2395,13 @@
           </a:solidFill>
           <a:ln/>
         </p:spPr>
+        <p:txBody>
+          <a:bodyPr/>
+          <a:lstStyle/>
+          <a:p>
+            <a:endParaRPr lang="en-US"/>
+          </a:p>
+        </p:txBody>
       </p:sp>
       <p:sp>
         <p:nvSpPr>
@@ -2530,10 +2424,21 @@
           <a:bodyPr wrap="square" rtlCol="0" anchor="ctr"/>
           <a:lstStyle/>
           <a:p>
-            <a:pPr indent="0" marL="0">
+            <a:pPr marL="0" indent="0">
               <a:buNone/>
             </a:pPr>
             <a:r>
+              <a:rPr lang="en-US" sz="1300" dirty="0" err="1">
+                <a:solidFill>
+                  <a:srgbClr val="4A5568"/>
+                </a:solidFill>
+                <a:latin typeface="Arial" pitchFamily="34" charset="0"/>
+                <a:ea typeface="Arial" pitchFamily="34" charset="-122"/>
+                <a:cs typeface="Arial" pitchFamily="34" charset="-120"/>
+              </a:rPr>
+              <a:t>Nghiên</a:t>
+            </a:r>
+            <a:r>
               <a:rPr lang="en-US" sz="1300" dirty="0">
                 <a:solidFill>
                   <a:srgbClr val="4A5568"/>
@@ -2542,7 +2447,7 @@
                 <a:ea typeface="Arial" pitchFamily="34" charset="-122"/>
                 <a:cs typeface="Arial" pitchFamily="34" charset="-120"/>
               </a:rPr>
-              <a:t>Đồ án môn học: Nghiên cứu giải pháp Git-friendly workflow &amp; Thử nghiệm thực thi trên Andv-LMS</a:t>
+              <a:t> cứu giải pháp Git-friendly workflow &amp; Thử nghiệm thực thi trên Andv-LMS</a:t>
             </a:r>
             <a:endParaRPr lang="en-US" sz="1300" dirty="0"/>
           </a:p>
@@ -2572,6 +2477,13 @@
             <a:prstDash val="solid"/>
           </a:ln>
         </p:spPr>
+        <p:txBody>
+          <a:bodyPr/>
+          <a:lstStyle/>
+          <a:p>
+            <a:endParaRPr lang="en-US"/>
+          </a:p>
+        </p:txBody>
       </p:sp>
       <p:sp>
         <p:nvSpPr>
@@ -2594,7 +2506,7 @@
           <a:bodyPr wrap="square" rtlCol="0" anchor="ctr"/>
           <a:lstStyle/>
           <a:p>
-            <a:pPr indent="0" marL="0">
+            <a:pPr marL="0" indent="0">
               <a:lnSpc>
                 <a:spcPts val="1800"/>
               </a:lnSpc>
@@ -2611,12 +2523,17 @@
               </a:rPr>
               <a:t>Sinh viên thực hiện: </a:t>
             </a:r>
-            <a:pPr indent="0" marL="0">
-              <a:lnSpc>
-                <a:spcPts val="1800"/>
-              </a:lnSpc>
-              <a:buNone/>
-            </a:pPr>
+            <a:r>
+              <a:rPr lang="en-US" sz="1100" dirty="0" err="1">
+                <a:solidFill>
+                  <a:srgbClr val="1A202C"/>
+                </a:solidFill>
+                <a:latin typeface="Arial" pitchFamily="34" charset="0"/>
+                <a:ea typeface="Arial" pitchFamily="34" charset="-122"/>
+                <a:cs typeface="Arial" pitchFamily="34" charset="-120"/>
+              </a:rPr>
+              <a:t>Doãn</a:t>
+            </a:r>
             <a:r>
               <a:rPr lang="en-US" sz="1100" dirty="0">
                 <a:solidFill>
@@ -2626,14 +2543,9 @@
                 <a:ea typeface="Arial" pitchFamily="34" charset="-122"/>
                 <a:cs typeface="Arial" pitchFamily="34" charset="-120"/>
               </a:rPr>
-              <a:t>Nhóm nghiên cứu Andv-LMS   </a:t>
-            </a:r>
-            <a:pPr indent="0" marL="0">
-              <a:lnSpc>
-                <a:spcPts val="1800"/>
-              </a:lnSpc>
-              <a:buNone/>
-            </a:pPr>
+              <a:t> Văn An  
+</a:t>
+            </a:r>
             <a:r>
               <a:rPr lang="en-US" sz="1100" b="1" dirty="0">
                 <a:solidFill>
@@ -2643,49 +2555,8 @@
                 <a:ea typeface="Arial" pitchFamily="34" charset="-122"/>
                 <a:cs typeface="Arial" pitchFamily="34" charset="-120"/>
               </a:rPr>
-              <a:t>|   Môn học / Đồ án: </a:t>
-            </a:r>
-            <a:pPr indent="0" marL="0">
-              <a:lnSpc>
-                <a:spcPts val="1800"/>
-              </a:lnSpc>
-              <a:buNone/>
-            </a:pPr>
-            <a:r>
-              <a:rPr lang="en-US" sz="1100" dirty="0">
-                <a:solidFill>
-                  <a:srgbClr val="1A202C"/>
-                </a:solidFill>
-                <a:latin typeface="Arial" pitchFamily="34" charset="0"/>
-                <a:ea typeface="Arial" pitchFamily="34" charset="-122"/>
-                <a:cs typeface="Arial" pitchFamily="34" charset="-120"/>
-              </a:rPr>
-              <a:t>Kiểm thử phần mềm &amp; API Test
-</a:t>
-            </a:r>
-            <a:pPr indent="0" marL="0">
-              <a:lnSpc>
-                <a:spcPts val="1800"/>
-              </a:lnSpc>
-              <a:buNone/>
-            </a:pPr>
-            <a:r>
-              <a:rPr lang="en-US" sz="1100" b="1" dirty="0">
-                <a:solidFill>
-                  <a:srgbClr val="0B1354"/>
-                </a:solidFill>
-                <a:latin typeface="Arial" pitchFamily="34" charset="0"/>
-                <a:ea typeface="Arial" pitchFamily="34" charset="-122"/>
-                <a:cs typeface="Arial" pitchFamily="34" charset="-120"/>
-              </a:rPr>
               <a:t>Công nghệ ứng dụng: </a:t>
             </a:r>
-            <a:pPr indent="0" marL="0">
-              <a:lnSpc>
-                <a:spcPts val="1800"/>
-              </a:lnSpc>
-              <a:buNone/>
-            </a:pPr>
             <a:r>
               <a:rPr lang="en-US" sz="1100" b="1" dirty="0">
                 <a:solidFill>
@@ -2717,6 +2588,7 @@
         <a:solidFill>
           <a:srgbClr val="F8F9FD"/>
         </a:solidFill>
+        <a:effectLst/>
       </p:bgPr>
     </p:bg>
     <p:spTree>
@@ -2754,7 +2626,7 @@
           <a:bodyPr wrap="square" rtlCol="0" anchor="ctr"/>
           <a:lstStyle/>
           <a:p>
-            <a:pPr indent="0" marL="0">
+            <a:pPr marL="0" indent="0">
               <a:buNone/>
             </a:pPr>
             <a:r>
@@ -2793,7 +2665,7 @@
           <a:bodyPr wrap="square" rtlCol="0" anchor="t"/>
           <a:lstStyle/>
           <a:p>
-            <a:pPr indent="0" marL="0">
+            <a:pPr marL="0" indent="0">
               <a:buNone/>
             </a:pPr>
             <a:r>
@@ -2832,7 +2704,7 @@
           <a:bodyPr wrap="square" rtlCol="0" anchor="ctr"/>
           <a:lstStyle/>
           <a:p>
-            <a:pPr indent="0" marL="0">
+            <a:pPr marL="0" indent="0">
               <a:buNone/>
             </a:pPr>
             <a:r>
@@ -2874,6 +2746,13 @@
             <a:prstDash val="solid"/>
           </a:ln>
         </p:spPr>
+        <p:txBody>
+          <a:bodyPr/>
+          <a:lstStyle/>
+          <a:p>
+            <a:endParaRPr lang="en-US"/>
+          </a:p>
+        </p:txBody>
       </p:sp>
       <p:sp>
         <p:nvSpPr>
@@ -2896,7 +2775,7 @@
           <a:bodyPr wrap="square" rtlCol="0" anchor="ctr"/>
           <a:lstStyle/>
           <a:p>
-            <a:pPr indent="0" marL="0">
+            <a:pPr marL="0" indent="0">
               <a:buNone/>
             </a:pPr>
             <a:r>
@@ -2935,7 +2814,7 @@
           <a:bodyPr wrap="square" rtlCol="0" anchor="ctr"/>
           <a:lstStyle/>
           <a:p>
-            <a:pPr indent="0" marL="0">
+            <a:pPr marL="0" indent="0">
               <a:lnSpc>
                 <a:spcPts val="1500"/>
               </a:lnSpc>
@@ -2952,12 +2831,6 @@
               </a:rPr>
               <a:t>• Đăng nhập Tài khoản Seed: </a:t>
             </a:r>
-            <a:pPr indent="0" marL="0">
-              <a:lnSpc>
-                <a:spcPts val="1500"/>
-              </a:lnSpc>
-              <a:buNone/>
-            </a:pPr>
             <a:r>
               <a:rPr lang="en-US" sz="1050" dirty="0">
                 <a:solidFill>
@@ -2970,12 +2843,6 @@
               <a:t>Gửi credentials user/admin tới `/api/auth/sign-in/email`, nhận session token.
 </a:t>
             </a:r>
-            <a:pPr indent="0" marL="0">
-              <a:lnSpc>
-                <a:spcPts val="1500"/>
-              </a:lnSpc>
-              <a:buNone/>
-            </a:pPr>
             <a:r>
               <a:rPr lang="en-US" sz="1050" b="1" dirty="0">
                 <a:solidFill>
@@ -2987,12 +2854,6 @@
               </a:rPr>
               <a:t>• Đối chiếu 2 Cơ chế Session: </a:t>
             </a:r>
-            <a:pPr indent="0" marL="0">
-              <a:lnSpc>
-                <a:spcPts val="1500"/>
-              </a:lnSpc>
-              <a:buNone/>
-            </a:pPr>
             <a:r>
               <a:rPr lang="en-US" sz="1050" dirty="0">
                 <a:solidFill>
@@ -3005,12 +2866,6 @@
               <a:t>Xác minh song song Direct Better Auth Session (`/api/auth/get-session`) và API V1 Session (`/api/v1/auth/session`).
 </a:t>
             </a:r>
-            <a:pPr indent="0" marL="0">
-              <a:lnSpc>
-                <a:spcPts val="1500"/>
-              </a:lnSpc>
-              <a:buNone/>
-            </a:pPr>
             <a:r>
               <a:rPr lang="en-US" sz="1050" b="1" dirty="0">
                 <a:solidFill>
@@ -3022,12 +2877,6 @@
               </a:rPr>
               <a:t>• Vòng đời Quản lý Tài khoản: </a:t>
             </a:r>
-            <a:pPr indent="0" marL="0">
-              <a:lnSpc>
-                <a:spcPts val="1500"/>
-              </a:lnSpc>
-              <a:buNone/>
-            </a:pPr>
             <a:r>
               <a:rPr lang="en-US" sz="1050" dirty="0">
                 <a:solidFill>
@@ -3067,6 +2916,13 @@
             <a:prstDash val="solid"/>
           </a:ln>
         </p:spPr>
+        <p:txBody>
+          <a:bodyPr/>
+          <a:lstStyle/>
+          <a:p>
+            <a:endParaRPr lang="en-US"/>
+          </a:p>
+        </p:txBody>
       </p:sp>
       <p:sp>
         <p:nvSpPr>
@@ -3089,7 +2945,7 @@
           <a:bodyPr wrap="square" rtlCol="0" anchor="ctr"/>
           <a:lstStyle/>
           <a:p>
-            <a:pPr indent="0" marL="0">
+            <a:pPr marL="0" indent="0">
               <a:buNone/>
             </a:pPr>
             <a:r>
@@ -3128,7 +2984,7 @@
           <a:bodyPr wrap="square" rtlCol="0" anchor="ctr"/>
           <a:lstStyle/>
           <a:p>
-            <a:pPr indent="0" marL="0">
+            <a:pPr marL="0" indent="0">
               <a:lnSpc>
                 <a:spcPts val="1500"/>
               </a:lnSpc>
@@ -3145,12 +3001,6 @@
               </a:rPr>
               <a:t>• Ranh giới 401 Unauthorized: </a:t>
             </a:r>
-            <a:pPr indent="0" marL="0">
-              <a:lnSpc>
-                <a:spcPts val="1500"/>
-              </a:lnSpc>
-              <a:buNone/>
-            </a:pPr>
             <a:r>
               <a:rPr lang="en-US" sz="1050" dirty="0">
                 <a:solidFill>
@@ -3163,12 +3013,6 @@
               <a:t>Chặn 100% người dùng chưa đăng nhập khi truy cập các route protected (lesson content, profile, checkout).
 </a:t>
             </a:r>
-            <a:pPr indent="0" marL="0">
-              <a:lnSpc>
-                <a:spcPts val="1500"/>
-              </a:lnSpc>
-              <a:buNone/>
-            </a:pPr>
             <a:r>
               <a:rPr lang="en-US" sz="1050" b="1" dirty="0">
                 <a:solidFill>
@@ -3180,12 +3024,6 @@
               </a:rPr>
               <a:t>• Ranh giới 403 Forbidden: </a:t>
             </a:r>
-            <a:pPr indent="0" marL="0">
-              <a:lnSpc>
-                <a:spcPts val="1500"/>
-              </a:lnSpc>
-              <a:buNone/>
-            </a:pPr>
             <a:r>
               <a:rPr lang="en-US" sz="1050" dirty="0">
                 <a:solidFill>
@@ -3198,12 +3036,6 @@
               <a:t>Chặn người dùng thường (Role User) khi cố tình truy cập các API Quản trị Admin (tạo khóa học, cập nhật bài học, xem danh sách user).
 </a:t>
             </a:r>
-            <a:pPr indent="0" marL="0">
-              <a:lnSpc>
-                <a:spcPts val="1500"/>
-              </a:lnSpc>
-              <a:buNone/>
-            </a:pPr>
             <a:r>
               <a:rPr lang="en-US" sz="1050" b="1" dirty="0">
                 <a:solidFill>
@@ -3215,12 +3047,6 @@
               </a:rPr>
               <a:t>• Đảm bảo tính Toàn vẹn Phân quyền: </a:t>
             </a:r>
-            <a:pPr indent="0" marL="0">
-              <a:lnSpc>
-                <a:spcPts val="1500"/>
-              </a:lnSpc>
-              <a:buNone/>
-            </a:pPr>
             <a:r>
               <a:rPr lang="en-US" sz="1050" dirty="0">
                 <a:solidFill>
@@ -3252,6 +3078,7 @@
         <a:solidFill>
           <a:srgbClr val="F8F9FD"/>
         </a:solidFill>
+        <a:effectLst/>
       </p:bgPr>
     </p:bg>
     <p:spTree>
@@ -3289,7 +3116,7 @@
           <a:bodyPr wrap="square" rtlCol="0" anchor="ctr"/>
           <a:lstStyle/>
           <a:p>
-            <a:pPr indent="0" marL="0">
+            <a:pPr marL="0" indent="0">
               <a:buNone/>
             </a:pPr>
             <a:r>
@@ -3328,7 +3155,7 @@
           <a:bodyPr wrap="square" rtlCol="0" anchor="t"/>
           <a:lstStyle/>
           <a:p>
-            <a:pPr indent="0" marL="0">
+            <a:pPr marL="0" indent="0">
               <a:buNone/>
             </a:pPr>
             <a:r>
@@ -3367,7 +3194,7 @@
           <a:bodyPr wrap="square" rtlCol="0" anchor="ctr"/>
           <a:lstStyle/>
           <a:p>
-            <a:pPr indent="0" marL="0">
+            <a:pPr marL="0" indent="0">
               <a:buNone/>
             </a:pPr>
             <a:r>
@@ -3409,6 +3236,13 @@
             <a:prstDash val="solid"/>
           </a:ln>
         </p:spPr>
+        <p:txBody>
+          <a:bodyPr/>
+          <a:lstStyle/>
+          <a:p>
+            <a:endParaRPr lang="en-US"/>
+          </a:p>
+        </p:txBody>
       </p:sp>
       <p:sp>
         <p:nvSpPr>
@@ -3431,7 +3265,7 @@
           <a:bodyPr wrap="square" rtlCol="0" anchor="ctr"/>
           <a:lstStyle/>
           <a:p>
-            <a:pPr algn="ctr" indent="0" marL="0">
+            <a:pPr marL="0" indent="0" algn="ctr">
               <a:buNone/>
             </a:pPr>
             <a:r>
@@ -3470,7 +3304,7 @@
           <a:bodyPr wrap="square" rtlCol="0" anchor="ctr"/>
           <a:lstStyle/>
           <a:p>
-            <a:pPr algn="ctr" indent="0" marL="0">
+            <a:pPr marL="0" indent="0" algn="ctr">
               <a:buNone/>
             </a:pPr>
             <a:r>
@@ -3509,7 +3343,7 @@
           <a:bodyPr wrap="square" rtlCol="0" anchor="ctr"/>
           <a:lstStyle/>
           <a:p>
-            <a:pPr indent="0" marL="0">
+            <a:pPr marL="0" indent="0">
               <a:lnSpc>
                 <a:spcPts val="1400"/>
               </a:lnSpc>
@@ -3554,6 +3388,13 @@
             <a:prstDash val="solid"/>
           </a:ln>
         </p:spPr>
+        <p:txBody>
+          <a:bodyPr/>
+          <a:lstStyle/>
+          <a:p>
+            <a:endParaRPr lang="en-US"/>
+          </a:p>
+        </p:txBody>
       </p:sp>
       <p:sp>
         <p:nvSpPr>
@@ -3576,7 +3417,7 @@
           <a:bodyPr wrap="square" rtlCol="0" anchor="ctr"/>
           <a:lstStyle/>
           <a:p>
-            <a:pPr algn="ctr" indent="0" marL="0">
+            <a:pPr marL="0" indent="0" algn="ctr">
               <a:buNone/>
             </a:pPr>
             <a:r>
@@ -3615,7 +3456,7 @@
           <a:bodyPr wrap="square" rtlCol="0" anchor="ctr"/>
           <a:lstStyle/>
           <a:p>
-            <a:pPr algn="ctr" indent="0" marL="0">
+            <a:pPr marL="0" indent="0" algn="ctr">
               <a:buNone/>
             </a:pPr>
             <a:r>
@@ -3654,7 +3495,7 @@
           <a:bodyPr wrap="square" rtlCol="0" anchor="ctr"/>
           <a:lstStyle/>
           <a:p>
-            <a:pPr indent="0" marL="0">
+            <a:pPr marL="0" indent="0">
               <a:lnSpc>
                 <a:spcPts val="1400"/>
               </a:lnSpc>
@@ -3699,6 +3540,13 @@
             <a:prstDash val="solid"/>
           </a:ln>
         </p:spPr>
+        <p:txBody>
+          <a:bodyPr/>
+          <a:lstStyle/>
+          <a:p>
+            <a:endParaRPr lang="en-US"/>
+          </a:p>
+        </p:txBody>
       </p:sp>
       <p:sp>
         <p:nvSpPr>
@@ -3721,7 +3569,7 @@
           <a:bodyPr wrap="square" rtlCol="0" anchor="ctr"/>
           <a:lstStyle/>
           <a:p>
-            <a:pPr algn="ctr" indent="0" marL="0">
+            <a:pPr marL="0" indent="0" algn="ctr">
               <a:buNone/>
             </a:pPr>
             <a:r>
@@ -3760,7 +3608,7 @@
           <a:bodyPr wrap="square" rtlCol="0" anchor="ctr"/>
           <a:lstStyle/>
           <a:p>
-            <a:pPr algn="ctr" indent="0" marL="0">
+            <a:pPr marL="0" indent="0" algn="ctr">
               <a:buNone/>
             </a:pPr>
             <a:r>
@@ -3799,7 +3647,7 @@
           <a:bodyPr wrap="square" rtlCol="0" anchor="ctr"/>
           <a:lstStyle/>
           <a:p>
-            <a:pPr indent="0" marL="0">
+            <a:pPr marL="0" indent="0">
               <a:lnSpc>
                 <a:spcPts val="1400"/>
               </a:lnSpc>
@@ -3844,6 +3692,13 @@
             <a:prstDash val="solid"/>
           </a:ln>
         </p:spPr>
+        <p:txBody>
+          <a:bodyPr/>
+          <a:lstStyle/>
+          <a:p>
+            <a:endParaRPr lang="en-US"/>
+          </a:p>
+        </p:txBody>
       </p:sp>
       <p:sp>
         <p:nvSpPr>
@@ -3866,7 +3721,7 @@
           <a:bodyPr wrap="square" rtlCol="0" anchor="ctr"/>
           <a:lstStyle/>
           <a:p>
-            <a:pPr algn="ctr" indent="0" marL="0">
+            <a:pPr marL="0" indent="0" algn="ctr">
               <a:buNone/>
             </a:pPr>
             <a:r>
@@ -3905,7 +3760,7 @@
           <a:bodyPr wrap="square" rtlCol="0" anchor="ctr"/>
           <a:lstStyle/>
           <a:p>
-            <a:pPr algn="ctr" indent="0" marL="0">
+            <a:pPr marL="0" indent="0" algn="ctr">
               <a:buNone/>
             </a:pPr>
             <a:r>
@@ -3944,7 +3799,7 @@
           <a:bodyPr wrap="square" rtlCol="0" anchor="ctr"/>
           <a:lstStyle/>
           <a:p>
-            <a:pPr indent="0" marL="0">
+            <a:pPr marL="0" indent="0">
               <a:lnSpc>
                 <a:spcPts val="1400"/>
               </a:lnSpc>
@@ -3981,6 +3836,7 @@
         <a:solidFill>
           <a:srgbClr val="F8F9FD"/>
         </a:solidFill>
+        <a:effectLst/>
       </p:bgPr>
     </p:bg>
     <p:spTree>
@@ -4018,7 +3874,7 @@
           <a:bodyPr wrap="square" rtlCol="0" anchor="ctr"/>
           <a:lstStyle/>
           <a:p>
-            <a:pPr indent="0" marL="0">
+            <a:pPr marL="0" indent="0">
               <a:buNone/>
             </a:pPr>
             <a:r>
@@ -4057,7 +3913,7 @@
           <a:bodyPr wrap="square" rtlCol="0" anchor="t"/>
           <a:lstStyle/>
           <a:p>
-            <a:pPr indent="0" marL="0">
+            <a:pPr marL="0" indent="0">
               <a:buNone/>
             </a:pPr>
             <a:r>
@@ -4096,7 +3952,7 @@
           <a:bodyPr wrap="square" rtlCol="0" anchor="ctr"/>
           <a:lstStyle/>
           <a:p>
-            <a:pPr indent="0" marL="0">
+            <a:pPr marL="0" indent="0">
               <a:buNone/>
             </a:pPr>
             <a:r>
@@ -4135,7 +3991,7 @@
           <a:bodyPr wrap="square" rtlCol="0" anchor="ctr"/>
           <a:lstStyle/>
           <a:p>
-            <a:pPr indent="0" marL="0">
+            <a:pPr marL="0" indent="0">
               <a:buNone/>
             </a:pPr>
             <a:r>
@@ -4155,14 +4011,14 @@
       </p:sp>
       <p:pic>
         <p:nvPicPr>
-          <p:cNvPr id="6" name="Image 0" descr="/home/andv/personal/andv-lms/docs/report/images/hinh-4-sequence-stripe-webhook.png">    </p:cNvPr>
+          <p:cNvPr id="6" name="Image 0" descr="/home/andv/personal/andv-lms/docs/report/images/hinh-4-sequence-stripe-webhook.png"/>
           <p:cNvPicPr>
             <a:picLocks noChangeAspect="1"/>
           </p:cNvPicPr>
           <p:nvPr/>
         </p:nvPicPr>
         <p:blipFill>
-          <a:blip r:embed="rId1"/>
+          <a:blip r:embed="rId3"/>
           <a:stretch>
             <a:fillRect/>
           </a:stretch>
@@ -4193,6 +4049,7 @@
         <a:solidFill>
           <a:srgbClr val="F8F9FD"/>
         </a:solidFill>
+        <a:effectLst/>
       </p:bgPr>
     </p:bg>
     <p:spTree>
@@ -4230,7 +4087,7 @@
           <a:bodyPr wrap="square" rtlCol="0" anchor="ctr"/>
           <a:lstStyle/>
           <a:p>
-            <a:pPr indent="0" marL="0">
+            <a:pPr marL="0" indent="0">
               <a:buNone/>
             </a:pPr>
             <a:r>
@@ -4269,7 +4126,7 @@
           <a:bodyPr wrap="square" rtlCol="0" anchor="t"/>
           <a:lstStyle/>
           <a:p>
-            <a:pPr indent="0" marL="0">
+            <a:pPr marL="0" indent="0">
               <a:buNone/>
             </a:pPr>
             <a:r>
@@ -4308,7 +4165,7 @@
           <a:bodyPr wrap="square" rtlCol="0" anchor="ctr"/>
           <a:lstStyle/>
           <a:p>
-            <a:pPr indent="0" marL="0">
+            <a:pPr marL="0" indent="0">
               <a:buNone/>
             </a:pPr>
             <a:r>
@@ -4350,6 +4207,13 @@
             <a:prstDash val="solid"/>
           </a:ln>
         </p:spPr>
+        <p:txBody>
+          <a:bodyPr/>
+          <a:lstStyle/>
+          <a:p>
+            <a:endParaRPr lang="en-US"/>
+          </a:p>
+        </p:txBody>
       </p:sp>
       <p:sp>
         <p:nvSpPr>
@@ -4372,7 +4236,7 @@
           <a:bodyPr wrap="square" rtlCol="0" anchor="ctr"/>
           <a:lstStyle/>
           <a:p>
-            <a:pPr indent="0" marL="0">
+            <a:pPr marL="0" indent="0">
               <a:buNone/>
             </a:pPr>
             <a:r>
@@ -4411,7 +4275,7 @@
           <a:bodyPr wrap="square" rtlCol="0" anchor="ctr"/>
           <a:lstStyle/>
           <a:p>
-            <a:pPr indent="0" marL="0">
+            <a:pPr marL="0" indent="0">
               <a:buNone/>
             </a:pPr>
             <a:r>
@@ -4453,6 +4317,13 @@
             <a:prstDash val="solid"/>
           </a:ln>
         </p:spPr>
+        <p:txBody>
+          <a:bodyPr/>
+          <a:lstStyle/>
+          <a:p>
+            <a:endParaRPr lang="en-US"/>
+          </a:p>
+        </p:txBody>
       </p:sp>
       <p:sp>
         <p:nvSpPr>
@@ -4475,7 +4346,7 @@
           <a:bodyPr wrap="square" rtlCol="0" anchor="ctr"/>
           <a:lstStyle/>
           <a:p>
-            <a:pPr indent="0" marL="0">
+            <a:pPr marL="0" indent="0">
               <a:buNone/>
             </a:pPr>
             <a:r>
@@ -4514,7 +4385,7 @@
           <a:bodyPr wrap="square" rtlCol="0" anchor="ctr"/>
           <a:lstStyle/>
           <a:p>
-            <a:pPr indent="0" marL="0">
+            <a:pPr marL="0" indent="0">
               <a:buNone/>
             </a:pPr>
             <a:r>
@@ -4556,6 +4427,13 @@
             <a:prstDash val="solid"/>
           </a:ln>
         </p:spPr>
+        <p:txBody>
+          <a:bodyPr/>
+          <a:lstStyle/>
+          <a:p>
+            <a:endParaRPr lang="en-US"/>
+          </a:p>
+        </p:txBody>
       </p:sp>
       <p:sp>
         <p:nvSpPr>
@@ -4578,7 +4456,7 @@
           <a:bodyPr wrap="square" rtlCol="0" anchor="ctr"/>
           <a:lstStyle/>
           <a:p>
-            <a:pPr indent="0" marL="0">
+            <a:pPr marL="0" indent="0">
               <a:buNone/>
             </a:pPr>
             <a:r>
@@ -4617,7 +4495,7 @@
           <a:bodyPr wrap="square" rtlCol="0" anchor="ctr"/>
           <a:lstStyle/>
           <a:p>
-            <a:pPr indent="0" marL="0">
+            <a:pPr marL="0" indent="0">
               <a:buNone/>
             </a:pPr>
             <a:r>
@@ -4651,6 +4529,7 @@
         <a:solidFill>
           <a:srgbClr val="F8F9FD"/>
         </a:solidFill>
+        <a:effectLst/>
       </p:bgPr>
     </p:bg>
     <p:spTree>
@@ -4688,7 +4567,7 @@
           <a:bodyPr wrap="square" rtlCol="0" anchor="ctr"/>
           <a:lstStyle/>
           <a:p>
-            <a:pPr indent="0" marL="0">
+            <a:pPr marL="0" indent="0">
               <a:buNone/>
             </a:pPr>
             <a:r>
@@ -4727,7 +4606,7 @@
           <a:bodyPr wrap="square" rtlCol="0" anchor="t"/>
           <a:lstStyle/>
           <a:p>
-            <a:pPr indent="0" marL="0">
+            <a:pPr marL="0" indent="0">
               <a:buNone/>
             </a:pPr>
             <a:r>
@@ -4766,7 +4645,7 @@
           <a:bodyPr wrap="square" rtlCol="0" anchor="ctr"/>
           <a:lstStyle/>
           <a:p>
-            <a:pPr indent="0" marL="0">
+            <a:pPr marL="0" indent="0">
               <a:buNone/>
             </a:pPr>
             <a:r>
@@ -4805,7 +4684,7 @@
           <a:bodyPr wrap="square" rtlCol="0" anchor="ctr"/>
           <a:lstStyle/>
           <a:p>
-            <a:pPr indent="0" marL="0">
+            <a:pPr marL="0" indent="0">
               <a:buNone/>
             </a:pPr>
             <a:r>
@@ -4825,14 +4704,14 @@
       </p:sp>
       <p:pic>
         <p:nvPicPr>
-          <p:cNvPr id="6" name="Image 0" descr="/home/andv/personal/andv-lms/docs/report/images/hinh-6-giao-dien-bruno-desktop.png">    </p:cNvPr>
+          <p:cNvPr id="6" name="Image 0" descr="/home/andv/personal/andv-lms/docs/report/images/hinh-6-giao-dien-bruno-desktop.png"/>
           <p:cNvPicPr>
             <a:picLocks noChangeAspect="1"/>
           </p:cNvPicPr>
           <p:nvPr/>
         </p:nvPicPr>
         <p:blipFill>
-          <a:blip r:embed="rId1"/>
+          <a:blip r:embed="rId3"/>
           <a:stretch>
             <a:fillRect/>
           </a:stretch>
@@ -4863,6 +4742,7 @@
         <a:solidFill>
           <a:srgbClr val="F8F9FD"/>
         </a:solidFill>
+        <a:effectLst/>
       </p:bgPr>
     </p:bg>
     <p:spTree>
@@ -4900,7 +4780,7 @@
           <a:bodyPr wrap="square" rtlCol="0" anchor="ctr"/>
           <a:lstStyle/>
           <a:p>
-            <a:pPr indent="0" marL="0">
+            <a:pPr marL="0" indent="0">
               <a:buNone/>
             </a:pPr>
             <a:r>
@@ -4939,7 +4819,7 @@
           <a:bodyPr wrap="square" rtlCol="0" anchor="t"/>
           <a:lstStyle/>
           <a:p>
-            <a:pPr indent="0" marL="0">
+            <a:pPr marL="0" indent="0">
               <a:buNone/>
             </a:pPr>
             <a:r>
@@ -4978,7 +4858,7 @@
           <a:bodyPr wrap="square" rtlCol="0" anchor="ctr"/>
           <a:lstStyle/>
           <a:p>
-            <a:pPr indent="0" marL="0">
+            <a:pPr marL="0" indent="0">
               <a:buNone/>
             </a:pPr>
             <a:r>
@@ -5017,7 +4897,7 @@
           <a:bodyPr wrap="square" rtlCol="0" anchor="ctr"/>
           <a:lstStyle/>
           <a:p>
-            <a:pPr indent="0" marL="0">
+            <a:pPr marL="0" indent="0">
               <a:buNone/>
             </a:pPr>
             <a:r>
@@ -5037,14 +4917,14 @@
       </p:sp>
       <p:pic>
         <p:nvPicPr>
-          <p:cNvPr id="6" name="Image 0" descr="/home/andv/personal/andv-lms/docs/report/images/hinh-3-flowchart-bruno-cli.png">    </p:cNvPr>
+          <p:cNvPr id="6" name="Image 0" descr="/home/andv/personal/andv-lms/docs/report/images/hinh-3-flowchart-bruno-cli.png"/>
           <p:cNvPicPr>
             <a:picLocks noChangeAspect="1"/>
           </p:cNvPicPr>
           <p:nvPr/>
         </p:nvPicPr>
         <p:blipFill>
-          <a:blip r:embed="rId1"/>
+          <a:blip r:embed="rId3"/>
           <a:stretch>
             <a:fillRect/>
           </a:stretch>
@@ -5075,6 +4955,7 @@
         <a:solidFill>
           <a:srgbClr val="F8F9FD"/>
         </a:solidFill>
+        <a:effectLst/>
       </p:bgPr>
     </p:bg>
     <p:spTree>
@@ -5112,7 +4993,7 @@
           <a:bodyPr wrap="square" rtlCol="0" anchor="ctr"/>
           <a:lstStyle/>
           <a:p>
-            <a:pPr indent="0" marL="0">
+            <a:pPr marL="0" indent="0">
               <a:buNone/>
             </a:pPr>
             <a:r>
@@ -5151,7 +5032,7 @@
           <a:bodyPr wrap="square" rtlCol="0" anchor="t"/>
           <a:lstStyle/>
           <a:p>
-            <a:pPr indent="0" marL="0">
+            <a:pPr marL="0" indent="0">
               <a:buNone/>
             </a:pPr>
             <a:r>
@@ -5190,7 +5071,7 @@
           <a:bodyPr wrap="square" rtlCol="0" anchor="ctr"/>
           <a:lstStyle/>
           <a:p>
-            <a:pPr indent="0" marL="0">
+            <a:pPr marL="0" indent="0">
               <a:buNone/>
             </a:pPr>
             <a:r>
@@ -5217,7 +5098,7 @@
         <p:spPr>
           <a:xfrm>
             <a:off x="548640" y="804672"/>
-            <a:ext cx="8046720" cy="256032"/>
+            <a:ext cx="11000000" cy="256032"/>
           </a:xfrm>
           <a:prstGeom prst="rect">
             <a:avLst/>
@@ -5229,7 +5110,7 @@
           <a:bodyPr wrap="square" rtlCol="0" anchor="ctr"/>
           <a:lstStyle/>
           <a:p>
-            <a:pPr indent="0" marL="0">
+            <a:pPr marL="0" indent="0">
               <a:buNone/>
             </a:pPr>
             <a:r>
@@ -5241,7 +5122,7 @@
                 <a:ea typeface="Arial" pitchFamily="34" charset="-122"/>
                 <a:cs typeface="Arial" pitchFamily="34" charset="-120"/>
               </a:rPr>
-              <a:t>• Kết quả: 100% PASS trên toàn bộ 133+ tệp kịch bản kiểm thử `.bru` và Bao phủ 100% danh mục route backend Fastify</a:t>
+              <a:t>• 100% PASS — Collection: 142 request | 4 script: 138 request, 212 assertions | Coverage: các route phù hợp API test</a:t>
             </a:r>
             <a:endParaRPr lang="en-US" sz="1050" dirty="0"/>
           </a:p>
@@ -5249,14 +5130,14 @@
       </p:sp>
       <p:pic>
         <p:nvPicPr>
-          <p:cNvPr id="6" name="Image 0" descr="/home/andv/personal/andv-lms/docs/report/images/hinh-7-ket-qua-bruno-cli.png">    </p:cNvPr>
+          <p:cNvPr id="6" name="Image 0" descr="/home/andv/personal/andv-lms/docs/report/images/hinh-7-ket-qua-bruno-cli.png"/>
           <p:cNvPicPr>
             <a:picLocks noChangeAspect="1"/>
           </p:cNvPicPr>
           <p:nvPr/>
         </p:nvPicPr>
         <p:blipFill>
-          <a:blip r:embed="rId1"/>
+          <a:blip r:embed="rId3"/>
           <a:stretch>
             <a:fillRect/>
           </a:stretch>
@@ -5273,14 +5154,14 @@
       </p:pic>
       <p:pic>
         <p:nvPicPr>
-          <p:cNvPr id="7" name="Image 1" descr="/home/andv/personal/andv-lms/docs/report/images/hinh-5-do-bao-phu-api.png">    </p:cNvPr>
+          <p:cNvPr id="7" name="Image 1" descr="/home/andv/personal/andv-lms/docs/report/images/hinh-5-do-bao-phu-api.png"/>
           <p:cNvPicPr>
             <a:picLocks noChangeAspect="1"/>
           </p:cNvPicPr>
           <p:nvPr/>
         </p:nvPicPr>
         <p:blipFill>
-          <a:blip r:embed="rId2"/>
+          <a:blip r:embed="rId4"/>
           <a:stretch>
             <a:fillRect/>
           </a:stretch>
@@ -5311,6 +5192,7 @@
         <a:solidFill>
           <a:srgbClr val="F8F9FD"/>
         </a:solidFill>
+        <a:effectLst/>
       </p:bgPr>
     </p:bg>
     <p:spTree>
@@ -5348,7 +5230,7 @@
           <a:bodyPr wrap="square" rtlCol="0" anchor="ctr"/>
           <a:lstStyle/>
           <a:p>
-            <a:pPr indent="0" marL="0">
+            <a:pPr marL="0" indent="0">
               <a:buNone/>
             </a:pPr>
             <a:r>
@@ -5387,7 +5269,7 @@
           <a:bodyPr wrap="square" rtlCol="0" anchor="t"/>
           <a:lstStyle/>
           <a:p>
-            <a:pPr indent="0" marL="0">
+            <a:pPr marL="0" indent="0">
               <a:buNone/>
             </a:pPr>
             <a:r>
@@ -5426,7 +5308,7 @@
           <a:bodyPr wrap="square" rtlCol="0" anchor="ctr"/>
           <a:lstStyle/>
           <a:p>
-            <a:pPr indent="0" marL="0">
+            <a:pPr marL="0" indent="0">
               <a:buNone/>
             </a:pPr>
             <a:r>
@@ -5468,6 +5350,13 @@
             <a:prstDash val="solid"/>
           </a:ln>
         </p:spPr>
+        <p:txBody>
+          <a:bodyPr/>
+          <a:lstStyle/>
+          <a:p>
+            <a:endParaRPr lang="en-US"/>
+          </a:p>
+        </p:txBody>
       </p:sp>
       <p:sp>
         <p:nvSpPr>
@@ -5490,7 +5379,7 @@
           <a:bodyPr wrap="square" rtlCol="0" anchor="ctr"/>
           <a:lstStyle/>
           <a:p>
-            <a:pPr indent="0" marL="0">
+            <a:pPr marL="0" indent="0">
               <a:buNone/>
             </a:pPr>
             <a:r>
@@ -5502,7 +5391,40 @@
                 <a:ea typeface="Arial" pitchFamily="34" charset="-122"/>
                 <a:cs typeface="Arial" pitchFamily="34" charset="-120"/>
               </a:rPr>
-              <a:t>⚠️ Hạn chế Hiện tại của Bài tập lớn</a:t>
+              <a:t>⚠️ Hạn chế </a:t>
+            </a:r>
+            <a:r>
+              <a:rPr lang="en-US" sz="1300" b="1" dirty="0" err="1">
+                <a:solidFill>
+                  <a:srgbClr val="0B1354"/>
+                </a:solidFill>
+                <a:latin typeface="Arial" pitchFamily="34" charset="0"/>
+                <a:ea typeface="Arial" pitchFamily="34" charset="-122"/>
+                <a:cs typeface="Arial" pitchFamily="34" charset="-120"/>
+              </a:rPr>
+              <a:t>Hiện</a:t>
+            </a:r>
+            <a:r>
+              <a:rPr lang="en-US" sz="1300" b="1" dirty="0">
+                <a:solidFill>
+                  <a:srgbClr val="0B1354"/>
+                </a:solidFill>
+                <a:latin typeface="Arial" pitchFamily="34" charset="0"/>
+                <a:ea typeface="Arial" pitchFamily="34" charset="-122"/>
+                <a:cs typeface="Arial" pitchFamily="34" charset="-120"/>
+              </a:rPr>
+              <a:t> </a:t>
+            </a:r>
+            <a:r>
+              <a:rPr lang="en-US" sz="1300" b="1" dirty="0" err="1">
+                <a:solidFill>
+                  <a:srgbClr val="0B1354"/>
+                </a:solidFill>
+                <a:latin typeface="Arial" pitchFamily="34" charset="0"/>
+                <a:ea typeface="Arial" pitchFamily="34" charset="-122"/>
+                <a:cs typeface="Arial" pitchFamily="34" charset="-120"/>
+              </a:rPr>
+              <a:t>tại</a:t>
             </a:r>
             <a:endParaRPr lang="en-US" sz="1300" dirty="0"/>
           </a:p>
@@ -5529,7 +5451,7 @@
           <a:bodyPr wrap="square" rtlCol="0" anchor="ctr"/>
           <a:lstStyle/>
           <a:p>
-            <a:pPr indent="0" marL="0">
+            <a:pPr marL="0" indent="0">
               <a:lnSpc>
                 <a:spcPts val="1500"/>
               </a:lnSpc>
@@ -5547,12 +5469,6 @@
               <a:t>1. Chưa tích hợp CI/CD tự động:
 </a:t>
             </a:r>
-            <a:pPr indent="0" marL="0">
-              <a:lnSpc>
-                <a:spcPts val="1500"/>
-              </a:lnSpc>
-              <a:buNone/>
-            </a:pPr>
             <a:r>
               <a:rPr lang="en-US" sz="1050" dirty="0">
                 <a:solidFill>
@@ -5565,12 +5481,6 @@
               <a:t>Hiện tại việc thực thi bộ test dựa trên script npm cục bộ, chưa gắn vào GitHub Actions pipeline.
 </a:t>
             </a:r>
-            <a:pPr indent="0" marL="0">
-              <a:lnSpc>
-                <a:spcPts val="1500"/>
-              </a:lnSpc>
-              <a:buNone/>
-            </a:pPr>
             <a:r>
               <a:rPr lang="en-US" sz="1050" b="1" dirty="0">
                 <a:solidFill>
@@ -5583,12 +5493,6 @@
               <a:t>2. Phụ thuộc vào dữ liệu Seed định danh:
 </a:t>
             </a:r>
-            <a:pPr indent="0" marL="0">
-              <a:lnSpc>
-                <a:spcPts val="1500"/>
-              </a:lnSpc>
-              <a:buNone/>
-            </a:pPr>
             <a:r>
               <a:rPr lang="en-US" sz="1050" dirty="0">
                 <a:solidFill>
@@ -5601,12 +5505,6 @@
               <a:t>Cần đảm bảo database kiểm thử được reset/seed đúng trạng thái trước khi chạy kịch bản full.
 </a:t>
             </a:r>
-            <a:pPr indent="0" marL="0">
-              <a:lnSpc>
-                <a:spcPts val="1500"/>
-              </a:lnSpc>
-              <a:buNone/>
-            </a:pPr>
             <a:r>
               <a:rPr lang="en-US" sz="1050" b="1" dirty="0">
                 <a:solidFill>
@@ -5619,12 +5517,6 @@
               <a:t>3. Chưa mở rộng Fuzzing &amp; Load Testing:
 </a:t>
             </a:r>
-            <a:pPr indent="0" marL="0">
-              <a:lnSpc>
-                <a:spcPts val="1500"/>
-              </a:lnSpc>
-              <a:buNone/>
-            </a:pPr>
             <a:r>
               <a:rPr lang="en-US" sz="1050" dirty="0">
                 <a:solidFill>
@@ -5664,6 +5556,13 @@
             <a:prstDash val="solid"/>
           </a:ln>
         </p:spPr>
+        <p:txBody>
+          <a:bodyPr/>
+          <a:lstStyle/>
+          <a:p>
+            <a:endParaRPr lang="en-US"/>
+          </a:p>
+        </p:txBody>
       </p:sp>
       <p:sp>
         <p:nvSpPr>
@@ -5686,7 +5585,7 @@
           <a:bodyPr wrap="square" rtlCol="0" anchor="ctr"/>
           <a:lstStyle/>
           <a:p>
-            <a:pPr indent="0" marL="0">
+            <a:pPr marL="0" indent="0">
               <a:buNone/>
             </a:pPr>
             <a:r>
@@ -5725,7 +5624,7 @@
           <a:bodyPr wrap="square" rtlCol="0" anchor="ctr"/>
           <a:lstStyle/>
           <a:p>
-            <a:pPr indent="0" marL="0">
+            <a:pPr marL="0" indent="0">
               <a:lnSpc>
                 <a:spcPts val="1500"/>
               </a:lnSpc>
@@ -5743,12 +5642,6 @@
               <a:t>1. Đưa Bruno CLI vào CI/CD Pipeline:
 </a:t>
             </a:r>
-            <a:pPr indent="0" marL="0">
-              <a:lnSpc>
-                <a:spcPts val="1500"/>
-              </a:lnSpc>
-              <a:buNone/>
-            </a:pPr>
             <a:r>
               <a:rPr lang="en-US" sz="1050" dirty="0">
                 <a:solidFill>
@@ -5761,12 +5654,6 @@
               <a:t>Tự động kích hoạt `bru run` mỗi khi có Pull Request mới được mở trên Git.
 </a:t>
             </a:r>
-            <a:pPr indent="0" marL="0">
-              <a:lnSpc>
-                <a:spcPts val="1500"/>
-              </a:lnSpc>
-              <a:buNone/>
-            </a:pPr>
             <a:r>
               <a:rPr lang="en-US" sz="1050" b="1" dirty="0">
                 <a:solidFill>
@@ -5779,12 +5666,6 @@
               <a:t>2. Xây dựng Báo cáo HTML Tự động:
 </a:t>
             </a:r>
-            <a:pPr indent="0" marL="0">
-              <a:lnSpc>
-                <a:spcPts val="1500"/>
-              </a:lnSpc>
-              <a:buNone/>
-            </a:pPr>
             <a:r>
               <a:rPr lang="en-US" sz="1050" dirty="0">
                 <a:solidFill>
@@ -5797,12 +5678,6 @@
               <a:t>Tích hợp reporter xuất file báo cáo HTML/JUnit XML chi tiết sau mỗi phiên chạy.
 </a:t>
             </a:r>
-            <a:pPr indent="0" marL="0">
-              <a:lnSpc>
-                <a:spcPts val="1500"/>
-              </a:lnSpc>
-              <a:buNone/>
-            </a:pPr>
             <a:r>
               <a:rPr lang="en-US" sz="1050" b="1" dirty="0">
                 <a:solidFill>
@@ -5815,12 +5690,6 @@
               <a:t>3. Mở rộng Fuzzing &amp; Performance Testing:
 </a:t>
             </a:r>
-            <a:pPr indent="0" marL="0">
-              <a:lnSpc>
-                <a:spcPts val="1500"/>
-              </a:lnSpc>
-              <a:buNone/>
-            </a:pPr>
             <a:r>
               <a:rPr lang="en-US" sz="1050" dirty="0">
                 <a:solidFill>
@@ -5852,6 +5721,7 @@
         <a:solidFill>
           <a:srgbClr val="F8F9FD"/>
         </a:solidFill>
+        <a:effectLst/>
       </p:bgPr>
     </p:bg>
     <p:spTree>
@@ -5889,7 +5759,7 @@
           <a:bodyPr wrap="square" rtlCol="0" anchor="ctr"/>
           <a:lstStyle/>
           <a:p>
-            <a:pPr indent="0" marL="0">
+            <a:pPr marL="0" indent="0">
               <a:buNone/>
             </a:pPr>
             <a:r>
@@ -5928,7 +5798,7 @@
           <a:bodyPr wrap="square" rtlCol="0" anchor="t"/>
           <a:lstStyle/>
           <a:p>
-            <a:pPr indent="0" marL="0">
+            <a:pPr marL="0" indent="0">
               <a:buNone/>
             </a:pPr>
             <a:r>
@@ -5940,7 +5810,40 @@
                 <a:ea typeface="Arial" pitchFamily="34" charset="-122"/>
                 <a:cs typeface="Arial" pitchFamily="34" charset="-120"/>
               </a:rPr>
-              <a:t>Tổng kết Đóng góp Chính của Bài tập lớn</a:t>
+              <a:t>Tổng kết Đóng </a:t>
+            </a:r>
+            <a:r>
+              <a:rPr lang="en-US" sz="1900" b="1" dirty="0" err="1">
+                <a:solidFill>
+                  <a:srgbClr val="0B1354"/>
+                </a:solidFill>
+                <a:latin typeface="Arial" pitchFamily="34" charset="0"/>
+                <a:ea typeface="Arial" pitchFamily="34" charset="-122"/>
+                <a:cs typeface="Arial" pitchFamily="34" charset="-120"/>
+              </a:rPr>
+              <a:t>góp</a:t>
+            </a:r>
+            <a:r>
+              <a:rPr lang="en-US" sz="1900" b="1" dirty="0">
+                <a:solidFill>
+                  <a:srgbClr val="0B1354"/>
+                </a:solidFill>
+                <a:latin typeface="Arial" pitchFamily="34" charset="0"/>
+                <a:ea typeface="Arial" pitchFamily="34" charset="-122"/>
+                <a:cs typeface="Arial" pitchFamily="34" charset="-120"/>
+              </a:rPr>
+              <a:t> </a:t>
+            </a:r>
+            <a:r>
+              <a:rPr lang="en-US" sz="1900" b="1" dirty="0" err="1">
+                <a:solidFill>
+                  <a:srgbClr val="0B1354"/>
+                </a:solidFill>
+                <a:latin typeface="Arial" pitchFamily="34" charset="0"/>
+                <a:ea typeface="Arial" pitchFamily="34" charset="-122"/>
+                <a:cs typeface="Arial" pitchFamily="34" charset="-120"/>
+              </a:rPr>
+              <a:t>chính</a:t>
             </a:r>
             <a:endParaRPr lang="en-US" sz="1900" dirty="0"/>
           </a:p>
@@ -5967,7 +5870,7 @@
           <a:bodyPr wrap="square" rtlCol="0" anchor="ctr"/>
           <a:lstStyle/>
           <a:p>
-            <a:pPr indent="0" marL="0">
+            <a:pPr marL="0" indent="0">
               <a:buNone/>
             </a:pPr>
             <a:r>
@@ -6009,6 +5912,13 @@
             <a:prstDash val="solid"/>
           </a:ln>
         </p:spPr>
+        <p:txBody>
+          <a:bodyPr/>
+          <a:lstStyle/>
+          <a:p>
+            <a:endParaRPr lang="en-US"/>
+          </a:p>
+        </p:txBody>
       </p:sp>
       <p:sp>
         <p:nvSpPr>
@@ -6031,7 +5941,7 @@
           <a:bodyPr wrap="square" rtlCol="0" anchor="ctr"/>
           <a:lstStyle/>
           <a:p>
-            <a:pPr indent="0" marL="0">
+            <a:pPr marL="0" indent="0">
               <a:lnSpc>
                 <a:spcPts val="1600"/>
               </a:lnSpc>
@@ -6048,12 +5958,6 @@
               </a:rPr>
               <a:t>1. Quy trình Git-Friendly Workflow hoàn chỉnh: </a:t>
             </a:r>
-            <a:pPr indent="0" marL="0">
-              <a:lnSpc>
-                <a:spcPts val="1600"/>
-              </a:lnSpc>
-              <a:buNone/>
-            </a:pPr>
             <a:r>
               <a:rPr lang="en-US" sz="1100" dirty="0">
                 <a:solidFill>
@@ -6066,12 +5970,6 @@
               <a:t>Quản lý kịch bản kiểm thử API bằng file plain-text `.bru` trong mã nguồn, tối ưu hóa code review trên Git.
 </a:t>
             </a:r>
-            <a:pPr indent="0" marL="0">
-              <a:lnSpc>
-                <a:spcPts val="1600"/>
-              </a:lnSpc>
-              <a:buNone/>
-            </a:pPr>
             <a:r>
               <a:rPr lang="en-US" sz="1100" b="1" dirty="0">
                 <a:solidFill>
@@ -6083,12 +5981,6 @@
               </a:rPr>
               <a:t>2. Khả năng Audit &amp; Bảo mật Dữ liệu Cao: </a:t>
             </a:r>
-            <a:pPr indent="0" marL="0">
-              <a:lnSpc>
-                <a:spcPts val="1600"/>
-              </a:lnSpc>
-              <a:buNone/>
-            </a:pPr>
             <a:r>
               <a:rPr lang="en-US" sz="1100" dirty="0">
                 <a:solidFill>
@@ -6101,12 +5993,6 @@
               <a:t>Hoạt động 100% Offline-first, loại bỏ nguy cơ rò rỉ token/secret lên đám mây bên thứ ba.
 </a:t>
             </a:r>
-            <a:pPr indent="0" marL="0">
-              <a:lnSpc>
-                <a:spcPts val="1600"/>
-              </a:lnSpc>
-              <a:buNone/>
-            </a:pPr>
             <a:r>
               <a:rPr lang="en-US" sz="1100" b="1" dirty="0">
                 <a:solidFill>
@@ -6116,14 +6002,8 @@
                 <a:ea typeface="Arial" pitchFamily="34" charset="-122"/>
                 <a:cs typeface="Arial" pitchFamily="34" charset="-120"/>
               </a:rPr>
-              <a:t>3. Bộ Kiểm thử LMS Tự động hóa Bao phủ 100%: </a:t>
-            </a:r>
-            <a:pPr indent="0" marL="0">
-              <a:lnSpc>
-                <a:spcPts val="1600"/>
-              </a:lnSpc>
-              <a:buNone/>
-            </a:pPr>
+              <a:t>3. Tăng trưởng Vượt trội &amp; Triển vọng Dài hạn: </a:t>
+            </a:r>
             <a:r>
               <a:rPr lang="en-US" sz="1100" dirty="0">
                 <a:solidFill>
@@ -6133,7 +6013,7 @@
                 <a:ea typeface="Arial" pitchFamily="34" charset="-122"/>
                 <a:cs typeface="Arial" pitchFamily="34" charset="-120"/>
               </a:rPr>
-              <a:t>Bao phủ đầy đủ các luồng nghiệp vụ Auth, Course Player, Stripe Webhook, S3 Storage &amp; Edge Cases.</a:t>
+              <a:t>Bruno tăng 1.000× trong 2023–2024 và 2,4× trong 2025; tốc độ tương đối vượt xa Postman, củng cố lựa chọn Git-friendly.</a:t>
             </a:r>
             <a:endParaRPr lang="en-US" sz="1100" dirty="0"/>
           </a:p>
@@ -6163,6 +6043,13 @@
             <a:prstDash val="solid"/>
           </a:ln>
         </p:spPr>
+        <p:txBody>
+          <a:bodyPr/>
+          <a:lstStyle/>
+          <a:p>
+            <a:endParaRPr lang="en-US"/>
+          </a:p>
+        </p:txBody>
       </p:sp>
       <p:sp>
         <p:nvSpPr>
@@ -6185,7 +6072,7 @@
           <a:bodyPr wrap="square" rtlCol="0" anchor="ctr"/>
           <a:lstStyle/>
           <a:p>
-            <a:pPr algn="ctr" indent="0" marL="0">
+            <a:pPr marL="0" indent="0" algn="ctr">
               <a:buNone/>
             </a:pPr>
             <a:r>
@@ -6224,7 +6111,7 @@
           <a:bodyPr wrap="square" rtlCol="0" anchor="ctr"/>
           <a:lstStyle/>
           <a:p>
-            <a:pPr algn="ctr" indent="0" marL="0">
+            <a:pPr marL="0" indent="0" algn="ctr">
               <a:buNone/>
             </a:pPr>
             <a:r>
@@ -6258,6 +6145,7 @@
         <a:solidFill>
           <a:srgbClr val="F8F9FD"/>
         </a:solidFill>
+        <a:effectLst/>
       </p:bgPr>
     </p:bg>
     <p:spTree>
@@ -6295,7 +6183,7 @@
           <a:bodyPr wrap="square" rtlCol="0" anchor="ctr"/>
           <a:lstStyle/>
           <a:p>
-            <a:pPr indent="0" marL="0">
+            <a:pPr marL="0" indent="0">
               <a:buNone/>
             </a:pPr>
             <a:r>
@@ -6334,7 +6222,7 @@
           <a:bodyPr wrap="square" rtlCol="0" anchor="t"/>
           <a:lstStyle/>
           <a:p>
-            <a:pPr indent="0" marL="0">
+            <a:pPr marL="0" indent="0">
               <a:buNone/>
             </a:pPr>
             <a:r>
@@ -6373,7 +6261,7 @@
           <a:bodyPr wrap="square" rtlCol="0" anchor="ctr"/>
           <a:lstStyle/>
           <a:p>
-            <a:pPr indent="0" marL="0">
+            <a:pPr marL="0" indent="0">
               <a:buNone/>
             </a:pPr>
             <a:r>
@@ -6415,6 +6303,13 @@
             <a:prstDash val="solid"/>
           </a:ln>
         </p:spPr>
+        <p:txBody>
+          <a:bodyPr/>
+          <a:lstStyle/>
+          <a:p>
+            <a:endParaRPr lang="en-US"/>
+          </a:p>
+        </p:txBody>
       </p:sp>
       <p:sp>
         <p:nvSpPr>
@@ -6437,7 +6332,7 @@
           <a:bodyPr wrap="square" rtlCol="0" anchor="ctr"/>
           <a:lstStyle/>
           <a:p>
-            <a:pPr indent="0" marL="0">
+            <a:pPr marL="0" indent="0">
               <a:buNone/>
             </a:pPr>
             <a:r>
@@ -6476,7 +6371,7 @@
           <a:bodyPr wrap="square" rtlCol="0" anchor="ctr"/>
           <a:lstStyle/>
           <a:p>
-            <a:pPr indent="0" marL="0">
+            <a:pPr marL="0" indent="0">
               <a:buNone/>
             </a:pPr>
             <a:r>
@@ -6515,7 +6410,7 @@
           <a:bodyPr wrap="square" rtlCol="0" anchor="ctr"/>
           <a:lstStyle/>
           <a:p>
-            <a:pPr indent="0" marL="0">
+            <a:pPr marL="0" indent="0">
               <a:buNone/>
             </a:pPr>
             <a:r>
@@ -6557,6 +6452,13 @@
             <a:prstDash val="solid"/>
           </a:ln>
         </p:spPr>
+        <p:txBody>
+          <a:bodyPr/>
+          <a:lstStyle/>
+          <a:p>
+            <a:endParaRPr lang="en-US"/>
+          </a:p>
+        </p:txBody>
       </p:sp>
       <p:sp>
         <p:nvSpPr>
@@ -6579,7 +6481,7 @@
           <a:bodyPr wrap="square" rtlCol="0" anchor="ctr"/>
           <a:lstStyle/>
           <a:p>
-            <a:pPr indent="0" marL="0">
+            <a:pPr marL="0" indent="0">
               <a:buNone/>
             </a:pPr>
             <a:r>
@@ -6618,7 +6520,7 @@
           <a:bodyPr wrap="square" rtlCol="0" anchor="ctr"/>
           <a:lstStyle/>
           <a:p>
-            <a:pPr indent="0" marL="0">
+            <a:pPr marL="0" indent="0">
               <a:buNone/>
             </a:pPr>
             <a:r>
@@ -6657,7 +6559,7 @@
           <a:bodyPr wrap="square" rtlCol="0" anchor="ctr"/>
           <a:lstStyle/>
           <a:p>
-            <a:pPr indent="0" marL="0">
+            <a:pPr marL="0" indent="0">
               <a:buNone/>
             </a:pPr>
             <a:r>
@@ -6699,6 +6601,13 @@
             <a:prstDash val="solid"/>
           </a:ln>
         </p:spPr>
+        <p:txBody>
+          <a:bodyPr/>
+          <a:lstStyle/>
+          <a:p>
+            <a:endParaRPr lang="en-US"/>
+          </a:p>
+        </p:txBody>
       </p:sp>
       <p:sp>
         <p:nvSpPr>
@@ -6721,7 +6630,7 @@
           <a:bodyPr wrap="square" rtlCol="0" anchor="ctr"/>
           <a:lstStyle/>
           <a:p>
-            <a:pPr indent="0" marL="0">
+            <a:pPr marL="0" indent="0">
               <a:buNone/>
             </a:pPr>
             <a:r>
@@ -6760,7 +6669,7 @@
           <a:bodyPr wrap="square" rtlCol="0" anchor="ctr"/>
           <a:lstStyle/>
           <a:p>
-            <a:pPr indent="0" marL="0">
+            <a:pPr marL="0" indent="0">
               <a:buNone/>
             </a:pPr>
             <a:r>
@@ -6799,7 +6708,7 @@
           <a:bodyPr wrap="square" rtlCol="0" anchor="ctr"/>
           <a:lstStyle/>
           <a:p>
-            <a:pPr indent="0" marL="0">
+            <a:pPr marL="0" indent="0">
               <a:buNone/>
             </a:pPr>
             <a:r>
@@ -6841,6 +6750,13 @@
             <a:prstDash val="solid"/>
           </a:ln>
         </p:spPr>
+        <p:txBody>
+          <a:bodyPr/>
+          <a:lstStyle/>
+          <a:p>
+            <a:endParaRPr lang="en-US"/>
+          </a:p>
+        </p:txBody>
       </p:sp>
       <p:sp>
         <p:nvSpPr>
@@ -6863,7 +6779,7 @@
           <a:bodyPr wrap="square" rtlCol="0" anchor="ctr"/>
           <a:lstStyle/>
           <a:p>
-            <a:pPr indent="0" marL="0">
+            <a:pPr marL="0" indent="0">
               <a:buNone/>
             </a:pPr>
             <a:r>
@@ -6902,7 +6818,7 @@
           <a:bodyPr wrap="square" rtlCol="0" anchor="ctr"/>
           <a:lstStyle/>
           <a:p>
-            <a:pPr indent="0" marL="0">
+            <a:pPr marL="0" indent="0">
               <a:buNone/>
             </a:pPr>
             <a:r>
@@ -6941,7 +6857,7 @@
           <a:bodyPr wrap="square" rtlCol="0" anchor="ctr"/>
           <a:lstStyle/>
           <a:p>
-            <a:pPr indent="0" marL="0">
+            <a:pPr marL="0" indent="0">
               <a:buNone/>
             </a:pPr>
             <a:r>
@@ -6983,6 +6899,13 @@
             <a:prstDash val="solid"/>
           </a:ln>
         </p:spPr>
+        <p:txBody>
+          <a:bodyPr/>
+          <a:lstStyle/>
+          <a:p>
+            <a:endParaRPr lang="en-US"/>
+          </a:p>
+        </p:txBody>
       </p:sp>
       <p:sp>
         <p:nvSpPr>
@@ -7005,7 +6928,7 @@
           <a:bodyPr wrap="square" rtlCol="0" anchor="ctr"/>
           <a:lstStyle/>
           <a:p>
-            <a:pPr indent="0" marL="0">
+            <a:pPr marL="0" indent="0">
               <a:buNone/>
             </a:pPr>
             <a:r>
@@ -7044,7 +6967,7 @@
           <a:bodyPr wrap="square" rtlCol="0" anchor="ctr"/>
           <a:lstStyle/>
           <a:p>
-            <a:pPr indent="0" marL="0">
+            <a:pPr marL="0" indent="0">
               <a:buNone/>
             </a:pPr>
             <a:r>
@@ -7083,7 +7006,7 @@
           <a:bodyPr wrap="square" rtlCol="0" anchor="ctr"/>
           <a:lstStyle/>
           <a:p>
-            <a:pPr indent="0" marL="0">
+            <a:pPr marL="0" indent="0">
               <a:buNone/>
             </a:pPr>
             <a:r>
@@ -7111,12 +7034,13 @@
 
 <file path=ppt/slides/slide3.xml><?xml version="1.0" encoding="utf-8"?>
 <p:sld xmlns:a="http://schemas.openxmlformats.org/drawingml/2006/main" xmlns:r="http://schemas.openxmlformats.org/officeDocument/2006/relationships" xmlns:p="http://schemas.openxmlformats.org/presentationml/2006/main">
-  <p:cSld name="Slide 3">
+  <p:cSld name="Slide 1">
     <p:bg>
       <p:bgPr>
         <a:solidFill>
-          <a:srgbClr val="F8F9FD"/>
+          <a:srgbClr val="F7F8FC"/>
         </a:solidFill>
+        <a:effectLst/>
       </p:bgPr>
     </p:bg>
     <p:spTree>
@@ -7141,8 +7065,8 @@
         </p:nvSpPr>
         <p:spPr>
           <a:xfrm>
-            <a:off x="548640" y="201168"/>
-            <a:ext cx="8046720" cy="182880"/>
+            <a:off x="640080" y="219456"/>
+            <a:ext cx="2926080" cy="201168"/>
           </a:xfrm>
           <a:prstGeom prst="rect">
             <a:avLst/>
@@ -7151,16 +7075,18 @@
           <a:ln/>
         </p:spPr>
         <p:txBody>
-          <a:bodyPr wrap="square" rtlCol="0" anchor="ctr"/>
-          <a:lstStyle/>
-          <a:p>
-            <a:pPr indent="0" marL="0">
+          <a:bodyPr wrap="square" lIns="0" tIns="0" rIns="0" bIns="0" rtlCol="0" anchor="ctr">
+            <a:normAutofit/>
+          </a:bodyPr>
+          <a:lstStyle/>
+          <a:p>
+            <a:pPr marL="0" indent="0">
               <a:buNone/>
             </a:pPr>
             <a:r>
-              <a:rPr lang="en-US" sz="900" b="1" dirty="0">
-                <a:solidFill>
-                  <a:srgbClr val="7B61FF"/>
+              <a:rPr lang="en-US" sz="1250" b="1" dirty="0">
+                <a:solidFill>
+                  <a:srgbClr val="6D55D9"/>
                 </a:solidFill>
                 <a:latin typeface="Arial" pitchFamily="34" charset="0"/>
                 <a:ea typeface="Arial" pitchFamily="34" charset="-122"/>
@@ -7168,7 +7094,7 @@
               </a:rPr>
               <a:t>1. TỔNG QUAN GIẢI PHÁP</a:t>
             </a:r>
-            <a:endParaRPr lang="en-US" sz="900" dirty="0"/>
+            <a:endParaRPr lang="en-US" sz="1250" dirty="0"/>
           </a:p>
         </p:txBody>
       </p:sp>
@@ -7180,8 +7106,8 @@
         </p:nvSpPr>
         <p:spPr>
           <a:xfrm>
-            <a:off x="548640" y="384048"/>
-            <a:ext cx="8046720" cy="384048"/>
+            <a:off x="640080" y="512064"/>
+            <a:ext cx="7909560" cy="393192"/>
           </a:xfrm>
           <a:prstGeom prst="rect">
             <a:avLst/>
@@ -7190,24 +7116,26 @@
           <a:ln/>
         </p:spPr>
         <p:txBody>
-          <a:bodyPr wrap="square" rtlCol="0" anchor="t"/>
-          <a:lstStyle/>
-          <a:p>
-            <a:pPr indent="0" marL="0">
+          <a:bodyPr wrap="square" lIns="0" tIns="0" rIns="0" bIns="0" rtlCol="0" anchor="ctr">
+            <a:normAutofit lnSpcReduction="10000"/>
+          </a:bodyPr>
+          <a:lstStyle/>
+          <a:p>
+            <a:pPr marL="0" indent="0">
               <a:buNone/>
             </a:pPr>
             <a:r>
-              <a:rPr lang="en-US" sz="1900" b="1" dirty="0">
-                <a:solidFill>
-                  <a:srgbClr val="0B1354"/>
-                </a:solidFill>
-                <a:latin typeface="Arial" pitchFamily="34" charset="0"/>
-                <a:ea typeface="Arial" pitchFamily="34" charset="-122"/>
-                <a:cs typeface="Arial" pitchFamily="34" charset="-120"/>
-              </a:rPr>
-              <a:t>Bối cảnh &amp; Tính cấp thiết của Kiểm thử API trong LMS</a:t>
-            </a:r>
-            <a:endParaRPr lang="en-US" sz="1900" dirty="0"/>
+              <a:rPr lang="en-US" sz="2800" b="1" dirty="0">
+                <a:solidFill>
+                  <a:srgbClr val="101957"/>
+                </a:solidFill>
+                <a:latin typeface="Arial" pitchFamily="34" charset="0"/>
+                <a:ea typeface="Arial" pitchFamily="34" charset="-122"/>
+                <a:cs typeface="Arial" pitchFamily="34" charset="-120"/>
+              </a:rPr>
+              <a:t>Bối cảnh &amp; Tính cấp thiết của Kiểm thử API</a:t>
+            </a:r>
+            <a:endParaRPr lang="en-US" sz="2800" dirty="0"/>
           </a:p>
         </p:txBody>
       </p:sp>
@@ -7219,8 +7147,8 @@
         </p:nvSpPr>
         <p:spPr>
           <a:xfrm>
-            <a:off x="548640" y="4892040"/>
-            <a:ext cx="8046720" cy="201168"/>
+            <a:off x="640080" y="987552"/>
+            <a:ext cx="7955280" cy="246888"/>
           </a:xfrm>
           <a:prstGeom prst="rect">
             <a:avLst/>
@@ -7229,24 +7157,26 @@
           <a:ln/>
         </p:spPr>
         <p:txBody>
-          <a:bodyPr wrap="square" rtlCol="0" anchor="ctr"/>
-          <a:lstStyle/>
-          <a:p>
-            <a:pPr indent="0" marL="0">
+          <a:bodyPr wrap="square" lIns="0" tIns="0" rIns="0" bIns="0" rtlCol="0" anchor="ctr">
+            <a:normAutofit/>
+          </a:bodyPr>
+          <a:lstStyle/>
+          <a:p>
+            <a:pPr marL="0" indent="0">
               <a:buNone/>
             </a:pPr>
             <a:r>
-              <a:rPr lang="en-US" sz="850" dirty="0">
-                <a:solidFill>
-                  <a:srgbClr val="718096"/>
-                </a:solidFill>
-                <a:latin typeface="Arial" pitchFamily="34" charset="0"/>
-                <a:ea typeface="Arial" pitchFamily="34" charset="-122"/>
-                <a:cs typeface="Arial" pitchFamily="34" charset="-120"/>
-              </a:rPr>
-              <a:t>Báo cáo Bài tập lớn: Kiểm thử API tự động với Bruno trên hệ thống LMS   |   Slide 3 / 18</a:t>
-            </a:r>
-            <a:endParaRPr lang="en-US" sz="850" dirty="0"/>
+              <a:rPr lang="en-US" sz="1130" b="1" dirty="0">
+                <a:solidFill>
+                  <a:srgbClr val="20243A"/>
+                </a:solidFill>
+                <a:latin typeface="Arial" pitchFamily="34" charset="0"/>
+                <a:ea typeface="Arial" pitchFamily="34" charset="-122"/>
+                <a:cs typeface="Arial" pitchFamily="34" charset="-120"/>
+              </a:rPr>
+              <a:t>Trong phần mềm hiện đại, API kết nối giao diện, dữ liệu và các dịch vụ bên ngoài.</a:t>
+            </a:r>
+            <a:endParaRPr lang="en-US" sz="1130" dirty="0"/>
           </a:p>
         </p:txBody>
       </p:sp>
@@ -7258,8 +7188,8 @@
         </p:nvSpPr>
         <p:spPr>
           <a:xfrm>
-            <a:off x="548640" y="804672"/>
-            <a:ext cx="8046720" cy="256032"/>
+            <a:off x="640080" y="1316736"/>
+            <a:ext cx="1828800" cy="164592"/>
           </a:xfrm>
           <a:prstGeom prst="rect">
             <a:avLst/>
@@ -7268,51 +7198,2185 @@
           <a:ln/>
         </p:spPr>
         <p:txBody>
-          <a:bodyPr wrap="square" rtlCol="0" anchor="ctr"/>
-          <a:lstStyle/>
-          <a:p>
-            <a:pPr indent="0" marL="0">
+          <a:bodyPr wrap="square" lIns="0" tIns="0" rIns="0" bIns="0" rtlCol="0" anchor="ctr">
+            <a:normAutofit/>
+          </a:bodyPr>
+          <a:lstStyle/>
+          <a:p>
+            <a:pPr marL="0" indent="0">
               <a:buNone/>
             </a:pPr>
             <a:r>
+              <a:rPr lang="en-US" sz="880" b="1" kern="0" spc="120" dirty="0">
+                <a:solidFill>
+                  <a:srgbClr val="697086"/>
+                </a:solidFill>
+                <a:latin typeface="Arial" pitchFamily="34" charset="0"/>
+                <a:ea typeface="Arial" pitchFamily="34" charset="-122"/>
+                <a:cs typeface="Arial" pitchFamily="34" charset="-120"/>
+              </a:rPr>
+              <a:t>LUỒNG API CỐT LÕI</a:t>
+            </a:r>
+            <a:endParaRPr lang="en-US" sz="880" dirty="0"/>
+          </a:p>
+        </p:txBody>
+      </p:sp>
+      <p:sp>
+        <p:nvSpPr>
+          <p:cNvPr id="6" name="Shape 4"/>
+          <p:cNvSpPr/>
+          <p:nvPr/>
+        </p:nvSpPr>
+        <p:spPr>
+          <a:xfrm>
+            <a:off x="640080" y="1572768"/>
+            <a:ext cx="1691640" cy="731520"/>
+          </a:xfrm>
+          <a:prstGeom prst="roundRect">
+            <a:avLst>
+              <a:gd name="adj" fmla="val 10000"/>
+            </a:avLst>
+          </a:prstGeom>
+          <a:solidFill>
+            <a:srgbClr val="EAF3FC"/>
+          </a:solidFill>
+          <a:ln w="12700">
+            <a:solidFill>
+              <a:srgbClr val="3478C7"/>
+            </a:solidFill>
+            <a:prstDash val="solid"/>
+          </a:ln>
+        </p:spPr>
+        <p:txBody>
+          <a:bodyPr/>
+          <a:lstStyle/>
+          <a:p>
+            <a:endParaRPr lang="en-US"/>
+          </a:p>
+        </p:txBody>
+      </p:sp>
+      <p:sp>
+        <p:nvSpPr>
+          <p:cNvPr id="7" name="Shape 5"/>
+          <p:cNvSpPr/>
+          <p:nvPr/>
+        </p:nvSpPr>
+        <p:spPr>
+          <a:xfrm>
+            <a:off x="749808" y="1728216"/>
+            <a:ext cx="384048" cy="384048"/>
+          </a:xfrm>
+          <a:prstGeom prst="ellipse">
+            <a:avLst/>
+          </a:prstGeom>
+          <a:solidFill>
+            <a:srgbClr val="3478C7"/>
+          </a:solidFill>
+          <a:ln w="12700">
+            <a:solidFill>
+              <a:srgbClr val="3478C7"/>
+            </a:solidFill>
+            <a:prstDash val="solid"/>
+          </a:ln>
+        </p:spPr>
+        <p:txBody>
+          <a:bodyPr/>
+          <a:lstStyle/>
+          <a:p>
+            <a:endParaRPr lang="en-US"/>
+          </a:p>
+        </p:txBody>
+      </p:sp>
+      <p:sp>
+        <p:nvSpPr>
+          <p:cNvPr id="8" name="Text 6"/>
+          <p:cNvSpPr/>
+          <p:nvPr/>
+        </p:nvSpPr>
+        <p:spPr>
+          <a:xfrm>
+            <a:off x="749808" y="1728216"/>
+            <a:ext cx="384048" cy="384048"/>
+          </a:xfrm>
+          <a:prstGeom prst="rect">
+            <a:avLst/>
+          </a:prstGeom>
+          <a:noFill/>
+          <a:ln/>
+        </p:spPr>
+        <p:txBody>
+          <a:bodyPr wrap="square" lIns="0" tIns="0" rIns="0" bIns="0" rtlCol="0" anchor="ctr">
+            <a:normAutofit/>
+          </a:bodyPr>
+          <a:lstStyle/>
+          <a:p>
+            <a:pPr marL="0" indent="0" algn="ctr">
+              <a:buNone/>
+            </a:pPr>
+            <a:r>
+              <a:rPr lang="en-US" sz="850" b="1" dirty="0">
+                <a:solidFill>
+                  <a:srgbClr val="FFFFFF"/>
+                </a:solidFill>
+                <a:latin typeface="Arial" pitchFamily="34" charset="0"/>
+                <a:ea typeface="Arial" pitchFamily="34" charset="-122"/>
+                <a:cs typeface="Arial" pitchFamily="34" charset="-120"/>
+              </a:rPr>
+              <a:t>UI</a:t>
+            </a:r>
+            <a:endParaRPr lang="en-US" sz="850" dirty="0"/>
+          </a:p>
+        </p:txBody>
+      </p:sp>
+      <p:sp>
+        <p:nvSpPr>
+          <p:cNvPr id="9" name="Text 7"/>
+          <p:cNvSpPr/>
+          <p:nvPr/>
+        </p:nvSpPr>
+        <p:spPr>
+          <a:xfrm>
+            <a:off x="1225296" y="1664208"/>
+            <a:ext cx="1014984" cy="219456"/>
+          </a:xfrm>
+          <a:prstGeom prst="rect">
+            <a:avLst/>
+          </a:prstGeom>
+          <a:noFill/>
+          <a:ln/>
+        </p:spPr>
+        <p:txBody>
+          <a:bodyPr wrap="square" lIns="0" tIns="0" rIns="0" bIns="0" rtlCol="0" anchor="ctr">
+            <a:normAutofit fontScale="77500" lnSpcReduction="20000"/>
+          </a:bodyPr>
+          <a:lstStyle/>
+          <a:p>
+            <a:pPr marL="0" indent="0">
+              <a:buNone/>
+            </a:pPr>
+            <a:r>
               <a:rPr lang="en-US" sz="1050" b="1" dirty="0">
                 <a:solidFill>
-                  <a:srgbClr val="0B1354"/>
-                </a:solidFill>
-                <a:latin typeface="Arial" pitchFamily="34" charset="0"/>
-                <a:ea typeface="Arial" pitchFamily="34" charset="-122"/>
-                <a:cs typeface="Arial" pitchFamily="34" charset="-120"/>
-              </a:rPr>
-              <a:t>• API kết nối Next.js Frontend, Fastify Backend, PostgreSQL và dịch vụ bên ngoài (Stripe, S3 Storage)</a:t>
+                  <a:srgbClr val="101957"/>
+                </a:solidFill>
+                <a:latin typeface="Arial" pitchFamily="34" charset="0"/>
+                <a:ea typeface="Arial" pitchFamily="34" charset="-122"/>
+                <a:cs typeface="Arial" pitchFamily="34" charset="-120"/>
+              </a:rPr>
+              <a:t>Ứng dụng Web/Mobile</a:t>
             </a:r>
             <a:endParaRPr lang="en-US" sz="1050" dirty="0"/>
           </a:p>
         </p:txBody>
       </p:sp>
-      <p:pic>
-        <p:nvPicPr>
-          <p:cNvPr id="6" name="Image 0" descr="/home/andv/personal/andv-lms/docs/report/images/hinh-homepage.png">    </p:cNvPr>
-          <p:cNvPicPr>
-            <a:picLocks noChangeAspect="1"/>
-          </p:cNvPicPr>
-          <p:nvPr/>
-        </p:nvPicPr>
-        <p:blipFill>
-          <a:blip r:embed="rId1"/>
-          <a:stretch>
-            <a:fillRect/>
-          </a:stretch>
-        </p:blipFill>
-        <p:spPr>
-          <a:xfrm>
-            <a:off x="712854" y="1074420"/>
-            <a:ext cx="7718292" cy="3794760"/>
-          </a:xfrm>
-          <a:prstGeom prst="rect">
-            <a:avLst/>
-          </a:prstGeom>
-        </p:spPr>
-      </p:pic>
+      <p:sp>
+        <p:nvSpPr>
+          <p:cNvPr id="10" name="Text 8"/>
+          <p:cNvSpPr/>
+          <p:nvPr/>
+        </p:nvSpPr>
+        <p:spPr>
+          <a:xfrm>
+            <a:off x="1225296" y="1901952"/>
+            <a:ext cx="1014984" cy="201168"/>
+          </a:xfrm>
+          <a:prstGeom prst="rect">
+            <a:avLst/>
+          </a:prstGeom>
+          <a:noFill/>
+          <a:ln/>
+        </p:spPr>
+        <p:txBody>
+          <a:bodyPr wrap="square" lIns="0" tIns="0" rIns="0" bIns="0" rtlCol="0" anchor="ctr">
+            <a:normAutofit/>
+          </a:bodyPr>
+          <a:lstStyle/>
+          <a:p>
+            <a:pPr marL="0" indent="0">
+              <a:buNone/>
+            </a:pPr>
+            <a:r>
+              <a:rPr lang="en-US" sz="820" dirty="0">
+                <a:solidFill>
+                  <a:srgbClr val="697086"/>
+                </a:solidFill>
+                <a:latin typeface="Arial" pitchFamily="34" charset="0"/>
+                <a:ea typeface="Arial" pitchFamily="34" charset="-122"/>
+                <a:cs typeface="Arial" pitchFamily="34" charset="-120"/>
+              </a:rPr>
+              <a:t>Giao diện người dùng</a:t>
+            </a:r>
+            <a:endParaRPr lang="en-US" sz="820" dirty="0"/>
+          </a:p>
+        </p:txBody>
+      </p:sp>
+      <p:sp>
+        <p:nvSpPr>
+          <p:cNvPr id="11" name="Text 9"/>
+          <p:cNvSpPr/>
+          <p:nvPr/>
+        </p:nvSpPr>
+        <p:spPr>
+          <a:xfrm>
+            <a:off x="2395728" y="1728216"/>
+            <a:ext cx="347472" cy="329184"/>
+          </a:xfrm>
+          <a:prstGeom prst="rect">
+            <a:avLst/>
+          </a:prstGeom>
+          <a:noFill/>
+          <a:ln/>
+        </p:spPr>
+        <p:txBody>
+          <a:bodyPr wrap="square" lIns="0" tIns="0" rIns="0" bIns="0" rtlCol="0" anchor="ctr">
+            <a:normAutofit/>
+          </a:bodyPr>
+          <a:lstStyle/>
+          <a:p>
+            <a:pPr marL="0" indent="0" algn="ctr">
+              <a:buNone/>
+            </a:pPr>
+            <a:r>
+              <a:rPr lang="en-US" sz="2000" b="1" dirty="0">
+                <a:solidFill>
+                  <a:srgbClr val="6D55D9"/>
+                </a:solidFill>
+                <a:latin typeface="Arial" pitchFamily="34" charset="0"/>
+                <a:ea typeface="Arial" pitchFamily="34" charset="-122"/>
+                <a:cs typeface="Arial" pitchFamily="34" charset="-120"/>
+              </a:rPr>
+              <a:t>→</a:t>
+            </a:r>
+            <a:endParaRPr lang="en-US" sz="2000" dirty="0"/>
+          </a:p>
+        </p:txBody>
+      </p:sp>
+      <p:sp>
+        <p:nvSpPr>
+          <p:cNvPr id="12" name="Shape 10"/>
+          <p:cNvSpPr/>
+          <p:nvPr/>
+        </p:nvSpPr>
+        <p:spPr>
+          <a:xfrm>
+            <a:off x="2816352" y="1572768"/>
+            <a:ext cx="1572768" cy="731520"/>
+          </a:xfrm>
+          <a:prstGeom prst="roundRect">
+            <a:avLst>
+              <a:gd name="adj" fmla="val 10000"/>
+            </a:avLst>
+          </a:prstGeom>
+          <a:solidFill>
+            <a:srgbClr val="6D55D9"/>
+          </a:solidFill>
+          <a:ln w="12700">
+            <a:solidFill>
+              <a:srgbClr val="6D55D9"/>
+            </a:solidFill>
+            <a:prstDash val="solid"/>
+          </a:ln>
+        </p:spPr>
+        <p:txBody>
+          <a:bodyPr/>
+          <a:lstStyle/>
+          <a:p>
+            <a:endParaRPr lang="en-US"/>
+          </a:p>
+        </p:txBody>
+      </p:sp>
+      <p:sp>
+        <p:nvSpPr>
+          <p:cNvPr id="13" name="Shape 11"/>
+          <p:cNvSpPr/>
+          <p:nvPr/>
+        </p:nvSpPr>
+        <p:spPr>
+          <a:xfrm>
+            <a:off x="2926080" y="1728216"/>
+            <a:ext cx="384048" cy="384048"/>
+          </a:xfrm>
+          <a:prstGeom prst="ellipse">
+            <a:avLst/>
+          </a:prstGeom>
+          <a:solidFill>
+            <a:srgbClr val="FFFFFF"/>
+          </a:solidFill>
+          <a:ln w="12700">
+            <a:solidFill>
+              <a:srgbClr val="FFFFFF">
+                <a:alpha val="70000"/>
+              </a:srgbClr>
+            </a:solidFill>
+            <a:prstDash val="solid"/>
+          </a:ln>
+        </p:spPr>
+        <p:txBody>
+          <a:bodyPr/>
+          <a:lstStyle/>
+          <a:p>
+            <a:endParaRPr lang="en-US"/>
+          </a:p>
+        </p:txBody>
+      </p:sp>
+      <p:sp>
+        <p:nvSpPr>
+          <p:cNvPr id="14" name="Text 12"/>
+          <p:cNvSpPr/>
+          <p:nvPr/>
+        </p:nvSpPr>
+        <p:spPr>
+          <a:xfrm>
+            <a:off x="2926080" y="1728216"/>
+            <a:ext cx="384048" cy="384048"/>
+          </a:xfrm>
+          <a:prstGeom prst="rect">
+            <a:avLst/>
+          </a:prstGeom>
+          <a:noFill/>
+          <a:ln/>
+        </p:spPr>
+        <p:txBody>
+          <a:bodyPr wrap="square" lIns="0" tIns="0" rIns="0" bIns="0" rtlCol="0" anchor="ctr">
+            <a:normAutofit/>
+          </a:bodyPr>
+          <a:lstStyle/>
+          <a:p>
+            <a:pPr marL="0" indent="0" algn="ctr">
+              <a:buNone/>
+            </a:pPr>
+            <a:r>
+              <a:rPr lang="en-US" sz="850" b="1" dirty="0">
+                <a:solidFill>
+                  <a:srgbClr val="6D55D9"/>
+                </a:solidFill>
+                <a:latin typeface="Arial" pitchFamily="34" charset="0"/>
+                <a:ea typeface="Arial" pitchFamily="34" charset="-122"/>
+                <a:cs typeface="Arial" pitchFamily="34" charset="-120"/>
+              </a:rPr>
+              <a:t>API</a:t>
+            </a:r>
+            <a:endParaRPr lang="en-US" sz="850" dirty="0"/>
+          </a:p>
+        </p:txBody>
+      </p:sp>
+      <p:sp>
+        <p:nvSpPr>
+          <p:cNvPr id="15" name="Text 13"/>
+          <p:cNvSpPr/>
+          <p:nvPr/>
+        </p:nvSpPr>
+        <p:spPr>
+          <a:xfrm>
+            <a:off x="3401568" y="1664208"/>
+            <a:ext cx="896112" cy="219456"/>
+          </a:xfrm>
+          <a:prstGeom prst="rect">
+            <a:avLst/>
+          </a:prstGeom>
+          <a:noFill/>
+          <a:ln/>
+        </p:spPr>
+        <p:txBody>
+          <a:bodyPr wrap="square" lIns="0" tIns="0" rIns="0" bIns="0" rtlCol="0" anchor="ctr">
+            <a:normAutofit/>
+          </a:bodyPr>
+          <a:lstStyle/>
+          <a:p>
+            <a:pPr marL="0" indent="0">
+              <a:buNone/>
+            </a:pPr>
+            <a:r>
+              <a:rPr lang="en-US" sz="1050" b="1" dirty="0">
+                <a:solidFill>
+                  <a:srgbClr val="FFFFFF"/>
+                </a:solidFill>
+                <a:latin typeface="Arial" pitchFamily="34" charset="0"/>
+                <a:ea typeface="Arial" pitchFamily="34" charset="-122"/>
+                <a:cs typeface="Arial" pitchFamily="34" charset="-120"/>
+              </a:rPr>
+              <a:t>Dịch vụ API</a:t>
+            </a:r>
+            <a:endParaRPr lang="en-US" sz="1050" dirty="0"/>
+          </a:p>
+        </p:txBody>
+      </p:sp>
+      <p:sp>
+        <p:nvSpPr>
+          <p:cNvPr id="16" name="Text 14"/>
+          <p:cNvSpPr/>
+          <p:nvPr/>
+        </p:nvSpPr>
+        <p:spPr>
+          <a:xfrm>
+            <a:off x="3401568" y="1901952"/>
+            <a:ext cx="896112" cy="201168"/>
+          </a:xfrm>
+          <a:prstGeom prst="rect">
+            <a:avLst/>
+          </a:prstGeom>
+          <a:noFill/>
+          <a:ln/>
+        </p:spPr>
+        <p:txBody>
+          <a:bodyPr wrap="square" lIns="0" tIns="0" rIns="0" bIns="0" rtlCol="0" anchor="ctr">
+            <a:normAutofit fontScale="92500" lnSpcReduction="20000"/>
+          </a:bodyPr>
+          <a:lstStyle/>
+          <a:p>
+            <a:pPr marL="0" indent="0">
+              <a:buNone/>
+            </a:pPr>
+            <a:r>
+              <a:rPr lang="en-US" sz="820" dirty="0">
+                <a:solidFill>
+                  <a:srgbClr val="ECE9FF"/>
+                </a:solidFill>
+                <a:latin typeface="Arial" pitchFamily="34" charset="0"/>
+                <a:ea typeface="Arial" pitchFamily="34" charset="-122"/>
+                <a:cs typeface="Arial" pitchFamily="34" charset="-120"/>
+              </a:rPr>
+              <a:t>Xác thực &amp; nghiệp vụ</a:t>
+            </a:r>
+            <a:endParaRPr lang="en-US" sz="820" dirty="0"/>
+          </a:p>
+        </p:txBody>
+      </p:sp>
+      <p:sp>
+        <p:nvSpPr>
+          <p:cNvPr id="17" name="Text 15"/>
+          <p:cNvSpPr/>
+          <p:nvPr/>
+        </p:nvSpPr>
+        <p:spPr>
+          <a:xfrm>
+            <a:off x="4453128" y="1728216"/>
+            <a:ext cx="347472" cy="329184"/>
+          </a:xfrm>
+          <a:prstGeom prst="rect">
+            <a:avLst/>
+          </a:prstGeom>
+          <a:noFill/>
+          <a:ln/>
+        </p:spPr>
+        <p:txBody>
+          <a:bodyPr wrap="square" lIns="0" tIns="0" rIns="0" bIns="0" rtlCol="0" anchor="ctr">
+            <a:normAutofit/>
+          </a:bodyPr>
+          <a:lstStyle/>
+          <a:p>
+            <a:pPr marL="0" indent="0" algn="ctr">
+              <a:buNone/>
+            </a:pPr>
+            <a:r>
+              <a:rPr lang="en-US" sz="2000" b="1" dirty="0">
+                <a:solidFill>
+                  <a:srgbClr val="6D55D9"/>
+                </a:solidFill>
+                <a:latin typeface="Arial" pitchFamily="34" charset="0"/>
+                <a:ea typeface="Arial" pitchFamily="34" charset="-122"/>
+                <a:cs typeface="Arial" pitchFamily="34" charset="-120"/>
+              </a:rPr>
+              <a:t>→</a:t>
+            </a:r>
+            <a:endParaRPr lang="en-US" sz="2000" dirty="0"/>
+          </a:p>
+        </p:txBody>
+      </p:sp>
+      <p:sp>
+        <p:nvSpPr>
+          <p:cNvPr id="18" name="Shape 16"/>
+          <p:cNvSpPr/>
+          <p:nvPr/>
+        </p:nvSpPr>
+        <p:spPr>
+          <a:xfrm>
+            <a:off x="4864608" y="1572768"/>
+            <a:ext cx="1737360" cy="731520"/>
+          </a:xfrm>
+          <a:prstGeom prst="roundRect">
+            <a:avLst>
+              <a:gd name="adj" fmla="val 10000"/>
+            </a:avLst>
+          </a:prstGeom>
+          <a:solidFill>
+            <a:srgbClr val="EAF8F1"/>
+          </a:solidFill>
+          <a:ln w="12700">
+            <a:solidFill>
+              <a:srgbClr val="218B67"/>
+            </a:solidFill>
+            <a:prstDash val="solid"/>
+          </a:ln>
+        </p:spPr>
+        <p:txBody>
+          <a:bodyPr/>
+          <a:lstStyle/>
+          <a:p>
+            <a:endParaRPr lang="en-US"/>
+          </a:p>
+        </p:txBody>
+      </p:sp>
+      <p:sp>
+        <p:nvSpPr>
+          <p:cNvPr id="19" name="Shape 17"/>
+          <p:cNvSpPr/>
+          <p:nvPr/>
+        </p:nvSpPr>
+        <p:spPr>
+          <a:xfrm>
+            <a:off x="4974336" y="1728216"/>
+            <a:ext cx="384048" cy="384048"/>
+          </a:xfrm>
+          <a:prstGeom prst="ellipse">
+            <a:avLst/>
+          </a:prstGeom>
+          <a:solidFill>
+            <a:srgbClr val="218B67"/>
+          </a:solidFill>
+          <a:ln w="12700">
+            <a:solidFill>
+              <a:srgbClr val="218B67"/>
+            </a:solidFill>
+            <a:prstDash val="solid"/>
+          </a:ln>
+        </p:spPr>
+        <p:txBody>
+          <a:bodyPr/>
+          <a:lstStyle/>
+          <a:p>
+            <a:endParaRPr lang="en-US"/>
+          </a:p>
+        </p:txBody>
+      </p:sp>
+      <p:sp>
+        <p:nvSpPr>
+          <p:cNvPr id="20" name="Text 18"/>
+          <p:cNvSpPr/>
+          <p:nvPr/>
+        </p:nvSpPr>
+        <p:spPr>
+          <a:xfrm>
+            <a:off x="4974336" y="1728216"/>
+            <a:ext cx="384048" cy="384048"/>
+          </a:xfrm>
+          <a:prstGeom prst="rect">
+            <a:avLst/>
+          </a:prstGeom>
+          <a:noFill/>
+          <a:ln/>
+        </p:spPr>
+        <p:txBody>
+          <a:bodyPr wrap="square" lIns="0" tIns="0" rIns="0" bIns="0" rtlCol="0" anchor="ctr">
+            <a:normAutofit/>
+          </a:bodyPr>
+          <a:lstStyle/>
+          <a:p>
+            <a:pPr marL="0" indent="0" algn="ctr">
+              <a:buNone/>
+            </a:pPr>
+            <a:r>
+              <a:rPr lang="en-US" sz="850" b="1" dirty="0">
+                <a:solidFill>
+                  <a:srgbClr val="FFFFFF"/>
+                </a:solidFill>
+                <a:latin typeface="Arial" pitchFamily="34" charset="0"/>
+                <a:ea typeface="Arial" pitchFamily="34" charset="-122"/>
+                <a:cs typeface="Arial" pitchFamily="34" charset="-120"/>
+              </a:rPr>
+              <a:t>DB</a:t>
+            </a:r>
+            <a:endParaRPr lang="en-US" sz="850" dirty="0"/>
+          </a:p>
+        </p:txBody>
+      </p:sp>
+      <p:sp>
+        <p:nvSpPr>
+          <p:cNvPr id="21" name="Text 19"/>
+          <p:cNvSpPr/>
+          <p:nvPr/>
+        </p:nvSpPr>
+        <p:spPr>
+          <a:xfrm>
+            <a:off x="5449824" y="1664208"/>
+            <a:ext cx="1060704" cy="219456"/>
+          </a:xfrm>
+          <a:prstGeom prst="rect">
+            <a:avLst/>
+          </a:prstGeom>
+          <a:noFill/>
+          <a:ln/>
+        </p:spPr>
+        <p:txBody>
+          <a:bodyPr wrap="square" lIns="0" tIns="0" rIns="0" bIns="0" rtlCol="0" anchor="ctr">
+            <a:normAutofit/>
+          </a:bodyPr>
+          <a:lstStyle/>
+          <a:p>
+            <a:pPr marL="0" indent="0">
+              <a:buNone/>
+            </a:pPr>
+            <a:r>
+              <a:rPr lang="en-US" sz="1050" b="1" dirty="0">
+                <a:solidFill>
+                  <a:srgbClr val="101957"/>
+                </a:solidFill>
+                <a:latin typeface="Arial" pitchFamily="34" charset="0"/>
+                <a:ea typeface="Arial" pitchFamily="34" charset="-122"/>
+                <a:cs typeface="Arial" pitchFamily="34" charset="-120"/>
+              </a:rPr>
+              <a:t>Cơ sở dữ liệu</a:t>
+            </a:r>
+            <a:endParaRPr lang="en-US" sz="1050" dirty="0"/>
+          </a:p>
+        </p:txBody>
+      </p:sp>
+      <p:sp>
+        <p:nvSpPr>
+          <p:cNvPr id="22" name="Text 20"/>
+          <p:cNvSpPr/>
+          <p:nvPr/>
+        </p:nvSpPr>
+        <p:spPr>
+          <a:xfrm>
+            <a:off x="5449824" y="1901952"/>
+            <a:ext cx="1060704" cy="201168"/>
+          </a:xfrm>
+          <a:prstGeom prst="rect">
+            <a:avLst/>
+          </a:prstGeom>
+          <a:noFill/>
+          <a:ln/>
+        </p:spPr>
+        <p:txBody>
+          <a:bodyPr wrap="square" lIns="0" tIns="0" rIns="0" bIns="0" rtlCol="0" anchor="ctr">
+            <a:normAutofit/>
+          </a:bodyPr>
+          <a:lstStyle/>
+          <a:p>
+            <a:pPr marL="0" indent="0">
+              <a:buNone/>
+            </a:pPr>
+            <a:r>
+              <a:rPr lang="en-US" sz="820" dirty="0">
+                <a:solidFill>
+                  <a:srgbClr val="697086"/>
+                </a:solidFill>
+                <a:latin typeface="Arial" pitchFamily="34" charset="0"/>
+                <a:ea typeface="Arial" pitchFamily="34" charset="-122"/>
+                <a:cs typeface="Arial" pitchFamily="34" charset="-120"/>
+              </a:rPr>
+              <a:t>Lưu trữ &amp; truy xuất</a:t>
+            </a:r>
+            <a:endParaRPr lang="en-US" sz="820" dirty="0"/>
+          </a:p>
+        </p:txBody>
+      </p:sp>
+      <p:sp>
+        <p:nvSpPr>
+          <p:cNvPr id="23" name="Shape 21"/>
+          <p:cNvSpPr/>
+          <p:nvPr/>
+        </p:nvSpPr>
+        <p:spPr>
+          <a:xfrm>
+            <a:off x="6748272" y="1572768"/>
+            <a:ext cx="1755648" cy="731520"/>
+          </a:xfrm>
+          <a:prstGeom prst="roundRect">
+            <a:avLst>
+              <a:gd name="adj" fmla="val 10000"/>
+            </a:avLst>
+          </a:prstGeom>
+          <a:solidFill>
+            <a:srgbClr val="FFF6E3"/>
+          </a:solidFill>
+          <a:ln w="12700">
+            <a:solidFill>
+              <a:srgbClr val="A66A12"/>
+            </a:solidFill>
+            <a:prstDash val="solid"/>
+          </a:ln>
+        </p:spPr>
+        <p:txBody>
+          <a:bodyPr/>
+          <a:lstStyle/>
+          <a:p>
+            <a:endParaRPr lang="en-US"/>
+          </a:p>
+        </p:txBody>
+      </p:sp>
+      <p:sp>
+        <p:nvSpPr>
+          <p:cNvPr id="24" name="Shape 22"/>
+          <p:cNvSpPr/>
+          <p:nvPr/>
+        </p:nvSpPr>
+        <p:spPr>
+          <a:xfrm>
+            <a:off x="6858000" y="1728216"/>
+            <a:ext cx="384048" cy="384048"/>
+          </a:xfrm>
+          <a:prstGeom prst="ellipse">
+            <a:avLst/>
+          </a:prstGeom>
+          <a:solidFill>
+            <a:srgbClr val="A66A12"/>
+          </a:solidFill>
+          <a:ln w="12700">
+            <a:solidFill>
+              <a:srgbClr val="A66A12"/>
+            </a:solidFill>
+            <a:prstDash val="solid"/>
+          </a:ln>
+        </p:spPr>
+        <p:txBody>
+          <a:bodyPr/>
+          <a:lstStyle/>
+          <a:p>
+            <a:endParaRPr lang="en-US"/>
+          </a:p>
+        </p:txBody>
+      </p:sp>
+      <p:sp>
+        <p:nvSpPr>
+          <p:cNvPr id="25" name="Text 23"/>
+          <p:cNvSpPr/>
+          <p:nvPr/>
+        </p:nvSpPr>
+        <p:spPr>
+          <a:xfrm>
+            <a:off x="6858000" y="1728216"/>
+            <a:ext cx="384048" cy="384048"/>
+          </a:xfrm>
+          <a:prstGeom prst="rect">
+            <a:avLst/>
+          </a:prstGeom>
+          <a:noFill/>
+          <a:ln/>
+        </p:spPr>
+        <p:txBody>
+          <a:bodyPr wrap="square" lIns="0" tIns="0" rIns="0" bIns="0" rtlCol="0" anchor="ctr">
+            <a:normAutofit/>
+          </a:bodyPr>
+          <a:lstStyle/>
+          <a:p>
+            <a:pPr marL="0" indent="0" algn="ctr">
+              <a:buNone/>
+            </a:pPr>
+            <a:r>
+              <a:rPr lang="en-US" sz="850" b="1" dirty="0">
+                <a:solidFill>
+                  <a:srgbClr val="FFFFFF"/>
+                </a:solidFill>
+                <a:latin typeface="Arial" pitchFamily="34" charset="0"/>
+                <a:ea typeface="Arial" pitchFamily="34" charset="-122"/>
+                <a:cs typeface="Arial" pitchFamily="34" charset="-120"/>
+              </a:rPr>
+              <a:t>EXT</a:t>
+            </a:r>
+            <a:endParaRPr lang="en-US" sz="850" dirty="0"/>
+          </a:p>
+        </p:txBody>
+      </p:sp>
+      <p:sp>
+        <p:nvSpPr>
+          <p:cNvPr id="26" name="Text 24"/>
+          <p:cNvSpPr/>
+          <p:nvPr/>
+        </p:nvSpPr>
+        <p:spPr>
+          <a:xfrm>
+            <a:off x="7333488" y="1664208"/>
+            <a:ext cx="1078992" cy="219456"/>
+          </a:xfrm>
+          <a:prstGeom prst="rect">
+            <a:avLst/>
+          </a:prstGeom>
+          <a:noFill/>
+          <a:ln/>
+        </p:spPr>
+        <p:txBody>
+          <a:bodyPr wrap="square" lIns="0" tIns="0" rIns="0" bIns="0" rtlCol="0" anchor="ctr">
+            <a:normAutofit fontScale="85000" lnSpcReduction="10000"/>
+          </a:bodyPr>
+          <a:lstStyle/>
+          <a:p>
+            <a:pPr marL="0" indent="0">
+              <a:buNone/>
+            </a:pPr>
+            <a:r>
+              <a:rPr lang="en-US" sz="1050" b="1" dirty="0">
+                <a:solidFill>
+                  <a:srgbClr val="101957"/>
+                </a:solidFill>
+                <a:latin typeface="Arial" pitchFamily="34" charset="0"/>
+                <a:ea typeface="Arial" pitchFamily="34" charset="-122"/>
+                <a:cs typeface="Arial" pitchFamily="34" charset="-120"/>
+              </a:rPr>
+              <a:t>Dịch vụ bên ngoài</a:t>
+            </a:r>
+            <a:endParaRPr lang="en-US" sz="1050" dirty="0"/>
+          </a:p>
+        </p:txBody>
+      </p:sp>
+      <p:sp>
+        <p:nvSpPr>
+          <p:cNvPr id="27" name="Text 25"/>
+          <p:cNvSpPr/>
+          <p:nvPr/>
+        </p:nvSpPr>
+        <p:spPr>
+          <a:xfrm>
+            <a:off x="7333488" y="1901952"/>
+            <a:ext cx="1078992" cy="201168"/>
+          </a:xfrm>
+          <a:prstGeom prst="rect">
+            <a:avLst/>
+          </a:prstGeom>
+          <a:noFill/>
+          <a:ln/>
+        </p:spPr>
+        <p:txBody>
+          <a:bodyPr wrap="square" lIns="0" tIns="0" rIns="0" bIns="0" rtlCol="0" anchor="ctr">
+            <a:normAutofit/>
+          </a:bodyPr>
+          <a:lstStyle/>
+          <a:p>
+            <a:pPr marL="0" indent="0">
+              <a:buNone/>
+            </a:pPr>
+            <a:r>
+              <a:rPr lang="en-US" sz="820" dirty="0">
+                <a:solidFill>
+                  <a:srgbClr val="697086"/>
+                </a:solidFill>
+                <a:latin typeface="Arial" pitchFamily="34" charset="0"/>
+                <a:ea typeface="Arial" pitchFamily="34" charset="-122"/>
+                <a:cs typeface="Arial" pitchFamily="34" charset="-120"/>
+              </a:rPr>
+              <a:t>Tích hợp hệ thống</a:t>
+            </a:r>
+            <a:endParaRPr lang="en-US" sz="820" dirty="0"/>
+          </a:p>
+        </p:txBody>
+      </p:sp>
+      <p:sp>
+        <p:nvSpPr>
+          <p:cNvPr id="28" name="Shape 26"/>
+          <p:cNvSpPr/>
+          <p:nvPr/>
+        </p:nvSpPr>
+        <p:spPr>
+          <a:xfrm>
+            <a:off x="640080" y="2542032"/>
+            <a:ext cx="1874520" cy="438912"/>
+          </a:xfrm>
+          <a:prstGeom prst="roundRect">
+            <a:avLst>
+              <a:gd name="adj" fmla="val 16667"/>
+            </a:avLst>
+          </a:prstGeom>
+          <a:solidFill>
+            <a:srgbClr val="FFF0F1"/>
+          </a:solidFill>
+          <a:ln w="12700">
+            <a:solidFill>
+              <a:srgbClr val="F2B7BA"/>
+            </a:solidFill>
+            <a:prstDash val="solid"/>
+          </a:ln>
+        </p:spPr>
+        <p:txBody>
+          <a:bodyPr/>
+          <a:lstStyle/>
+          <a:p>
+            <a:endParaRPr lang="en-US"/>
+          </a:p>
+        </p:txBody>
+      </p:sp>
+      <p:sp>
+        <p:nvSpPr>
+          <p:cNvPr id="29" name="Shape 27"/>
+          <p:cNvSpPr/>
+          <p:nvPr/>
+        </p:nvSpPr>
+        <p:spPr>
+          <a:xfrm>
+            <a:off x="740664" y="2679192"/>
+            <a:ext cx="155448" cy="155448"/>
+          </a:xfrm>
+          <a:prstGeom prst="ellipse">
+            <a:avLst/>
+          </a:prstGeom>
+          <a:solidFill>
+            <a:srgbClr val="C63F46"/>
+          </a:solidFill>
+          <a:ln w="12700">
+            <a:solidFill>
+              <a:srgbClr val="C63F46"/>
+            </a:solidFill>
+            <a:prstDash val="solid"/>
+          </a:ln>
+        </p:spPr>
+        <p:txBody>
+          <a:bodyPr/>
+          <a:lstStyle/>
+          <a:p>
+            <a:endParaRPr lang="en-US"/>
+          </a:p>
+        </p:txBody>
+      </p:sp>
+      <p:sp>
+        <p:nvSpPr>
+          <p:cNvPr id="30" name="Text 28"/>
+          <p:cNvSpPr/>
+          <p:nvPr/>
+        </p:nvSpPr>
+        <p:spPr>
+          <a:xfrm>
+            <a:off x="740664" y="2674620"/>
+            <a:ext cx="155448" cy="155448"/>
+          </a:xfrm>
+          <a:prstGeom prst="rect">
+            <a:avLst/>
+          </a:prstGeom>
+          <a:noFill/>
+          <a:ln/>
+        </p:spPr>
+        <p:txBody>
+          <a:bodyPr wrap="square" lIns="0" tIns="0" rIns="0" bIns="0" rtlCol="0" anchor="ctr">
+            <a:normAutofit/>
+          </a:bodyPr>
+          <a:lstStyle/>
+          <a:p>
+            <a:pPr marL="0" indent="0" algn="ctr">
+              <a:buNone/>
+            </a:pPr>
+            <a:r>
+              <a:rPr lang="en-US" sz="700" b="1" dirty="0">
+                <a:solidFill>
+                  <a:srgbClr val="FFFFFF"/>
+                </a:solidFill>
+                <a:latin typeface="Arial" pitchFamily="34" charset="0"/>
+                <a:ea typeface="Arial" pitchFamily="34" charset="-122"/>
+                <a:cs typeface="Arial" pitchFamily="34" charset="-120"/>
+              </a:rPr>
+              <a:t>!</a:t>
+            </a:r>
+            <a:endParaRPr lang="en-US" sz="700" dirty="0"/>
+          </a:p>
+        </p:txBody>
+      </p:sp>
+      <p:sp>
+        <p:nvSpPr>
+          <p:cNvPr id="31" name="Text 29"/>
+          <p:cNvSpPr/>
+          <p:nvPr/>
+        </p:nvSpPr>
+        <p:spPr>
+          <a:xfrm>
+            <a:off x="960120" y="2606040"/>
+            <a:ext cx="1463040" cy="274320"/>
+          </a:xfrm>
+          <a:prstGeom prst="rect">
+            <a:avLst/>
+          </a:prstGeom>
+          <a:noFill/>
+          <a:ln/>
+        </p:spPr>
+        <p:txBody>
+          <a:bodyPr wrap="square" lIns="0" tIns="0" rIns="0" bIns="0" rtlCol="0" anchor="ctr">
+            <a:normAutofit/>
+          </a:bodyPr>
+          <a:lstStyle/>
+          <a:p>
+            <a:pPr marL="0" indent="0">
+              <a:buNone/>
+            </a:pPr>
+            <a:r>
+              <a:rPr lang="en-US" sz="830" b="1" dirty="0">
+                <a:solidFill>
+                  <a:srgbClr val="9F2D35"/>
+                </a:solidFill>
+                <a:latin typeface="Arial" pitchFamily="34" charset="0"/>
+                <a:ea typeface="Arial" pitchFamily="34" charset="-122"/>
+                <a:cs typeface="Arial" pitchFamily="34" charset="-120"/>
+              </a:rPr>
+              <a:t>Lỗi xác thực / phân quyền</a:t>
+            </a:r>
+            <a:endParaRPr lang="en-US" sz="830" dirty="0"/>
+          </a:p>
+        </p:txBody>
+      </p:sp>
+      <p:sp>
+        <p:nvSpPr>
+          <p:cNvPr id="32" name="Shape 30"/>
+          <p:cNvSpPr/>
+          <p:nvPr/>
+        </p:nvSpPr>
+        <p:spPr>
+          <a:xfrm>
+            <a:off x="2651760" y="2542032"/>
+            <a:ext cx="1874520" cy="438912"/>
+          </a:xfrm>
+          <a:prstGeom prst="roundRect">
+            <a:avLst>
+              <a:gd name="adj" fmla="val 16667"/>
+            </a:avLst>
+          </a:prstGeom>
+          <a:solidFill>
+            <a:srgbClr val="FFF0F1"/>
+          </a:solidFill>
+          <a:ln w="12700">
+            <a:solidFill>
+              <a:srgbClr val="F2B7BA"/>
+            </a:solidFill>
+            <a:prstDash val="solid"/>
+          </a:ln>
+        </p:spPr>
+        <p:txBody>
+          <a:bodyPr/>
+          <a:lstStyle/>
+          <a:p>
+            <a:endParaRPr lang="en-US"/>
+          </a:p>
+        </p:txBody>
+      </p:sp>
+      <p:sp>
+        <p:nvSpPr>
+          <p:cNvPr id="33" name="Shape 31"/>
+          <p:cNvSpPr/>
+          <p:nvPr/>
+        </p:nvSpPr>
+        <p:spPr>
+          <a:xfrm>
+            <a:off x="2752344" y="2679192"/>
+            <a:ext cx="155448" cy="155448"/>
+          </a:xfrm>
+          <a:prstGeom prst="ellipse">
+            <a:avLst/>
+          </a:prstGeom>
+          <a:solidFill>
+            <a:srgbClr val="C63F46"/>
+          </a:solidFill>
+          <a:ln w="12700">
+            <a:solidFill>
+              <a:srgbClr val="C63F46"/>
+            </a:solidFill>
+            <a:prstDash val="solid"/>
+          </a:ln>
+        </p:spPr>
+        <p:txBody>
+          <a:bodyPr/>
+          <a:lstStyle/>
+          <a:p>
+            <a:endParaRPr lang="en-US"/>
+          </a:p>
+        </p:txBody>
+      </p:sp>
+      <p:sp>
+        <p:nvSpPr>
+          <p:cNvPr id="34" name="Text 32"/>
+          <p:cNvSpPr/>
+          <p:nvPr/>
+        </p:nvSpPr>
+        <p:spPr>
+          <a:xfrm>
+            <a:off x="2752344" y="2674620"/>
+            <a:ext cx="155448" cy="155448"/>
+          </a:xfrm>
+          <a:prstGeom prst="rect">
+            <a:avLst/>
+          </a:prstGeom>
+          <a:noFill/>
+          <a:ln/>
+        </p:spPr>
+        <p:txBody>
+          <a:bodyPr wrap="square" lIns="0" tIns="0" rIns="0" bIns="0" rtlCol="0" anchor="ctr">
+            <a:normAutofit/>
+          </a:bodyPr>
+          <a:lstStyle/>
+          <a:p>
+            <a:pPr marL="0" indent="0" algn="ctr">
+              <a:buNone/>
+            </a:pPr>
+            <a:r>
+              <a:rPr lang="en-US" sz="700" b="1" dirty="0">
+                <a:solidFill>
+                  <a:srgbClr val="FFFFFF"/>
+                </a:solidFill>
+                <a:latin typeface="Arial" pitchFamily="34" charset="0"/>
+                <a:ea typeface="Arial" pitchFamily="34" charset="-122"/>
+                <a:cs typeface="Arial" pitchFamily="34" charset="-120"/>
+              </a:rPr>
+              <a:t>!</a:t>
+            </a:r>
+            <a:endParaRPr lang="en-US" sz="700" dirty="0"/>
+          </a:p>
+        </p:txBody>
+      </p:sp>
+      <p:sp>
+        <p:nvSpPr>
+          <p:cNvPr id="35" name="Text 33"/>
+          <p:cNvSpPr/>
+          <p:nvPr/>
+        </p:nvSpPr>
+        <p:spPr>
+          <a:xfrm>
+            <a:off x="2971800" y="2606040"/>
+            <a:ext cx="1463040" cy="274320"/>
+          </a:xfrm>
+          <a:prstGeom prst="rect">
+            <a:avLst/>
+          </a:prstGeom>
+          <a:noFill/>
+          <a:ln/>
+        </p:spPr>
+        <p:txBody>
+          <a:bodyPr wrap="square" lIns="0" tIns="0" rIns="0" bIns="0" rtlCol="0" anchor="ctr">
+            <a:normAutofit/>
+          </a:bodyPr>
+          <a:lstStyle/>
+          <a:p>
+            <a:pPr marL="0" indent="0">
+              <a:buNone/>
+            </a:pPr>
+            <a:r>
+              <a:rPr lang="en-US" sz="830" b="1" dirty="0">
+                <a:solidFill>
+                  <a:srgbClr val="9F2D35"/>
+                </a:solidFill>
+                <a:latin typeface="Arial" pitchFamily="34" charset="0"/>
+                <a:ea typeface="Arial" pitchFamily="34" charset="-122"/>
+                <a:cs typeface="Arial" pitchFamily="34" charset="-120"/>
+              </a:rPr>
+              <a:t>Sai lệch dữ liệu</a:t>
+            </a:r>
+            <a:endParaRPr lang="en-US" sz="830" dirty="0"/>
+          </a:p>
+        </p:txBody>
+      </p:sp>
+      <p:sp>
+        <p:nvSpPr>
+          <p:cNvPr id="36" name="Shape 34"/>
+          <p:cNvSpPr/>
+          <p:nvPr/>
+        </p:nvSpPr>
+        <p:spPr>
+          <a:xfrm>
+            <a:off x="4663440" y="2542032"/>
+            <a:ext cx="1874520" cy="438912"/>
+          </a:xfrm>
+          <a:prstGeom prst="roundRect">
+            <a:avLst>
+              <a:gd name="adj" fmla="val 16667"/>
+            </a:avLst>
+          </a:prstGeom>
+          <a:solidFill>
+            <a:srgbClr val="FFF0F1"/>
+          </a:solidFill>
+          <a:ln w="12700">
+            <a:solidFill>
+              <a:srgbClr val="F2B7BA"/>
+            </a:solidFill>
+            <a:prstDash val="solid"/>
+          </a:ln>
+        </p:spPr>
+        <p:txBody>
+          <a:bodyPr/>
+          <a:lstStyle/>
+          <a:p>
+            <a:endParaRPr lang="en-US"/>
+          </a:p>
+        </p:txBody>
+      </p:sp>
+      <p:sp>
+        <p:nvSpPr>
+          <p:cNvPr id="37" name="Shape 35"/>
+          <p:cNvSpPr/>
+          <p:nvPr/>
+        </p:nvSpPr>
+        <p:spPr>
+          <a:xfrm>
+            <a:off x="4764024" y="2679192"/>
+            <a:ext cx="155448" cy="155448"/>
+          </a:xfrm>
+          <a:prstGeom prst="ellipse">
+            <a:avLst/>
+          </a:prstGeom>
+          <a:solidFill>
+            <a:srgbClr val="C63F46"/>
+          </a:solidFill>
+          <a:ln w="12700">
+            <a:solidFill>
+              <a:srgbClr val="C63F46"/>
+            </a:solidFill>
+            <a:prstDash val="solid"/>
+          </a:ln>
+        </p:spPr>
+        <p:txBody>
+          <a:bodyPr/>
+          <a:lstStyle/>
+          <a:p>
+            <a:endParaRPr lang="en-US"/>
+          </a:p>
+        </p:txBody>
+      </p:sp>
+      <p:sp>
+        <p:nvSpPr>
+          <p:cNvPr id="38" name="Text 36"/>
+          <p:cNvSpPr/>
+          <p:nvPr/>
+        </p:nvSpPr>
+        <p:spPr>
+          <a:xfrm>
+            <a:off x="4764024" y="2674620"/>
+            <a:ext cx="155448" cy="155448"/>
+          </a:xfrm>
+          <a:prstGeom prst="rect">
+            <a:avLst/>
+          </a:prstGeom>
+          <a:noFill/>
+          <a:ln/>
+        </p:spPr>
+        <p:txBody>
+          <a:bodyPr wrap="square" lIns="0" tIns="0" rIns="0" bIns="0" rtlCol="0" anchor="ctr">
+            <a:normAutofit/>
+          </a:bodyPr>
+          <a:lstStyle/>
+          <a:p>
+            <a:pPr marL="0" indent="0" algn="ctr">
+              <a:buNone/>
+            </a:pPr>
+            <a:r>
+              <a:rPr lang="en-US" sz="700" b="1" dirty="0">
+                <a:solidFill>
+                  <a:srgbClr val="FFFFFF"/>
+                </a:solidFill>
+                <a:latin typeface="Arial" pitchFamily="34" charset="0"/>
+                <a:ea typeface="Arial" pitchFamily="34" charset="-122"/>
+                <a:cs typeface="Arial" pitchFamily="34" charset="-120"/>
+              </a:rPr>
+              <a:t>!</a:t>
+            </a:r>
+            <a:endParaRPr lang="en-US" sz="700" dirty="0"/>
+          </a:p>
+        </p:txBody>
+      </p:sp>
+      <p:sp>
+        <p:nvSpPr>
+          <p:cNvPr id="39" name="Text 37"/>
+          <p:cNvSpPr/>
+          <p:nvPr/>
+        </p:nvSpPr>
+        <p:spPr>
+          <a:xfrm>
+            <a:off x="4983480" y="2606040"/>
+            <a:ext cx="1463040" cy="274320"/>
+          </a:xfrm>
+          <a:prstGeom prst="rect">
+            <a:avLst/>
+          </a:prstGeom>
+          <a:noFill/>
+          <a:ln/>
+        </p:spPr>
+        <p:txBody>
+          <a:bodyPr wrap="square" lIns="0" tIns="0" rIns="0" bIns="0" rtlCol="0" anchor="ctr">
+            <a:normAutofit/>
+          </a:bodyPr>
+          <a:lstStyle/>
+          <a:p>
+            <a:pPr marL="0" indent="0">
+              <a:buNone/>
+            </a:pPr>
+            <a:r>
+              <a:rPr lang="en-US" sz="830" b="1" dirty="0">
+                <a:solidFill>
+                  <a:srgbClr val="9F2D35"/>
+                </a:solidFill>
+                <a:latin typeface="Arial" pitchFamily="34" charset="0"/>
+                <a:ea typeface="Arial" pitchFamily="34" charset="-122"/>
+                <a:cs typeface="Arial" pitchFamily="34" charset="-120"/>
+              </a:rPr>
+              <a:t>Lỗi tích hợp hệ thống</a:t>
+            </a:r>
+            <a:endParaRPr lang="en-US" sz="830" dirty="0"/>
+          </a:p>
+        </p:txBody>
+      </p:sp>
+      <p:sp>
+        <p:nvSpPr>
+          <p:cNvPr id="40" name="Shape 38"/>
+          <p:cNvSpPr/>
+          <p:nvPr/>
+        </p:nvSpPr>
+        <p:spPr>
+          <a:xfrm>
+            <a:off x="6675120" y="2542032"/>
+            <a:ext cx="1828800" cy="438912"/>
+          </a:xfrm>
+          <a:prstGeom prst="roundRect">
+            <a:avLst>
+              <a:gd name="adj" fmla="val 16667"/>
+            </a:avLst>
+          </a:prstGeom>
+          <a:solidFill>
+            <a:srgbClr val="FFF0F1"/>
+          </a:solidFill>
+          <a:ln w="12700">
+            <a:solidFill>
+              <a:srgbClr val="F2B7BA"/>
+            </a:solidFill>
+            <a:prstDash val="solid"/>
+          </a:ln>
+        </p:spPr>
+        <p:txBody>
+          <a:bodyPr/>
+          <a:lstStyle/>
+          <a:p>
+            <a:endParaRPr lang="en-US"/>
+          </a:p>
+        </p:txBody>
+      </p:sp>
+      <p:sp>
+        <p:nvSpPr>
+          <p:cNvPr id="41" name="Shape 39"/>
+          <p:cNvSpPr/>
+          <p:nvPr/>
+        </p:nvSpPr>
+        <p:spPr>
+          <a:xfrm>
+            <a:off x="6775704" y="2679192"/>
+            <a:ext cx="155448" cy="155448"/>
+          </a:xfrm>
+          <a:prstGeom prst="ellipse">
+            <a:avLst/>
+          </a:prstGeom>
+          <a:solidFill>
+            <a:srgbClr val="C63F46"/>
+          </a:solidFill>
+          <a:ln w="12700">
+            <a:solidFill>
+              <a:srgbClr val="C63F46"/>
+            </a:solidFill>
+            <a:prstDash val="solid"/>
+          </a:ln>
+        </p:spPr>
+        <p:txBody>
+          <a:bodyPr/>
+          <a:lstStyle/>
+          <a:p>
+            <a:endParaRPr lang="en-US"/>
+          </a:p>
+        </p:txBody>
+      </p:sp>
+      <p:sp>
+        <p:nvSpPr>
+          <p:cNvPr id="42" name="Text 40"/>
+          <p:cNvSpPr/>
+          <p:nvPr/>
+        </p:nvSpPr>
+        <p:spPr>
+          <a:xfrm>
+            <a:off x="6775704" y="2674620"/>
+            <a:ext cx="155448" cy="155448"/>
+          </a:xfrm>
+          <a:prstGeom prst="rect">
+            <a:avLst/>
+          </a:prstGeom>
+          <a:noFill/>
+          <a:ln/>
+        </p:spPr>
+        <p:txBody>
+          <a:bodyPr wrap="square" lIns="0" tIns="0" rIns="0" bIns="0" rtlCol="0" anchor="ctr">
+            <a:normAutofit/>
+          </a:bodyPr>
+          <a:lstStyle/>
+          <a:p>
+            <a:pPr marL="0" indent="0" algn="ctr">
+              <a:buNone/>
+            </a:pPr>
+            <a:r>
+              <a:rPr lang="en-US" sz="700" b="1" dirty="0">
+                <a:solidFill>
+                  <a:srgbClr val="FFFFFF"/>
+                </a:solidFill>
+                <a:latin typeface="Arial" pitchFamily="34" charset="0"/>
+                <a:ea typeface="Arial" pitchFamily="34" charset="-122"/>
+                <a:cs typeface="Arial" pitchFamily="34" charset="-120"/>
+              </a:rPr>
+              <a:t>!</a:t>
+            </a:r>
+            <a:endParaRPr lang="en-US" sz="700" dirty="0"/>
+          </a:p>
+        </p:txBody>
+      </p:sp>
+      <p:sp>
+        <p:nvSpPr>
+          <p:cNvPr id="43" name="Text 41"/>
+          <p:cNvSpPr/>
+          <p:nvPr/>
+        </p:nvSpPr>
+        <p:spPr>
+          <a:xfrm>
+            <a:off x="6995160" y="2606040"/>
+            <a:ext cx="1417320" cy="274320"/>
+          </a:xfrm>
+          <a:prstGeom prst="rect">
+            <a:avLst/>
+          </a:prstGeom>
+          <a:noFill/>
+          <a:ln/>
+        </p:spPr>
+        <p:txBody>
+          <a:bodyPr wrap="square" lIns="0" tIns="0" rIns="0" bIns="0" rtlCol="0" anchor="ctr">
+            <a:normAutofit/>
+          </a:bodyPr>
+          <a:lstStyle/>
+          <a:p>
+            <a:pPr marL="0" indent="0">
+              <a:buNone/>
+            </a:pPr>
+            <a:r>
+              <a:rPr lang="en-US" sz="830" b="1" dirty="0">
+                <a:solidFill>
+                  <a:srgbClr val="9F2D35"/>
+                </a:solidFill>
+                <a:latin typeface="Arial" pitchFamily="34" charset="0"/>
+                <a:ea typeface="Arial" pitchFamily="34" charset="-122"/>
+                <a:cs typeface="Arial" pitchFamily="34" charset="-120"/>
+              </a:rPr>
+              <a:t>Gián đoạn / giảm hiệu năng</a:t>
+            </a:r>
+            <a:endParaRPr lang="en-US" sz="830" dirty="0"/>
+          </a:p>
+        </p:txBody>
+      </p:sp>
+      <p:sp>
+        <p:nvSpPr>
+          <p:cNvPr id="44" name="Shape 42"/>
+          <p:cNvSpPr/>
+          <p:nvPr/>
+        </p:nvSpPr>
+        <p:spPr>
+          <a:xfrm>
+            <a:off x="640080" y="3310128"/>
+            <a:ext cx="2514600" cy="841248"/>
+          </a:xfrm>
+          <a:prstGeom prst="roundRect">
+            <a:avLst>
+              <a:gd name="adj" fmla="val 8696"/>
+            </a:avLst>
+          </a:prstGeom>
+          <a:solidFill>
+            <a:srgbClr val="EAF3FC"/>
+          </a:solidFill>
+          <a:ln w="12700">
+            <a:solidFill>
+              <a:srgbClr val="EAF3FC"/>
+            </a:solidFill>
+            <a:prstDash val="solid"/>
+          </a:ln>
+        </p:spPr>
+        <p:txBody>
+          <a:bodyPr/>
+          <a:lstStyle/>
+          <a:p>
+            <a:endParaRPr lang="en-US"/>
+          </a:p>
+        </p:txBody>
+      </p:sp>
+      <p:sp>
+        <p:nvSpPr>
+          <p:cNvPr id="45" name="Shape 43"/>
+          <p:cNvSpPr/>
+          <p:nvPr/>
+        </p:nvSpPr>
+        <p:spPr>
+          <a:xfrm>
+            <a:off x="795528" y="3493008"/>
+            <a:ext cx="347472" cy="347472"/>
+          </a:xfrm>
+          <a:prstGeom prst="ellipse">
+            <a:avLst/>
+          </a:prstGeom>
+          <a:solidFill>
+            <a:srgbClr val="3478C7"/>
+          </a:solidFill>
+          <a:ln w="12700">
+            <a:solidFill>
+              <a:srgbClr val="3478C7"/>
+            </a:solidFill>
+            <a:prstDash val="solid"/>
+          </a:ln>
+        </p:spPr>
+        <p:txBody>
+          <a:bodyPr/>
+          <a:lstStyle/>
+          <a:p>
+            <a:endParaRPr lang="en-US"/>
+          </a:p>
+        </p:txBody>
+      </p:sp>
+      <p:sp>
+        <p:nvSpPr>
+          <p:cNvPr id="46" name="Text 44"/>
+          <p:cNvSpPr/>
+          <p:nvPr/>
+        </p:nvSpPr>
+        <p:spPr>
+          <a:xfrm>
+            <a:off x="795528" y="3493008"/>
+            <a:ext cx="347472" cy="347472"/>
+          </a:xfrm>
+          <a:prstGeom prst="rect">
+            <a:avLst/>
+          </a:prstGeom>
+          <a:noFill/>
+          <a:ln/>
+        </p:spPr>
+        <p:txBody>
+          <a:bodyPr wrap="square" lIns="0" tIns="0" rIns="0" bIns="0" rtlCol="0" anchor="ctr">
+            <a:normAutofit/>
+          </a:bodyPr>
+          <a:lstStyle/>
+          <a:p>
+            <a:pPr marL="0" indent="0" algn="ctr">
+              <a:buNone/>
+            </a:pPr>
+            <a:r>
+              <a:rPr lang="en-US" sz="900" b="1" dirty="0">
+                <a:solidFill>
+                  <a:srgbClr val="FFFFFF"/>
+                </a:solidFill>
+                <a:latin typeface="Arial" pitchFamily="34" charset="0"/>
+                <a:ea typeface="Arial" pitchFamily="34" charset="-122"/>
+                <a:cs typeface="Arial" pitchFamily="34" charset="-120"/>
+              </a:rPr>
+              <a:t>01</a:t>
+            </a:r>
+            <a:endParaRPr lang="en-US" sz="900" dirty="0"/>
+          </a:p>
+        </p:txBody>
+      </p:sp>
+      <p:sp>
+        <p:nvSpPr>
+          <p:cNvPr id="47" name="Text 45"/>
+          <p:cNvSpPr/>
+          <p:nvPr/>
+        </p:nvSpPr>
+        <p:spPr>
+          <a:xfrm>
+            <a:off x="1261872" y="3401568"/>
+            <a:ext cx="1719072" cy="219456"/>
+          </a:xfrm>
+          <a:prstGeom prst="rect">
+            <a:avLst/>
+          </a:prstGeom>
+          <a:noFill/>
+          <a:ln/>
+        </p:spPr>
+        <p:txBody>
+          <a:bodyPr wrap="square" lIns="0" tIns="0" rIns="0" bIns="0" rtlCol="0" anchor="ctr">
+            <a:normAutofit/>
+          </a:bodyPr>
+          <a:lstStyle/>
+          <a:p>
+            <a:pPr marL="0" indent="0">
+              <a:buNone/>
+            </a:pPr>
+            <a:r>
+              <a:rPr lang="en-US" sz="1040" b="1" dirty="0">
+                <a:solidFill>
+                  <a:srgbClr val="101957"/>
+                </a:solidFill>
+                <a:latin typeface="Arial" pitchFamily="34" charset="0"/>
+                <a:ea typeface="Arial" pitchFamily="34" charset="-122"/>
+                <a:cs typeface="Arial" pitchFamily="34" charset="-120"/>
+              </a:rPr>
+              <a:t>Phạm vi lớn</a:t>
+            </a:r>
+            <a:endParaRPr lang="en-US" sz="1040" dirty="0"/>
+          </a:p>
+        </p:txBody>
+      </p:sp>
+      <p:sp>
+        <p:nvSpPr>
+          <p:cNvPr id="48" name="Text 46"/>
+          <p:cNvSpPr/>
+          <p:nvPr/>
+        </p:nvSpPr>
+        <p:spPr>
+          <a:xfrm>
+            <a:off x="1261872" y="3639312"/>
+            <a:ext cx="1737360" cy="393192"/>
+          </a:xfrm>
+          <a:prstGeom prst="rect">
+            <a:avLst/>
+          </a:prstGeom>
+          <a:noFill/>
+          <a:ln/>
+        </p:spPr>
+        <p:txBody>
+          <a:bodyPr wrap="square" lIns="0" tIns="0" rIns="0" bIns="0" rtlCol="0" anchor="t">
+            <a:normAutofit/>
+          </a:bodyPr>
+          <a:lstStyle/>
+          <a:p>
+            <a:pPr marL="0" indent="0">
+              <a:buNone/>
+            </a:pPr>
+            <a:r>
+              <a:rPr lang="en-US" sz="840" dirty="0">
+                <a:solidFill>
+                  <a:srgbClr val="20243A"/>
+                </a:solidFill>
+                <a:latin typeface="Arial" pitchFamily="34" charset="0"/>
+                <a:ea typeface="Arial" pitchFamily="34" charset="-122"/>
+                <a:cs typeface="Arial" pitchFamily="34" charset="-120"/>
+              </a:rPr>
+              <a:t>Số lượng endpoint và tích hợp tăng nhanh khiến kiểm thử thủ công khó bao phủ.</a:t>
+            </a:r>
+            <a:endParaRPr lang="en-US" sz="840" dirty="0"/>
+          </a:p>
+        </p:txBody>
+      </p:sp>
+      <p:sp>
+        <p:nvSpPr>
+          <p:cNvPr id="49" name="Shape 47"/>
+          <p:cNvSpPr/>
+          <p:nvPr/>
+        </p:nvSpPr>
+        <p:spPr>
+          <a:xfrm>
+            <a:off x="3310128" y="3310128"/>
+            <a:ext cx="2514600" cy="841248"/>
+          </a:xfrm>
+          <a:prstGeom prst="roundRect">
+            <a:avLst>
+              <a:gd name="adj" fmla="val 8696"/>
+            </a:avLst>
+          </a:prstGeom>
+          <a:solidFill>
+            <a:srgbClr val="FFF0F1"/>
+          </a:solidFill>
+          <a:ln w="12700">
+            <a:solidFill>
+              <a:srgbClr val="FFF0F1"/>
+            </a:solidFill>
+            <a:prstDash val="solid"/>
+          </a:ln>
+        </p:spPr>
+        <p:txBody>
+          <a:bodyPr/>
+          <a:lstStyle/>
+          <a:p>
+            <a:endParaRPr lang="en-US"/>
+          </a:p>
+        </p:txBody>
+      </p:sp>
+      <p:sp>
+        <p:nvSpPr>
+          <p:cNvPr id="50" name="Shape 48"/>
+          <p:cNvSpPr/>
+          <p:nvPr/>
+        </p:nvSpPr>
+        <p:spPr>
+          <a:xfrm>
+            <a:off x="3465576" y="3493008"/>
+            <a:ext cx="347472" cy="347472"/>
+          </a:xfrm>
+          <a:prstGeom prst="ellipse">
+            <a:avLst/>
+          </a:prstGeom>
+          <a:solidFill>
+            <a:srgbClr val="C63F46"/>
+          </a:solidFill>
+          <a:ln w="12700">
+            <a:solidFill>
+              <a:srgbClr val="C63F46"/>
+            </a:solidFill>
+            <a:prstDash val="solid"/>
+          </a:ln>
+        </p:spPr>
+        <p:txBody>
+          <a:bodyPr/>
+          <a:lstStyle/>
+          <a:p>
+            <a:endParaRPr lang="en-US"/>
+          </a:p>
+        </p:txBody>
+      </p:sp>
+      <p:sp>
+        <p:nvSpPr>
+          <p:cNvPr id="51" name="Text 49"/>
+          <p:cNvSpPr/>
+          <p:nvPr/>
+        </p:nvSpPr>
+        <p:spPr>
+          <a:xfrm>
+            <a:off x="3465576" y="3493008"/>
+            <a:ext cx="347472" cy="347472"/>
+          </a:xfrm>
+          <a:prstGeom prst="rect">
+            <a:avLst/>
+          </a:prstGeom>
+          <a:noFill/>
+          <a:ln/>
+        </p:spPr>
+        <p:txBody>
+          <a:bodyPr wrap="square" lIns="0" tIns="0" rIns="0" bIns="0" rtlCol="0" anchor="ctr">
+            <a:normAutofit/>
+          </a:bodyPr>
+          <a:lstStyle/>
+          <a:p>
+            <a:pPr marL="0" indent="0" algn="ctr">
+              <a:buNone/>
+            </a:pPr>
+            <a:r>
+              <a:rPr lang="en-US" sz="900" b="1" dirty="0">
+                <a:solidFill>
+                  <a:srgbClr val="FFFFFF"/>
+                </a:solidFill>
+                <a:latin typeface="Arial" pitchFamily="34" charset="0"/>
+                <a:ea typeface="Arial" pitchFamily="34" charset="-122"/>
+                <a:cs typeface="Arial" pitchFamily="34" charset="-120"/>
+              </a:rPr>
+              <a:t>02</a:t>
+            </a:r>
+            <a:endParaRPr lang="en-US" sz="900" dirty="0"/>
+          </a:p>
+        </p:txBody>
+      </p:sp>
+      <p:sp>
+        <p:nvSpPr>
+          <p:cNvPr id="52" name="Text 50"/>
+          <p:cNvSpPr/>
+          <p:nvPr/>
+        </p:nvSpPr>
+        <p:spPr>
+          <a:xfrm>
+            <a:off x="3931920" y="3401568"/>
+            <a:ext cx="1719072" cy="219456"/>
+          </a:xfrm>
+          <a:prstGeom prst="rect">
+            <a:avLst/>
+          </a:prstGeom>
+          <a:noFill/>
+          <a:ln/>
+        </p:spPr>
+        <p:txBody>
+          <a:bodyPr wrap="square" lIns="0" tIns="0" rIns="0" bIns="0" rtlCol="0" anchor="ctr">
+            <a:normAutofit/>
+          </a:bodyPr>
+          <a:lstStyle/>
+          <a:p>
+            <a:pPr marL="0" indent="0">
+              <a:buNone/>
+            </a:pPr>
+            <a:r>
+              <a:rPr lang="en-US" sz="1040" b="1" dirty="0">
+                <a:solidFill>
+                  <a:srgbClr val="101957"/>
+                </a:solidFill>
+                <a:latin typeface="Arial" pitchFamily="34" charset="0"/>
+                <a:ea typeface="Arial" pitchFamily="34" charset="-122"/>
+                <a:cs typeface="Arial" pitchFamily="34" charset="-120"/>
+              </a:rPr>
+              <a:t>Rủi ro trực tiếp</a:t>
+            </a:r>
+            <a:endParaRPr lang="en-US" sz="1040" dirty="0"/>
+          </a:p>
+        </p:txBody>
+      </p:sp>
+      <p:sp>
+        <p:nvSpPr>
+          <p:cNvPr id="53" name="Text 51"/>
+          <p:cNvSpPr/>
+          <p:nvPr/>
+        </p:nvSpPr>
+        <p:spPr>
+          <a:xfrm>
+            <a:off x="3931920" y="3639312"/>
+            <a:ext cx="1737360" cy="393192"/>
+          </a:xfrm>
+          <a:prstGeom prst="rect">
+            <a:avLst/>
+          </a:prstGeom>
+          <a:noFill/>
+          <a:ln/>
+        </p:spPr>
+        <p:txBody>
+          <a:bodyPr wrap="square" lIns="0" tIns="0" rIns="0" bIns="0" rtlCol="0" anchor="t">
+            <a:normAutofit/>
+          </a:bodyPr>
+          <a:lstStyle/>
+          <a:p>
+            <a:pPr marL="0" indent="0">
+              <a:buNone/>
+            </a:pPr>
+            <a:r>
+              <a:rPr lang="en-US" sz="840" dirty="0">
+                <a:solidFill>
+                  <a:srgbClr val="20243A"/>
+                </a:solidFill>
+                <a:latin typeface="Arial" pitchFamily="34" charset="0"/>
+                <a:ea typeface="Arial" pitchFamily="34" charset="-122"/>
+                <a:cs typeface="Arial" pitchFamily="34" charset="-120"/>
+              </a:rPr>
+              <a:t>Lỗi API ảnh hưởng đến bảo mật, tính toàn vẹn dữ liệu và hoạt động kinh doanh.</a:t>
+            </a:r>
+            <a:endParaRPr lang="en-US" sz="840" dirty="0"/>
+          </a:p>
+        </p:txBody>
+      </p:sp>
+      <p:sp>
+        <p:nvSpPr>
+          <p:cNvPr id="54" name="Shape 52"/>
+          <p:cNvSpPr/>
+          <p:nvPr/>
+        </p:nvSpPr>
+        <p:spPr>
+          <a:xfrm>
+            <a:off x="5980176" y="3310128"/>
+            <a:ext cx="2514600" cy="841248"/>
+          </a:xfrm>
+          <a:prstGeom prst="roundRect">
+            <a:avLst>
+              <a:gd name="adj" fmla="val 8696"/>
+            </a:avLst>
+          </a:prstGeom>
+          <a:solidFill>
+            <a:srgbClr val="EEEAFE"/>
+          </a:solidFill>
+          <a:ln w="12700">
+            <a:solidFill>
+              <a:srgbClr val="EEEAFE"/>
+            </a:solidFill>
+            <a:prstDash val="solid"/>
+          </a:ln>
+        </p:spPr>
+        <p:txBody>
+          <a:bodyPr/>
+          <a:lstStyle/>
+          <a:p>
+            <a:endParaRPr lang="en-US"/>
+          </a:p>
+        </p:txBody>
+      </p:sp>
+      <p:sp>
+        <p:nvSpPr>
+          <p:cNvPr id="55" name="Shape 53"/>
+          <p:cNvSpPr/>
+          <p:nvPr/>
+        </p:nvSpPr>
+        <p:spPr>
+          <a:xfrm>
+            <a:off x="6135624" y="3493008"/>
+            <a:ext cx="347472" cy="347472"/>
+          </a:xfrm>
+          <a:prstGeom prst="ellipse">
+            <a:avLst/>
+          </a:prstGeom>
+          <a:solidFill>
+            <a:srgbClr val="6D55D9"/>
+          </a:solidFill>
+          <a:ln w="12700">
+            <a:solidFill>
+              <a:srgbClr val="6D55D9"/>
+            </a:solidFill>
+            <a:prstDash val="solid"/>
+          </a:ln>
+        </p:spPr>
+        <p:txBody>
+          <a:bodyPr/>
+          <a:lstStyle/>
+          <a:p>
+            <a:endParaRPr lang="en-US"/>
+          </a:p>
+        </p:txBody>
+      </p:sp>
+      <p:sp>
+        <p:nvSpPr>
+          <p:cNvPr id="56" name="Text 54"/>
+          <p:cNvSpPr/>
+          <p:nvPr/>
+        </p:nvSpPr>
+        <p:spPr>
+          <a:xfrm>
+            <a:off x="6135624" y="3493008"/>
+            <a:ext cx="347472" cy="347472"/>
+          </a:xfrm>
+          <a:prstGeom prst="rect">
+            <a:avLst/>
+          </a:prstGeom>
+          <a:noFill/>
+          <a:ln/>
+        </p:spPr>
+        <p:txBody>
+          <a:bodyPr wrap="square" lIns="0" tIns="0" rIns="0" bIns="0" rtlCol="0" anchor="ctr">
+            <a:normAutofit/>
+          </a:bodyPr>
+          <a:lstStyle/>
+          <a:p>
+            <a:pPr marL="0" indent="0" algn="ctr">
+              <a:buNone/>
+            </a:pPr>
+            <a:r>
+              <a:rPr lang="en-US" sz="900" b="1" dirty="0">
+                <a:solidFill>
+                  <a:srgbClr val="FFFFFF"/>
+                </a:solidFill>
+                <a:latin typeface="Arial" pitchFamily="34" charset="0"/>
+                <a:ea typeface="Arial" pitchFamily="34" charset="-122"/>
+                <a:cs typeface="Arial" pitchFamily="34" charset="-120"/>
+              </a:rPr>
+              <a:t>03</a:t>
+            </a:r>
+            <a:endParaRPr lang="en-US" sz="900" dirty="0"/>
+          </a:p>
+        </p:txBody>
+      </p:sp>
+      <p:sp>
+        <p:nvSpPr>
+          <p:cNvPr id="57" name="Text 55"/>
+          <p:cNvSpPr/>
+          <p:nvPr/>
+        </p:nvSpPr>
+        <p:spPr>
+          <a:xfrm>
+            <a:off x="6601968" y="3401568"/>
+            <a:ext cx="1719072" cy="219456"/>
+          </a:xfrm>
+          <a:prstGeom prst="rect">
+            <a:avLst/>
+          </a:prstGeom>
+          <a:noFill/>
+          <a:ln/>
+        </p:spPr>
+        <p:txBody>
+          <a:bodyPr wrap="square" lIns="0" tIns="0" rIns="0" bIns="0" rtlCol="0" anchor="ctr">
+            <a:normAutofit/>
+          </a:bodyPr>
+          <a:lstStyle/>
+          <a:p>
+            <a:pPr marL="0" indent="0">
+              <a:buNone/>
+            </a:pPr>
+            <a:r>
+              <a:rPr lang="en-US" sz="1040" b="1" dirty="0">
+                <a:solidFill>
+                  <a:srgbClr val="101957"/>
+                </a:solidFill>
+                <a:latin typeface="Arial" pitchFamily="34" charset="0"/>
+                <a:ea typeface="Arial" pitchFamily="34" charset="-122"/>
+                <a:cs typeface="Arial" pitchFamily="34" charset="-120"/>
+              </a:rPr>
+              <a:t>Thay đổi liên tục</a:t>
+            </a:r>
+            <a:endParaRPr lang="en-US" sz="1040" dirty="0"/>
+          </a:p>
+        </p:txBody>
+      </p:sp>
+      <p:sp>
+        <p:nvSpPr>
+          <p:cNvPr id="58" name="Text 56"/>
+          <p:cNvSpPr/>
+          <p:nvPr/>
+        </p:nvSpPr>
+        <p:spPr>
+          <a:xfrm>
+            <a:off x="6601968" y="3639312"/>
+            <a:ext cx="1737360" cy="393192"/>
+          </a:xfrm>
+          <a:prstGeom prst="rect">
+            <a:avLst/>
+          </a:prstGeom>
+          <a:noFill/>
+          <a:ln/>
+        </p:spPr>
+        <p:txBody>
+          <a:bodyPr wrap="square" lIns="0" tIns="0" rIns="0" bIns="0" rtlCol="0" anchor="t">
+            <a:normAutofit/>
+          </a:bodyPr>
+          <a:lstStyle/>
+          <a:p>
+            <a:pPr marL="0" indent="0">
+              <a:buNone/>
+            </a:pPr>
+            <a:r>
+              <a:rPr lang="en-US" sz="840" dirty="0">
+                <a:solidFill>
+                  <a:srgbClr val="20243A"/>
+                </a:solidFill>
+                <a:latin typeface="Arial" pitchFamily="34" charset="0"/>
+                <a:ea typeface="Arial" pitchFamily="34" charset="-122"/>
+                <a:cs typeface="Arial" pitchFamily="34" charset="-120"/>
+              </a:rPr>
+              <a:t>Lỗi hồi quy dễ bị bỏ sót khi ứng dụng, API và các tích hợp cùng thay đổi.</a:t>
+            </a:r>
+            <a:endParaRPr lang="en-US" sz="840" dirty="0"/>
+          </a:p>
+        </p:txBody>
+      </p:sp>
+      <p:sp>
+        <p:nvSpPr>
+          <p:cNvPr id="59" name="Shape 57"/>
+          <p:cNvSpPr/>
+          <p:nvPr/>
+        </p:nvSpPr>
+        <p:spPr>
+          <a:xfrm>
+            <a:off x="640080" y="4315968"/>
+            <a:ext cx="7863840" cy="402336"/>
+          </a:xfrm>
+          <a:prstGeom prst="roundRect">
+            <a:avLst>
+              <a:gd name="adj" fmla="val 18182"/>
+            </a:avLst>
+          </a:prstGeom>
+          <a:solidFill>
+            <a:srgbClr val="101957"/>
+          </a:solidFill>
+          <a:ln w="12700">
+            <a:solidFill>
+              <a:srgbClr val="101957"/>
+            </a:solidFill>
+            <a:prstDash val="solid"/>
+          </a:ln>
+        </p:spPr>
+        <p:txBody>
+          <a:bodyPr/>
+          <a:lstStyle/>
+          <a:p>
+            <a:endParaRPr lang="en-US"/>
+          </a:p>
+        </p:txBody>
+      </p:sp>
+      <p:sp>
+        <p:nvSpPr>
+          <p:cNvPr id="60" name="Text 58"/>
+          <p:cNvSpPr/>
+          <p:nvPr/>
+        </p:nvSpPr>
+        <p:spPr>
+          <a:xfrm>
+            <a:off x="841248" y="4416552"/>
+            <a:ext cx="822960" cy="164592"/>
+          </a:xfrm>
+          <a:prstGeom prst="rect">
+            <a:avLst/>
+          </a:prstGeom>
+          <a:noFill/>
+          <a:ln/>
+        </p:spPr>
+        <p:txBody>
+          <a:bodyPr wrap="square" lIns="0" tIns="0" rIns="0" bIns="0" rtlCol="0" anchor="ctr">
+            <a:normAutofit/>
+          </a:bodyPr>
+          <a:lstStyle/>
+          <a:p>
+            <a:pPr marL="0" indent="0">
+              <a:buNone/>
+            </a:pPr>
+            <a:r>
+              <a:rPr lang="en-US" sz="850" b="1" kern="0" spc="110" dirty="0">
+                <a:solidFill>
+                  <a:srgbClr val="BDB5FF"/>
+                </a:solidFill>
+                <a:latin typeface="Arial" pitchFamily="34" charset="0"/>
+                <a:ea typeface="Arial" pitchFamily="34" charset="-122"/>
+                <a:cs typeface="Arial" pitchFamily="34" charset="-120"/>
+              </a:rPr>
+              <a:t>KẾT LUẬN</a:t>
+            </a:r>
+            <a:endParaRPr lang="en-US" sz="850" dirty="0"/>
+          </a:p>
+        </p:txBody>
+      </p:sp>
+      <p:sp>
+        <p:nvSpPr>
+          <p:cNvPr id="61" name="Text 59"/>
+          <p:cNvSpPr/>
+          <p:nvPr/>
+        </p:nvSpPr>
+        <p:spPr>
+          <a:xfrm>
+            <a:off x="1664208" y="4370832"/>
+            <a:ext cx="6492240" cy="274320"/>
+          </a:xfrm>
+          <a:prstGeom prst="rect">
+            <a:avLst/>
+          </a:prstGeom>
+          <a:noFill/>
+          <a:ln/>
+        </p:spPr>
+        <p:txBody>
+          <a:bodyPr wrap="square" lIns="0" tIns="0" rIns="0" bIns="0" rtlCol="0" anchor="ctr">
+            <a:normAutofit/>
+          </a:bodyPr>
+          <a:lstStyle/>
+          <a:p>
+            <a:pPr marL="0" indent="0">
+              <a:buNone/>
+            </a:pPr>
+            <a:r>
+              <a:rPr lang="en-US" sz="1160" b="1" dirty="0">
+                <a:solidFill>
+                  <a:srgbClr val="FFFFFF"/>
+                </a:solidFill>
+                <a:latin typeface="Arial" pitchFamily="34" charset="0"/>
+                <a:ea typeface="Arial" pitchFamily="34" charset="-122"/>
+                <a:cs typeface="Arial" pitchFamily="34" charset="-120"/>
+              </a:rPr>
+              <a:t>Cần bộ kiểm thử API tự động, chạy lặp lại và tích hợp Git/CI</a:t>
+            </a:r>
+            <a:endParaRPr lang="en-US" sz="1160" dirty="0"/>
+          </a:p>
+        </p:txBody>
+      </p:sp>
+      <p:sp>
+        <p:nvSpPr>
+          <p:cNvPr id="62" name="Text 60"/>
+          <p:cNvSpPr/>
+          <p:nvPr/>
+        </p:nvSpPr>
+        <p:spPr>
+          <a:xfrm>
+            <a:off x="640080" y="4919472"/>
+            <a:ext cx="7863840" cy="146304"/>
+          </a:xfrm>
+          <a:prstGeom prst="rect">
+            <a:avLst/>
+          </a:prstGeom>
+          <a:noFill/>
+          <a:ln/>
+        </p:spPr>
+        <p:txBody>
+          <a:bodyPr wrap="square" lIns="0" tIns="0" rIns="0" bIns="0" rtlCol="0" anchor="ctr">
+            <a:normAutofit/>
+          </a:bodyPr>
+          <a:lstStyle/>
+          <a:p>
+            <a:pPr marL="0" indent="0">
+              <a:buNone/>
+            </a:pPr>
+            <a:r>
+              <a:rPr lang="en-US" sz="820" dirty="0">
+                <a:solidFill>
+                  <a:srgbClr val="747B8E"/>
+                </a:solidFill>
+                <a:latin typeface="Arial" pitchFamily="34" charset="0"/>
+                <a:ea typeface="Arial" pitchFamily="34" charset="-122"/>
+                <a:cs typeface="Arial" pitchFamily="34" charset="-120"/>
+              </a:rPr>
+              <a:t>Báo cáo Bài tập lớn: Kiểm thử API tự động với Bruno   |   Slide 3 / 18</a:t>
+            </a:r>
+            <a:endParaRPr lang="en-US" sz="820" dirty="0"/>
+          </a:p>
+        </p:txBody>
+      </p:sp>
     </p:spTree>
   </p:cSld>
   <p:clrMapOvr>
@@ -7329,6 +9393,7 @@
         <a:solidFill>
           <a:srgbClr val="F8F9FD"/>
         </a:solidFill>
+        <a:effectLst/>
       </p:bgPr>
     </p:bg>
     <p:spTree>
@@ -7366,7 +9431,7 @@
           <a:bodyPr wrap="square" rtlCol="0" anchor="ctr"/>
           <a:lstStyle/>
           <a:p>
-            <a:pPr indent="0" marL="0">
+            <a:pPr marL="0" indent="0">
               <a:buNone/>
             </a:pPr>
             <a:r>
@@ -7405,7 +9470,7 @@
           <a:bodyPr wrap="square" rtlCol="0" anchor="t"/>
           <a:lstStyle/>
           <a:p>
-            <a:pPr indent="0" marL="0">
+            <a:pPr marL="0" indent="0">
               <a:buNone/>
             </a:pPr>
             <a:r>
@@ -7444,7 +9509,7 @@
           <a:bodyPr wrap="square" rtlCol="0" anchor="ctr"/>
           <a:lstStyle/>
           <a:p>
-            <a:pPr indent="0" marL="0">
+            <a:pPr marL="0" indent="0">
               <a:buNone/>
             </a:pPr>
             <a:r>
@@ -7483,7 +9548,7 @@
           <a:bodyPr wrap="square" rtlCol="0" anchor="ctr"/>
           <a:lstStyle/>
           <a:p>
-            <a:pPr indent="0" marL="0">
+            <a:pPr marL="0" indent="0">
               <a:buNone/>
             </a:pPr>
             <a:r>
@@ -7503,14 +9568,14 @@
       </p:sp>
       <p:pic>
         <p:nvPicPr>
-          <p:cNvPr id="6" name="Image 0" descr="/home/andv/personal/andv-lms/docs/report/images/hinh-2-sosanh-bruno-postman.png">    </p:cNvPr>
+          <p:cNvPr id="6" name="Image 0" descr="/home/andv/personal/andv-lms/docs/report/images/hinh-2-sosanh-bruno-postman.png"/>
           <p:cNvPicPr>
             <a:picLocks noChangeAspect="1"/>
           </p:cNvPicPr>
           <p:nvPr/>
         </p:nvPicPr>
         <p:blipFill>
-          <a:blip r:embed="rId1"/>
+          <a:blip r:embed="rId3"/>
           <a:stretch>
             <a:fillRect/>
           </a:stretch>
@@ -7541,6 +9606,7 @@
         <a:solidFill>
           <a:srgbClr val="F8F9FD"/>
         </a:solidFill>
+        <a:effectLst/>
       </p:bgPr>
     </p:bg>
     <p:spTree>
@@ -7578,7 +9644,7 @@
           <a:bodyPr wrap="square" rtlCol="0" anchor="ctr"/>
           <a:lstStyle/>
           <a:p>
-            <a:pPr indent="0" marL="0">
+            <a:pPr marL="0" indent="0">
               <a:buNone/>
             </a:pPr>
             <a:r>
@@ -7617,7 +9683,7 @@
           <a:bodyPr wrap="square" rtlCol="0" anchor="t"/>
           <a:lstStyle/>
           <a:p>
-            <a:pPr indent="0" marL="0">
+            <a:pPr marL="0" indent="0">
               <a:buNone/>
             </a:pPr>
             <a:r>
@@ -7656,7 +9722,7 @@
           <a:bodyPr wrap="square" rtlCol="0" anchor="ctr"/>
           <a:lstStyle/>
           <a:p>
-            <a:pPr indent="0" marL="0">
+            <a:pPr marL="0" indent="0">
               <a:buNone/>
             </a:pPr>
             <a:r>
@@ -7698,6 +9764,13 @@
             <a:prstDash val="solid"/>
           </a:ln>
         </p:spPr>
+        <p:txBody>
+          <a:bodyPr/>
+          <a:lstStyle/>
+          <a:p>
+            <a:endParaRPr lang="en-US"/>
+          </a:p>
+        </p:txBody>
       </p:sp>
       <p:sp>
         <p:nvSpPr>
@@ -7720,7 +9793,7 @@
           <a:bodyPr wrap="square" rtlCol="0" anchor="ctr"/>
           <a:lstStyle/>
           <a:p>
-            <a:pPr indent="0" marL="0">
+            <a:pPr marL="0" indent="0">
               <a:buNone/>
             </a:pPr>
             <a:r>
@@ -7759,7 +9832,7 @@
           <a:bodyPr wrap="square" rtlCol="0" anchor="ctr"/>
           <a:lstStyle/>
           <a:p>
-            <a:pPr indent="0" marL="0">
+            <a:pPr marL="0" indent="0">
               <a:buNone/>
             </a:pPr>
             <a:r>
@@ -7798,7 +9871,7 @@
           <a:bodyPr wrap="square" rtlCol="0" anchor="ctr"/>
           <a:lstStyle/>
           <a:p>
-            <a:pPr indent="0" marL="0">
+            <a:pPr marL="0" indent="0">
               <a:lnSpc>
                 <a:spcPts val="1600"/>
               </a:lnSpc>
@@ -7843,6 +9916,13 @@
             <a:prstDash val="solid"/>
           </a:ln>
         </p:spPr>
+        <p:txBody>
+          <a:bodyPr/>
+          <a:lstStyle/>
+          <a:p>
+            <a:endParaRPr lang="en-US"/>
+          </a:p>
+        </p:txBody>
       </p:sp>
       <p:sp>
         <p:nvSpPr>
@@ -7865,7 +9945,7 @@
           <a:bodyPr wrap="square" rtlCol="0" anchor="ctr"/>
           <a:lstStyle/>
           <a:p>
-            <a:pPr indent="0" marL="0">
+            <a:pPr marL="0" indent="0">
               <a:buNone/>
             </a:pPr>
             <a:r>
@@ -7904,7 +9984,7 @@
           <a:bodyPr wrap="square" rtlCol="0" anchor="ctr"/>
           <a:lstStyle/>
           <a:p>
-            <a:pPr indent="0" marL="0">
+            <a:pPr marL="0" indent="0">
               <a:buNone/>
             </a:pPr>
             <a:r>
@@ -7943,7 +10023,7 @@
           <a:bodyPr wrap="square" rtlCol="0" anchor="ctr"/>
           <a:lstStyle/>
           <a:p>
-            <a:pPr indent="0" marL="0">
+            <a:pPr marL="0" indent="0">
               <a:lnSpc>
                 <a:spcPts val="1600"/>
               </a:lnSpc>
@@ -7988,6 +10068,13 @@
             <a:prstDash val="solid"/>
           </a:ln>
         </p:spPr>
+        <p:txBody>
+          <a:bodyPr/>
+          <a:lstStyle/>
+          <a:p>
+            <a:endParaRPr lang="en-US"/>
+          </a:p>
+        </p:txBody>
       </p:sp>
       <p:sp>
         <p:nvSpPr>
@@ -8010,7 +10097,7 @@
           <a:bodyPr wrap="square" rtlCol="0" anchor="ctr"/>
           <a:lstStyle/>
           <a:p>
-            <a:pPr indent="0" marL="0">
+            <a:pPr marL="0" indent="0">
               <a:buNone/>
             </a:pPr>
             <a:r>
@@ -8049,7 +10136,7 @@
           <a:bodyPr wrap="square" rtlCol="0" anchor="ctr"/>
           <a:lstStyle/>
           <a:p>
-            <a:pPr indent="0" marL="0">
+            <a:pPr marL="0" indent="0">
               <a:buNone/>
             </a:pPr>
             <a:r>
@@ -8088,7 +10175,7 @@
           <a:bodyPr wrap="square" rtlCol="0" anchor="ctr"/>
           <a:lstStyle/>
           <a:p>
-            <a:pPr indent="0" marL="0">
+            <a:pPr marL="0" indent="0">
               <a:lnSpc>
                 <a:spcPts val="1600"/>
               </a:lnSpc>
@@ -8125,6 +10212,7 @@
         <a:solidFill>
           <a:srgbClr val="F8F9FD"/>
         </a:solidFill>
+        <a:effectLst/>
       </p:bgPr>
     </p:bg>
     <p:spTree>
@@ -8162,7 +10250,7 @@
           <a:bodyPr wrap="square" rtlCol="0" anchor="ctr"/>
           <a:lstStyle/>
           <a:p>
-            <a:pPr indent="0" marL="0">
+            <a:pPr marL="0" indent="0">
               <a:buNone/>
             </a:pPr>
             <a:r>
@@ -8201,7 +10289,7 @@
           <a:bodyPr wrap="square" rtlCol="0" anchor="t"/>
           <a:lstStyle/>
           <a:p>
-            <a:pPr indent="0" marL="0">
+            <a:pPr marL="0" indent="0">
               <a:buNone/>
             </a:pPr>
             <a:r>
@@ -8213,7 +10301,7 @@
                 <a:ea typeface="Arial" pitchFamily="34" charset="-122"/>
                 <a:cs typeface="Arial" pitchFamily="34" charset="-120"/>
               </a:rPr>
-              <a:t>So sánh Bruno với Postman và Insomnia</a:t>
+              <a:t>Bruno vượt trội về Git-friendly và Tốc độ Tăng trưởng</a:t>
             </a:r>
             <a:endParaRPr lang="en-US" sz="1900" dirty="0"/>
           </a:p>
@@ -8240,7 +10328,7 @@
           <a:bodyPr wrap="square" rtlCol="0" anchor="ctr"/>
           <a:lstStyle/>
           <a:p>
-            <a:pPr indent="0" marL="0">
+            <a:pPr marL="0" indent="0">
               <a:buNone/>
             </a:pPr>
             <a:r>
@@ -8267,24 +10355,48 @@
           <p:nvPr>
             <p:extLst>
               <p:ext uri="{D42A27DB-BD31-4B8C-83A1-F6EECF244321}">
-                <p14:modId xmlns:p14="http://schemas.microsoft.com/office/powerpoint/2010/main" val="1579011935"/>
+                <p14:modId xmlns:p14="http://schemas.microsoft.com/office/powerpoint/2010/main" val="1332554672"/>
               </p:ext>
             </p:extLst>
           </p:nvPr>
         </p:nvGraphicFramePr>
         <p:xfrm>
           <a:off x="548640" y="960120"/>
-          <a:ext cx="8046720" cy="3749040"/>
+          <a:ext cx="8046720" cy="3749039"/>
         </p:xfrm>
         <a:graphic>
           <a:graphicData uri="http://schemas.openxmlformats.org/drawingml/2006/table">
             <a:tbl>
               <a:tblPr/>
               <a:tblGrid>
-                <a:gridCol w="1645920"/>
-                <a:gridCol w="2194560"/>
-                <a:gridCol w="2103120"/>
-                <a:gridCol w="2103120"/>
+                <a:gridCol w="1645920">
+                  <a:extLst>
+                    <a:ext uri="{9D8B030D-6E8A-4147-A177-3AD203B41FA5}">
+                      <a16:colId xmlns:a16="http://schemas.microsoft.com/office/drawing/2014/main" val="20000"/>
+                    </a:ext>
+                  </a:extLst>
+                </a:gridCol>
+                <a:gridCol w="2194560">
+                  <a:extLst>
+                    <a:ext uri="{9D8B030D-6E8A-4147-A177-3AD203B41FA5}">
+                      <a16:colId xmlns:a16="http://schemas.microsoft.com/office/drawing/2014/main" val="20001"/>
+                    </a:ext>
+                  </a:extLst>
+                </a:gridCol>
+                <a:gridCol w="2103120">
+                  <a:extLst>
+                    <a:ext uri="{9D8B030D-6E8A-4147-A177-3AD203B41FA5}">
+                      <a16:colId xmlns:a16="http://schemas.microsoft.com/office/drawing/2014/main" val="20002"/>
+                    </a:ext>
+                  </a:extLst>
+                </a:gridCol>
+                <a:gridCol w="2103120">
+                  <a:extLst>
+                    <a:ext uri="{9D8B030D-6E8A-4147-A177-3AD203B41FA5}">
+                      <a16:colId xmlns:a16="http://schemas.microsoft.com/office/drawing/2014/main" val="20003"/>
+                    </a:ext>
+                  </a:extLst>
+                </a:gridCol>
               </a:tblGrid>
               <a:tr h="535577">
                 <a:tc>
@@ -8292,7 +10404,7 @@
                     <a:bodyPr/>
                     <a:lstStyle/>
                     <a:p>
-                      <a:pPr indent="0" marL="0">
+                      <a:pPr marL="0" indent="0">
                         <a:buNone/>
                       </a:pPr>
                       <a:r>
@@ -8313,7 +10425,7 @@
                       </a:endParaRPr>
                     </a:p>
                   </a:txBody>
-                  <a:tcPr marL="91440" marR="91440" marT="45720" marB="45720">
+                  <a:tcPr>
                     <a:lnL w="6350" cap="flat" cmpd="sng" algn="ctr">
                       <a:solidFill>
                         <a:srgbClr val="CBD5E0"/>
@@ -8360,7 +10472,7 @@
                     <a:bodyPr/>
                     <a:lstStyle/>
                     <a:p>
-                      <a:pPr indent="0" marL="0">
+                      <a:pPr marL="0" indent="0">
                         <a:buNone/>
                       </a:pPr>
                       <a:r>
@@ -8381,7 +10493,7 @@
                       </a:endParaRPr>
                     </a:p>
                   </a:txBody>
-                  <a:tcPr marL="91440" marR="91440" marT="45720" marB="45720">
+                  <a:tcPr>
                     <a:lnL w="6350" cap="flat" cmpd="sng" algn="ctr">
                       <a:solidFill>
                         <a:srgbClr val="CBD5E0"/>
@@ -8428,7 +10540,7 @@
                     <a:bodyPr/>
                     <a:lstStyle/>
                     <a:p>
-                      <a:pPr indent="0" marL="0">
+                      <a:pPr marL="0" indent="0">
                         <a:buNone/>
                       </a:pPr>
                       <a:r>
@@ -8449,7 +10561,7 @@
                       </a:endParaRPr>
                     </a:p>
                   </a:txBody>
-                  <a:tcPr marL="91440" marR="91440" marT="45720" marB="45720">
+                  <a:tcPr>
                     <a:lnL w="6350" cap="flat" cmpd="sng" algn="ctr">
                       <a:solidFill>
                         <a:srgbClr val="CBD5E0"/>
@@ -8496,7 +10608,7 @@
                     <a:bodyPr/>
                     <a:lstStyle/>
                     <a:p>
-                      <a:pPr indent="0" marL="0">
+                      <a:pPr marL="0" indent="0">
                         <a:buNone/>
                       </a:pPr>
                       <a:r>
@@ -8508,7 +10620,7 @@
                           <a:ea typeface="Arial" pitchFamily="34" charset="-122"/>
                           <a:cs typeface="Arial" pitchFamily="34" charset="-120"/>
                         </a:rPr>
-                        <a:t>Insomnia</a:t>
+                        <a:t>Ý nghĩa</a:t>
                       </a:r>
                       <a:endParaRPr lang="en-US" sz="1000" dirty="0">
                         <a:latin typeface="Arial" charset="0"/>
@@ -8517,7 +10629,7 @@
                       </a:endParaRPr>
                     </a:p>
                   </a:txBody>
-                  <a:tcPr marL="91440" marR="91440" marT="45720" marB="45720">
+                  <a:tcPr>
                     <a:lnL w="6350" cap="flat" cmpd="sng" algn="ctr">
                       <a:solidFill>
                         <a:srgbClr val="CBD5E0"/>
@@ -8559,6 +10671,11 @@
                     </a:solidFill>
                   </a:tcPr>
                 </a:tc>
+                <a:extLst>
+                  <a:ext uri="{0D108BD9-81ED-4DB2-BD59-A6C34878D82A}">
+                    <a16:rowId xmlns:a16="http://schemas.microsoft.com/office/drawing/2014/main" val="10000"/>
+                  </a:ext>
+                </a:extLst>
               </a:tr>
               <a:tr h="535577">
                 <a:tc>
@@ -8566,7 +10683,7 @@
                     <a:bodyPr/>
                     <a:lstStyle/>
                     <a:p>
-                      <a:pPr indent="0" marL="0">
+                      <a:pPr marL="0" indent="0">
                         <a:buNone/>
                       </a:pPr>
                       <a:r>
@@ -8578,7 +10695,7 @@
                           <a:ea typeface="Arial" pitchFamily="34" charset="-122"/>
                           <a:cs typeface="Arial" pitchFamily="34" charset="-120"/>
                         </a:rPr>
-                        <a:t>Quản lý Git</a:t>
+                        <a:t>Git &amp; dữ liệu</a:t>
                       </a:r>
                       <a:endParaRPr lang="en-US" sz="1000" dirty="0">
                         <a:latin typeface="Arial" charset="0"/>
@@ -8587,7 +10704,7 @@
                       </a:endParaRPr>
                     </a:p>
                   </a:txBody>
-                  <a:tcPr marL="91440" marR="91440" marT="45720" marB="45720">
+                  <a:tcPr>
                     <a:lnL w="6350" cap="flat" cmpd="sng" algn="ctr">
                       <a:solidFill>
                         <a:srgbClr val="CBD5E0"/>
@@ -8631,7 +10748,7 @@
                     <a:bodyPr/>
                     <a:lstStyle/>
                     <a:p>
-                      <a:pPr indent="0" marL="0">
+                      <a:pPr marL="0" indent="0">
                         <a:buNone/>
                       </a:pPr>
                       <a:r>
@@ -8643,7 +10760,7 @@
                           <a:ea typeface="Arial" pitchFamily="34" charset="-122"/>
                           <a:cs typeface="Arial" pitchFamily="34" charset="-120"/>
                         </a:rPr>
-                        <a:t>File .bru theo thư mục</a:t>
+                        <a:t>File .bru; offline-first</a:t>
                       </a:r>
                       <a:endParaRPr lang="en-US" sz="1000" dirty="0">
                         <a:latin typeface="Arial" charset="0"/>
@@ -8652,7 +10769,7 @@
                       </a:endParaRPr>
                     </a:p>
                   </a:txBody>
-                  <a:tcPr marL="91440" marR="91440" marT="45720" marB="45720">
+                  <a:tcPr>
                     <a:lnL w="6350" cap="flat" cmpd="sng" algn="ctr">
                       <a:solidFill>
                         <a:srgbClr val="CBD5E0"/>
@@ -8696,7 +10813,7 @@
                     <a:bodyPr/>
                     <a:lstStyle/>
                     <a:p>
-                      <a:pPr indent="0" marL="0">
+                      <a:pPr marL="0" indent="0">
                         <a:buNone/>
                       </a:pPr>
                       <a:r>
@@ -8708,7 +10825,7 @@
                           <a:ea typeface="Arial" pitchFamily="34" charset="-122"/>
                           <a:cs typeface="Arial" pitchFamily="34" charset="-120"/>
                         </a:rPr>
-                        <a:t>Export JSON nguyên khối</a:t>
+                        <a:t>Workspace/cloud; JSON</a:t>
                       </a:r>
                       <a:endParaRPr lang="en-US" sz="1000" dirty="0">
                         <a:latin typeface="Arial" charset="0"/>
@@ -8717,7 +10834,7 @@
                       </a:endParaRPr>
                     </a:p>
                   </a:txBody>
-                  <a:tcPr marL="91440" marR="91440" marT="45720" marB="45720">
+                  <a:tcPr>
                     <a:lnL w="6350" cap="flat" cmpd="sng" algn="ctr">
                       <a:solidFill>
                         <a:srgbClr val="CBD5E0"/>
@@ -8761,7 +10878,7 @@
                     <a:bodyPr/>
                     <a:lstStyle/>
                     <a:p>
-                      <a:pPr indent="0" marL="0">
+                      <a:pPr marL="0" indent="0">
                         <a:buNone/>
                       </a:pPr>
                       <a:r>
@@ -8773,7 +10890,7 @@
                           <a:ea typeface="Arial" pitchFamily="34" charset="-122"/>
                           <a:cs typeface="Arial" pitchFamily="34" charset="-120"/>
                         </a:rPr>
-                        <a:t>Tùy biến cấu hình</a:t>
+                        <a:t>Bruno thuận lợi cho Git review</a:t>
                       </a:r>
                       <a:endParaRPr lang="en-US" sz="1000" dirty="0">
                         <a:latin typeface="Arial" charset="0"/>
@@ -8782,7 +10899,7 @@
                       </a:endParaRPr>
                     </a:p>
                   </a:txBody>
-                  <a:tcPr marL="91440" marR="91440" marT="45720" marB="45720">
+                  <a:tcPr>
                     <a:lnL w="6350" cap="flat" cmpd="sng" algn="ctr">
                       <a:solidFill>
                         <a:srgbClr val="CBD5E0"/>
@@ -8821,6 +10938,11 @@
                     </a:lnB>
                   </a:tcPr>
                 </a:tc>
+                <a:extLst>
+                  <a:ext uri="{0D108BD9-81ED-4DB2-BD59-A6C34878D82A}">
+                    <a16:rowId xmlns:a16="http://schemas.microsoft.com/office/drawing/2014/main" val="10001"/>
+                  </a:ext>
+                </a:extLst>
               </a:tr>
               <a:tr h="535577">
                 <a:tc>
@@ -8828,7 +10950,7 @@
                     <a:bodyPr/>
                     <a:lstStyle/>
                     <a:p>
-                      <a:pPr indent="0" marL="0">
+                      <a:pPr marL="0" indent="0">
                         <a:buNone/>
                       </a:pPr>
                       <a:r>
@@ -8840,7 +10962,7 @@
                           <a:ea typeface="Arial" pitchFamily="34" charset="-122"/>
                           <a:cs typeface="Arial" pitchFamily="34" charset="-120"/>
                         </a:rPr>
-                        <a:t>Độ rõ của Diff</a:t>
+                        <a:t>2023 → 2024</a:t>
                       </a:r>
                       <a:endParaRPr lang="en-US" sz="1000" dirty="0">
                         <a:latin typeface="Arial" charset="0"/>
@@ -8849,7 +10971,7 @@
                       </a:endParaRPr>
                     </a:p>
                   </a:txBody>
-                  <a:tcPr marL="91440" marR="91440" marT="45720" marB="45720">
+                  <a:tcPr>
                     <a:lnL w="6350" cap="flat" cmpd="sng" algn="ctr">
                       <a:solidFill>
                         <a:srgbClr val="CBD5E0"/>
@@ -8893,7 +11015,7 @@
                     <a:bodyPr/>
                     <a:lstStyle/>
                     <a:p>
-                      <a:pPr indent="0" marL="0">
+                      <a:pPr marL="0" indent="0">
                         <a:buNone/>
                       </a:pPr>
                       <a:r>
@@ -8905,7 +11027,7 @@
                           <a:ea typeface="Arial" pitchFamily="34" charset="-122"/>
                           <a:cs typeface="Arial" pitchFamily="34" charset="-120"/>
                         </a:rPr>
-                        <a:t>Rõ ràng từng dòng plain-text</a:t>
+                        <a:t>200 → 200.000 MAU (1.000×)</a:t>
                       </a:r>
                       <a:endParaRPr lang="en-US" sz="1000" dirty="0">
                         <a:latin typeface="Arial" charset="0"/>
@@ -8914,7 +11036,7 @@
                       </a:endParaRPr>
                     </a:p>
                   </a:txBody>
-                  <a:tcPr marL="91440" marR="91440" marT="45720" marB="45720">
+                  <a:tcPr>
                     <a:lnL w="6350" cap="flat" cmpd="sng" algn="ctr">
                       <a:solidFill>
                         <a:srgbClr val="CBD5E0"/>
@@ -8958,7 +11080,7 @@
                     <a:bodyPr/>
                     <a:lstStyle/>
                     <a:p>
-                      <a:pPr indent="0" marL="0">
+                      <a:pPr marL="0" indent="0">
                         <a:buNone/>
                       </a:pPr>
                       <a:r>
@@ -8970,7 +11092,7 @@
                           <a:ea typeface="Arial" pitchFamily="34" charset="-122"/>
                           <a:cs typeface="Arial" pitchFamily="34" charset="-120"/>
                         </a:rPr>
-                        <a:t>Khó đọc diff JSON lớn</a:t>
+                        <a:t>&gt;25 → &gt;35 triệu user (1,4×)</a:t>
                       </a:r>
                       <a:endParaRPr lang="en-US" sz="1000" dirty="0">
                         <a:latin typeface="Arial" charset="0"/>
@@ -8979,7 +11101,7 @@
                       </a:endParaRPr>
                     </a:p>
                   </a:txBody>
-                  <a:tcPr marL="91440" marR="91440" marT="45720" marB="45720">
+                  <a:tcPr>
                     <a:lnL w="6350" cap="flat" cmpd="sng" algn="ctr">
                       <a:solidFill>
                         <a:srgbClr val="CBD5E0"/>
@@ -9023,7 +11145,7 @@
                     <a:bodyPr/>
                     <a:lstStyle/>
                     <a:p>
-                      <a:pPr indent="0" marL="0">
+                      <a:pPr marL="0" indent="0">
                         <a:buNone/>
                       </a:pPr>
                       <a:r>
@@ -9035,7 +11157,7 @@
                           <a:ea typeface="Arial" pitchFamily="34" charset="-122"/>
                           <a:cs typeface="Arial" pitchFamily="34" charset="-120"/>
                         </a:rPr>
-                        <a:t>Phụ thuộc workflow</a:t>
+                        <a:t>Bruno tăng nhanh hơn vượt trội</a:t>
                       </a:r>
                       <a:endParaRPr lang="en-US" sz="1000" dirty="0">
                         <a:latin typeface="Arial" charset="0"/>
@@ -9044,7 +11166,7 @@
                       </a:endParaRPr>
                     </a:p>
                   </a:txBody>
-                  <a:tcPr marL="91440" marR="91440" marT="45720" marB="45720">
+                  <a:tcPr>
                     <a:lnL w="6350" cap="flat" cmpd="sng" algn="ctr">
                       <a:solidFill>
                         <a:srgbClr val="CBD5E0"/>
@@ -9083,6 +11205,11 @@
                     </a:lnB>
                   </a:tcPr>
                 </a:tc>
+                <a:extLst>
+                  <a:ext uri="{0D108BD9-81ED-4DB2-BD59-A6C34878D82A}">
+                    <a16:rowId xmlns:a16="http://schemas.microsoft.com/office/drawing/2014/main" val="10002"/>
+                  </a:ext>
+                </a:extLst>
               </a:tr>
               <a:tr h="535577">
                 <a:tc>
@@ -9090,7 +11217,7 @@
                     <a:bodyPr/>
                     <a:lstStyle/>
                     <a:p>
-                      <a:pPr indent="0" marL="0">
+                      <a:pPr marL="0" indent="0">
                         <a:buNone/>
                       </a:pPr>
                       <a:r>
@@ -9102,7 +11229,7 @@
                           <a:ea typeface="Arial" pitchFamily="34" charset="-122"/>
                           <a:cs typeface="Arial" pitchFamily="34" charset="-120"/>
                         </a:rPr>
-                        <a:t>Lưu trữ Offline</a:t>
+                        <a:t>Năm 2025</a:t>
                       </a:r>
                       <a:endParaRPr lang="en-US" sz="1000" dirty="0">
                         <a:latin typeface="Arial" charset="0"/>
@@ -9111,7 +11238,7 @@
                       </a:endParaRPr>
                     </a:p>
                   </a:txBody>
-                  <a:tcPr marL="91440" marR="91440" marT="45720" marB="45720">
+                  <a:tcPr>
                     <a:lnL w="6350" cap="flat" cmpd="sng" algn="ctr">
                       <a:solidFill>
                         <a:srgbClr val="CBD5E0"/>
@@ -9155,7 +11282,7 @@
                     <a:bodyPr/>
                     <a:lstStyle/>
                     <a:p>
-                      <a:pPr indent="0" marL="0">
+                      <a:pPr marL="0" indent="0">
                         <a:buNone/>
                       </a:pPr>
                       <a:r>
@@ -9167,7 +11294,7 @@
                           <a:ea typeface="Arial" pitchFamily="34" charset="-122"/>
                           <a:cs typeface="Arial" pitchFamily="34" charset="-120"/>
                         </a:rPr>
-                        <a:t>100% Cục bộ / Offline</a:t>
+                        <a:t>250.000 → &gt;600.000 MAU (2,4×)</a:t>
                       </a:r>
                       <a:endParaRPr lang="en-US" sz="1000" dirty="0">
                         <a:latin typeface="Arial" charset="0"/>
@@ -9176,7 +11303,7 @@
                       </a:endParaRPr>
                     </a:p>
                   </a:txBody>
-                  <a:tcPr marL="91440" marR="91440" marT="45720" marB="45720">
+                  <a:tcPr>
                     <a:lnL w="6350" cap="flat" cmpd="sng" algn="ctr">
                       <a:solidFill>
                         <a:srgbClr val="CBD5E0"/>
@@ -9220,7 +11347,7 @@
                     <a:bodyPr/>
                     <a:lstStyle/>
                     <a:p>
-                      <a:pPr indent="0" marL="0">
+                      <a:pPr marL="0" indent="0">
                         <a:buNone/>
                       </a:pPr>
                       <a:r>
@@ -9232,7 +11359,7 @@
                           <a:ea typeface="Arial" pitchFamily="34" charset="-122"/>
                           <a:cs typeface="Arial" pitchFamily="34" charset="-120"/>
                         </a:rPr>
-                        <a:t>Hạn chế (bỏ Scratchpad)</a:t>
+                        <a:t>Nền tảng đã trưởng thành</a:t>
                       </a:r>
                       <a:endParaRPr lang="en-US" sz="1000" dirty="0">
                         <a:latin typeface="Arial" charset="0"/>
@@ -9241,7 +11368,7 @@
                       </a:endParaRPr>
                     </a:p>
                   </a:txBody>
-                  <a:tcPr marL="91440" marR="91440" marT="45720" marB="45720">
+                  <a:tcPr>
                     <a:lnL w="6350" cap="flat" cmpd="sng" algn="ctr">
                       <a:solidFill>
                         <a:srgbClr val="CBD5E0"/>
@@ -9285,7 +11412,7 @@
                     <a:bodyPr/>
                     <a:lstStyle/>
                     <a:p>
-                      <a:pPr indent="0" marL="0">
+                      <a:pPr marL="0" indent="0">
                         <a:buNone/>
                       </a:pPr>
                       <a:r>
@@ -9297,7 +11424,7 @@
                           <a:ea typeface="Arial" pitchFamily="34" charset="-122"/>
                           <a:cs typeface="Arial" pitchFamily="34" charset="-120"/>
                         </a:rPr>
-                        <a:t>Bắt buộc tài khoản Cloud</a:t>
+                        <a:t>Bruno tiếp tục tăng hơn 140%</a:t>
                       </a:r>
                       <a:endParaRPr lang="en-US" sz="1000" dirty="0">
                         <a:latin typeface="Arial" charset="0"/>
@@ -9306,7 +11433,7 @@
                       </a:endParaRPr>
                     </a:p>
                   </a:txBody>
-                  <a:tcPr marL="91440" marR="91440" marT="45720" marB="45720">
+                  <a:tcPr>
                     <a:lnL w="6350" cap="flat" cmpd="sng" algn="ctr">
                       <a:solidFill>
                         <a:srgbClr val="CBD5E0"/>
@@ -9345,6 +11472,11 @@
                     </a:lnB>
                   </a:tcPr>
                 </a:tc>
+                <a:extLst>
+                  <a:ext uri="{0D108BD9-81ED-4DB2-BD59-A6C34878D82A}">
+                    <a16:rowId xmlns:a16="http://schemas.microsoft.com/office/drawing/2014/main" val="10003"/>
+                  </a:ext>
+                </a:extLst>
               </a:tr>
               <a:tr h="535577">
                 <a:tc>
@@ -9352,7 +11484,7 @@
                     <a:bodyPr/>
                     <a:lstStyle/>
                     <a:p>
-                      <a:pPr indent="0" marL="0">
+                      <a:pPr marL="0" indent="0">
                         <a:buNone/>
                       </a:pPr>
                       <a:r>
@@ -9364,7 +11496,7 @@
                           <a:ea typeface="Arial" pitchFamily="34" charset="-122"/>
                           <a:cs typeface="Arial" pitchFamily="34" charset="-120"/>
                         </a:rPr>
-                        <a:t>Giấy phép &amp; Chi phí</a:t>
+                        <a:t>Động lực 2026</a:t>
                       </a:r>
                       <a:endParaRPr lang="en-US" sz="1000" dirty="0">
                         <a:latin typeface="Arial" charset="0"/>
@@ -9373,7 +11505,7 @@
                       </a:endParaRPr>
                     </a:p>
                   </a:txBody>
-                  <a:tcPr marL="91440" marR="91440" marT="45720" marB="45720">
+                  <a:tcPr>
                     <a:lnL w="6350" cap="flat" cmpd="sng" algn="ctr">
                       <a:solidFill>
                         <a:srgbClr val="CBD5E0"/>
@@ -9417,7 +11549,7 @@
                     <a:bodyPr/>
                     <a:lstStyle/>
                     <a:p>
-                      <a:pPr indent="0" marL="0">
+                      <a:pPr marL="0" indent="0">
                         <a:buNone/>
                       </a:pPr>
                       <a:r>
@@ -9429,7 +11561,7 @@
                           <a:ea typeface="Arial" pitchFamily="34" charset="-122"/>
                           <a:cs typeface="Arial" pitchFamily="34" charset="-120"/>
                         </a:rPr>
-                        <a:t>Mã nguồn mở MIT (Miễn phí)</a:t>
+                        <a:t>44.900 stars; 224.799 CLI tải/tuần</a:t>
                       </a:r>
                       <a:endParaRPr lang="en-US" sz="1000" dirty="0">
                         <a:latin typeface="Arial" charset="0"/>
@@ -9438,7 +11570,7 @@
                       </a:endParaRPr>
                     </a:p>
                   </a:txBody>
-                  <a:tcPr marL="91440" marR="91440" marT="45720" marB="45720">
+                  <a:tcPr>
                     <a:lnL w="6350" cap="flat" cmpd="sng" algn="ctr">
                       <a:solidFill>
                         <a:srgbClr val="CBD5E0"/>
@@ -9482,7 +11614,7 @@
                     <a:bodyPr/>
                     <a:lstStyle/>
                     <a:p>
-                      <a:pPr indent="0" marL="0">
+                      <a:pPr marL="0" indent="0">
                         <a:buNone/>
                       </a:pPr>
                       <a:r>
@@ -9494,7 +11626,7 @@
                           <a:ea typeface="Arial" pitchFamily="34" charset="-122"/>
                           <a:cs typeface="Arial" pitchFamily="34" charset="-120"/>
                         </a:rPr>
-                        <a:t>Thương mại / Giới hạn team</a:t>
+                        <a:t>&gt;40 triệu người dùng</a:t>
                       </a:r>
                       <a:endParaRPr lang="en-US" sz="1000" dirty="0">
                         <a:latin typeface="Arial" charset="0"/>
@@ -9503,7 +11635,7 @@
                       </a:endParaRPr>
                     </a:p>
                   </a:txBody>
-                  <a:tcPr marL="91440" marR="91440" marT="45720" marB="45720">
+                  <a:tcPr>
                     <a:lnL w="6350" cap="flat" cmpd="sng" algn="ctr">
                       <a:solidFill>
                         <a:srgbClr val="CBD5E0"/>
@@ -9547,7 +11679,7 @@
                     <a:bodyPr/>
                     <a:lstStyle/>
                     <a:p>
-                      <a:pPr indent="0" marL="0">
+                      <a:pPr marL="0" indent="0">
                         <a:buNone/>
                       </a:pPr>
                       <a:r>
@@ -9559,7 +11691,7 @@
                           <a:ea typeface="Arial" pitchFamily="34" charset="-122"/>
                           <a:cs typeface="Arial" pitchFamily="34" charset="-120"/>
                         </a:rPr>
-                        <a:t>Thương mại dần</a:t>
+                        <a:t>Cộng đồng Bruno vẫn bứt phá</a:t>
                       </a:r>
                       <a:endParaRPr lang="en-US" sz="1000" dirty="0">
                         <a:latin typeface="Arial" charset="0"/>
@@ -9568,7 +11700,7 @@
                       </a:endParaRPr>
                     </a:p>
                   </a:txBody>
-                  <a:tcPr marL="91440" marR="91440" marT="45720" marB="45720">
+                  <a:tcPr>
                     <a:lnL w="6350" cap="flat" cmpd="sng" algn="ctr">
                       <a:solidFill>
                         <a:srgbClr val="CBD5E0"/>
@@ -9607,6 +11739,11 @@
                     </a:lnB>
                   </a:tcPr>
                 </a:tc>
+                <a:extLst>
+                  <a:ext uri="{0D108BD9-81ED-4DB2-BD59-A6C34878D82A}">
+                    <a16:rowId xmlns:a16="http://schemas.microsoft.com/office/drawing/2014/main" val="10004"/>
+                  </a:ext>
+                </a:extLst>
               </a:tr>
               <a:tr h="535577">
                 <a:tc>
@@ -9614,7 +11751,7 @@
                     <a:bodyPr/>
                     <a:lstStyle/>
                     <a:p>
-                      <a:pPr indent="0" marL="0">
+                      <a:pPr marL="0" indent="0">
                         <a:buNone/>
                       </a:pPr>
                       <a:r>
@@ -9626,7 +11763,7 @@
                           <a:ea typeface="Arial" pitchFamily="34" charset="-122"/>
                           <a:cs typeface="Arial" pitchFamily="34" charset="-120"/>
                         </a:rPr>
-                        <a:t>CLI Automation</a:t>
+                        <a:t>Kết luận</a:t>
                       </a:r>
                       <a:endParaRPr lang="en-US" sz="1000" dirty="0">
                         <a:latin typeface="Arial" charset="0"/>
@@ -9635,7 +11772,7 @@
                       </a:endParaRPr>
                     </a:p>
                   </a:txBody>
-                  <a:tcPr marL="91440" marR="91440" marT="45720" marB="45720">
+                  <a:tcPr>
                     <a:lnL w="6350" cap="flat" cmpd="sng" algn="ctr">
                       <a:solidFill>
                         <a:srgbClr val="CBD5E0"/>
@@ -9679,7 +11816,7 @@
                     <a:bodyPr/>
                     <a:lstStyle/>
                     <a:p>
-                      <a:pPr indent="0" marL="0">
+                      <a:pPr marL="0" indent="0">
                         <a:buNone/>
                       </a:pPr>
                       <a:r>
@@ -9691,7 +11828,7 @@
                           <a:ea typeface="Arial" pitchFamily="34" charset="-122"/>
                           <a:cs typeface="Arial" pitchFamily="34" charset="-120"/>
                         </a:rPr>
-                        <a:t>Bruno CLI (bru run)</a:t>
+                        <a:t>Tăng trưởng tương đối vượt trội</a:t>
                       </a:r>
                       <a:endParaRPr lang="en-US" sz="1000" dirty="0">
                         <a:latin typeface="Arial" charset="0"/>
@@ -9700,7 +11837,7 @@
                       </a:endParaRPr>
                     </a:p>
                   </a:txBody>
-                  <a:tcPr marL="91440" marR="91440" marT="45720" marB="45720">
+                  <a:tcPr>
                     <a:lnL w="6350" cap="flat" cmpd="sng" algn="ctr">
                       <a:solidFill>
                         <a:srgbClr val="CBD5E0"/>
@@ -9744,7 +11881,7 @@
                     <a:bodyPr/>
                     <a:lstStyle/>
                     <a:p>
-                      <a:pPr indent="0" marL="0">
+                      <a:pPr marL="0" indent="0">
                         <a:buNone/>
                       </a:pPr>
                       <a:r>
@@ -9756,7 +11893,7 @@
                           <a:ea typeface="Arial" pitchFamily="34" charset="-122"/>
                           <a:cs typeface="Arial" pitchFamily="34" charset="-120"/>
                         </a:rPr>
-                        <a:t>Newman CLI</a:t>
+                        <a:t>Quy mô lớn, tốc độ chậm hơn</a:t>
                       </a:r>
                       <a:endParaRPr lang="en-US" sz="1000" dirty="0">
                         <a:latin typeface="Arial" charset="0"/>
@@ -9765,7 +11902,7 @@
                       </a:endParaRPr>
                     </a:p>
                   </a:txBody>
-                  <a:tcPr marL="91440" marR="91440" marT="45720" marB="45720">
+                  <a:tcPr>
                     <a:lnL w="6350" cap="flat" cmpd="sng" algn="ctr">
                       <a:solidFill>
                         <a:srgbClr val="CBD5E0"/>
@@ -9809,7 +11946,7 @@
                     <a:bodyPr/>
                     <a:lstStyle/>
                     <a:p>
-                      <a:pPr indent="0" marL="0">
+                      <a:pPr marL="0" indent="0">
                         <a:buNone/>
                       </a:pPr>
                       <a:r>
@@ -9821,7 +11958,7 @@
                           <a:ea typeface="Arial" pitchFamily="34" charset="-122"/>
                           <a:cs typeface="Arial" pitchFamily="34" charset="-120"/>
                         </a:rPr>
-                        <a:t>Inso CLI</a:t>
+                        <a:t>Bruno có triển vọng dài hạn</a:t>
                       </a:r>
                       <a:endParaRPr lang="en-US" sz="1000" dirty="0">
                         <a:latin typeface="Arial" charset="0"/>
@@ -9830,7 +11967,7 @@
                       </a:endParaRPr>
                     </a:p>
                   </a:txBody>
-                  <a:tcPr marL="91440" marR="91440" marT="45720" marB="45720">
+                  <a:tcPr>
                     <a:lnL w="6350" cap="flat" cmpd="sng" algn="ctr">
                       <a:solidFill>
                         <a:srgbClr val="CBD5E0"/>
@@ -9869,6 +12006,11 @@
                     </a:lnB>
                   </a:tcPr>
                 </a:tc>
+                <a:extLst>
+                  <a:ext uri="{0D108BD9-81ED-4DB2-BD59-A6C34878D82A}">
+                    <a16:rowId xmlns:a16="http://schemas.microsoft.com/office/drawing/2014/main" val="10005"/>
+                  </a:ext>
+                </a:extLst>
               </a:tr>
               <a:tr h="535577">
                 <a:tc>
@@ -9876,7 +12018,7 @@
                     <a:bodyPr/>
                     <a:lstStyle/>
                     <a:p>
-                      <a:pPr indent="0" marL="0">
+                      <a:pPr marL="0" indent="0">
                         <a:buNone/>
                       </a:pPr>
                       <a:r>
@@ -9888,7 +12030,7 @@
                           <a:ea typeface="Arial" pitchFamily="34" charset="-122"/>
                           <a:cs typeface="Arial" pitchFamily="34" charset="-120"/>
                         </a:rPr>
-                        <a:t>Khả năng Audit</a:t>
+                        <a:t>Nguồn</a:t>
                       </a:r>
                       <a:endParaRPr lang="en-US" sz="1000" dirty="0">
                         <a:latin typeface="Arial" charset="0"/>
@@ -9897,7 +12039,7 @@
                       </a:endParaRPr>
                     </a:p>
                   </a:txBody>
-                  <a:tcPr marL="91440" marR="91440" marT="45720" marB="45720">
+                  <a:tcPr>
                     <a:lnL w="6350" cap="flat" cmpd="sng" algn="ctr">
                       <a:solidFill>
                         <a:srgbClr val="CBD5E0"/>
@@ -9941,7 +12083,7 @@
                     <a:bodyPr/>
                     <a:lstStyle/>
                     <a:p>
-                      <a:pPr indent="0" marL="0">
+                      <a:pPr marL="0" indent="0">
                         <a:buNone/>
                       </a:pPr>
                       <a:r>
@@ -9953,7 +12095,7 @@
                           <a:ea typeface="Arial" pitchFamily="34" charset="-122"/>
                           <a:cs typeface="Arial" pitchFamily="34" charset="-120"/>
                         </a:rPr>
-                        <a:t>Dễ truy vết lịch sử Git</a:t>
+                        <a:t>[12], [13], [15], [16]</a:t>
                       </a:r>
                       <a:endParaRPr lang="en-US" sz="1000" dirty="0">
                         <a:latin typeface="Arial" charset="0"/>
@@ -9962,7 +12104,7 @@
                       </a:endParaRPr>
                     </a:p>
                   </a:txBody>
-                  <a:tcPr marL="91440" marR="91440" marT="45720" marB="45720">
+                  <a:tcPr>
                     <a:lnL w="6350" cap="flat" cmpd="sng" algn="ctr">
                       <a:solidFill>
                         <a:srgbClr val="CBD5E0"/>
@@ -10006,7 +12148,7 @@
                     <a:bodyPr/>
                     <a:lstStyle/>
                     <a:p>
-                      <a:pPr indent="0" marL="0">
+                      <a:pPr marL="0" indent="0">
                         <a:buNone/>
                       </a:pPr>
                       <a:r>
@@ -10018,7 +12160,7 @@
                           <a:ea typeface="Arial" pitchFamily="34" charset="-122"/>
                           <a:cs typeface="Arial" pitchFamily="34" charset="-120"/>
                         </a:rPr>
-                        <a:t>Phụ thuộc Workspace cloud</a:t>
+                        <a:t>[14], [17]</a:t>
                       </a:r>
                       <a:endParaRPr lang="en-US" sz="1000" dirty="0">
                         <a:latin typeface="Arial" charset="0"/>
@@ -10027,7 +12169,7 @@
                       </a:endParaRPr>
                     </a:p>
                   </a:txBody>
-                  <a:tcPr marL="91440" marR="91440" marT="45720" marB="45720">
+                  <a:tcPr>
                     <a:lnL w="6350" cap="flat" cmpd="sng" algn="ctr">
                       <a:solidFill>
                         <a:srgbClr val="CBD5E0"/>
@@ -10071,7 +12213,7 @@
                     <a:bodyPr/>
                     <a:lstStyle/>
                     <a:p>
-                      <a:pPr indent="0" marL="0">
+                      <a:pPr marL="0" indent="0">
                         <a:buNone/>
                       </a:pPr>
                       <a:r>
@@ -10083,7 +12225,7 @@
                           <a:ea typeface="Arial" pitchFamily="34" charset="-122"/>
                           <a:cs typeface="Arial" pitchFamily="34" charset="-120"/>
                         </a:rPr>
-                        <a:t>Phụ thuộc Cloud sync</a:t>
+                        <a:t>Report cập nhật đến 2026</a:t>
                       </a:r>
                       <a:endParaRPr lang="en-US" sz="1000" dirty="0">
                         <a:latin typeface="Arial" charset="0"/>
@@ -10092,7 +12234,7 @@
                       </a:endParaRPr>
                     </a:p>
                   </a:txBody>
-                  <a:tcPr marL="91440" marR="91440" marT="45720" marB="45720">
+                  <a:tcPr>
                     <a:lnL w="6350" cap="flat" cmpd="sng" algn="ctr">
                       <a:solidFill>
                         <a:srgbClr val="CBD5E0"/>
@@ -10131,6 +12273,11 @@
                     </a:lnB>
                   </a:tcPr>
                 </a:tc>
+                <a:extLst>
+                  <a:ext uri="{0D108BD9-81ED-4DB2-BD59-A6C34878D82A}">
+                    <a16:rowId xmlns:a16="http://schemas.microsoft.com/office/drawing/2014/main" val="10006"/>
+                  </a:ext>
+                </a:extLst>
               </a:tr>
             </a:tbl>
           </a:graphicData>
@@ -10152,6 +12299,7 @@
         <a:solidFill>
           <a:srgbClr val="F8F9FD"/>
         </a:solidFill>
+        <a:effectLst/>
       </p:bgPr>
     </p:bg>
     <p:spTree>
@@ -10189,7 +12337,7 @@
           <a:bodyPr wrap="square" rtlCol="0" anchor="ctr"/>
           <a:lstStyle/>
           <a:p>
-            <a:pPr indent="0" marL="0">
+            <a:pPr marL="0" indent="0">
               <a:buNone/>
             </a:pPr>
             <a:r>
@@ -10228,7 +12376,7 @@
           <a:bodyPr wrap="square" rtlCol="0" anchor="t"/>
           <a:lstStyle/>
           <a:p>
-            <a:pPr indent="0" marL="0">
+            <a:pPr marL="0" indent="0">
               <a:buNone/>
             </a:pPr>
             <a:r>
@@ -10267,7 +12415,7 @@
           <a:bodyPr wrap="square" rtlCol="0" anchor="ctr"/>
           <a:lstStyle/>
           <a:p>
-            <a:pPr indent="0" marL="0">
+            <a:pPr marL="0" indent="0">
               <a:buNone/>
             </a:pPr>
             <a:r>
@@ -10306,7 +12454,7 @@
           <a:bodyPr wrap="square" rtlCol="0" anchor="ctr"/>
           <a:lstStyle/>
           <a:p>
-            <a:pPr indent="0" marL="0">
+            <a:pPr marL="0" indent="0">
               <a:buNone/>
             </a:pPr>
             <a:r>
@@ -10326,14 +12474,14 @@
       </p:sp>
       <p:pic>
         <p:nvPicPr>
-          <p:cNvPr id="6" name="Image 0" descr="/home/andv/personal/andv-lms/docs/report/images/hinh-1-kientruc-andv-lms.png">    </p:cNvPr>
+          <p:cNvPr id="6" name="Image 0" descr="/home/andv/personal/andv-lms/docs/report/images/hinh-1-kientruc-andv-lms.png"/>
           <p:cNvPicPr>
             <a:picLocks noChangeAspect="1"/>
           </p:cNvPicPr>
           <p:nvPr/>
         </p:nvPicPr>
         <p:blipFill>
-          <a:blip r:embed="rId1"/>
+          <a:blip r:embed="rId3"/>
           <a:stretch>
             <a:fillRect/>
           </a:stretch>
@@ -10364,6 +12512,7 @@
         <a:solidFill>
           <a:srgbClr val="F8F9FD"/>
         </a:solidFill>
+        <a:effectLst/>
       </p:bgPr>
     </p:bg>
     <p:spTree>
@@ -10401,7 +12550,7 @@
           <a:bodyPr wrap="square" rtlCol="0" anchor="ctr"/>
           <a:lstStyle/>
           <a:p>
-            <a:pPr indent="0" marL="0">
+            <a:pPr marL="0" indent="0">
               <a:buNone/>
             </a:pPr>
             <a:r>
@@ -10440,7 +12589,7 @@
           <a:bodyPr wrap="square" rtlCol="0" anchor="t"/>
           <a:lstStyle/>
           <a:p>
-            <a:pPr indent="0" marL="0">
+            <a:pPr marL="0" indent="0">
               <a:buNone/>
             </a:pPr>
             <a:r>
@@ -10479,7 +12628,7 @@
           <a:bodyPr wrap="square" rtlCol="0" anchor="ctr"/>
           <a:lstStyle/>
           <a:p>
-            <a:pPr indent="0" marL="0">
+            <a:pPr marL="0" indent="0">
               <a:buNone/>
             </a:pPr>
             <a:r>
@@ -10521,6 +12670,13 @@
             <a:prstDash val="solid"/>
           </a:ln>
         </p:spPr>
+        <p:txBody>
+          <a:bodyPr/>
+          <a:lstStyle/>
+          <a:p>
+            <a:endParaRPr lang="en-US"/>
+          </a:p>
+        </p:txBody>
       </p:sp>
       <p:sp>
         <p:nvSpPr>
@@ -10543,7 +12699,7 @@
           <a:bodyPr wrap="square" rtlCol="0" anchor="ctr"/>
           <a:lstStyle/>
           <a:p>
-            <a:pPr indent="0" marL="0">
+            <a:pPr marL="0" indent="0">
               <a:buNone/>
             </a:pPr>
             <a:r>
@@ -10582,7 +12738,7 @@
           <a:bodyPr wrap="square" rtlCol="0" anchor="ctr"/>
           <a:lstStyle/>
           <a:p>
-            <a:pPr indent="0" marL="0">
+            <a:pPr marL="0" indent="0">
               <a:lnSpc>
                 <a:spcPts val="1500"/>
               </a:lnSpc>
@@ -10627,6 +12783,13 @@
             <a:prstDash val="solid"/>
           </a:ln>
         </p:spPr>
+        <p:txBody>
+          <a:bodyPr/>
+          <a:lstStyle/>
+          <a:p>
+            <a:endParaRPr lang="en-US"/>
+          </a:p>
+        </p:txBody>
       </p:sp>
       <p:sp>
         <p:nvSpPr>
@@ -10649,7 +12812,7 @@
           <a:bodyPr wrap="square" rtlCol="0" anchor="ctr"/>
           <a:lstStyle/>
           <a:p>
-            <a:pPr indent="0" marL="0">
+            <a:pPr marL="0" indent="0">
               <a:buNone/>
             </a:pPr>
             <a:r>
@@ -10688,7 +12851,7 @@
           <a:bodyPr wrap="square" rtlCol="0" anchor="ctr"/>
           <a:lstStyle/>
           <a:p>
-            <a:pPr indent="0" marL="0">
+            <a:pPr marL="0" indent="0">
               <a:lnSpc>
                 <a:spcPts val="1500"/>
               </a:lnSpc>
@@ -10733,6 +12896,13 @@
             <a:prstDash val="solid"/>
           </a:ln>
         </p:spPr>
+        <p:txBody>
+          <a:bodyPr/>
+          <a:lstStyle/>
+          <a:p>
+            <a:endParaRPr lang="en-US"/>
+          </a:p>
+        </p:txBody>
       </p:sp>
       <p:sp>
         <p:nvSpPr>
@@ -10755,7 +12925,7 @@
           <a:bodyPr wrap="square" rtlCol="0" anchor="ctr"/>
           <a:lstStyle/>
           <a:p>
-            <a:pPr indent="0" marL="0">
+            <a:pPr marL="0" indent="0">
               <a:buNone/>
             </a:pPr>
             <a:r>
@@ -10794,7 +12964,7 @@
           <a:bodyPr wrap="square" rtlCol="0" anchor="ctr"/>
           <a:lstStyle/>
           <a:p>
-            <a:pPr indent="0" marL="0">
+            <a:pPr marL="0" indent="0">
               <a:lnSpc>
                 <a:spcPts val="1500"/>
               </a:lnSpc>
@@ -10839,6 +13009,13 @@
             <a:prstDash val="solid"/>
           </a:ln>
         </p:spPr>
+        <p:txBody>
+          <a:bodyPr/>
+          <a:lstStyle/>
+          <a:p>
+            <a:endParaRPr lang="en-US"/>
+          </a:p>
+        </p:txBody>
       </p:sp>
       <p:sp>
         <p:nvSpPr>
@@ -10861,7 +13038,7 @@
           <a:bodyPr wrap="square" rtlCol="0" anchor="ctr"/>
           <a:lstStyle/>
           <a:p>
-            <a:pPr indent="0" marL="0">
+            <a:pPr marL="0" indent="0">
               <a:buNone/>
             </a:pPr>
             <a:r>
@@ -10900,7 +13077,7 @@
           <a:bodyPr wrap="square" rtlCol="0" anchor="ctr"/>
           <a:lstStyle/>
           <a:p>
-            <a:pPr indent="0" marL="0">
+            <a:pPr marL="0" indent="0">
               <a:lnSpc>
                 <a:spcPts val="1500"/>
               </a:lnSpc>
@@ -10937,6 +13114,7 @@
         <a:solidFill>
           <a:srgbClr val="F8F9FD"/>
         </a:solidFill>
+        <a:effectLst/>
       </p:bgPr>
     </p:bg>
     <p:spTree>
@@ -10974,7 +13152,7 @@
           <a:bodyPr wrap="square" rtlCol="0" anchor="ctr"/>
           <a:lstStyle/>
           <a:p>
-            <a:pPr indent="0" marL="0">
+            <a:pPr marL="0" indent="0">
               <a:buNone/>
             </a:pPr>
             <a:r>
@@ -11013,7 +13191,7 @@
           <a:bodyPr wrap="square" rtlCol="0" anchor="t"/>
           <a:lstStyle/>
           <a:p>
-            <a:pPr indent="0" marL="0">
+            <a:pPr marL="0" indent="0">
               <a:buNone/>
             </a:pPr>
             <a:r>
@@ -11025,7 +13203,7 @@
                 <a:ea typeface="Arial" pitchFamily="34" charset="-122"/>
                 <a:cs typeface="Arial" pitchFamily="34" charset="-120"/>
               </a:rPr>
-              <a:t>Tổng quan Cấu trúc Collection Bruno trong Andv-LMS</a:t>
+              <a:t>Các nhóm Collection Tiêu biểu và Quy mô Toàn bộ</a:t>
             </a:r>
             <a:endParaRPr lang="en-US" sz="1900" dirty="0"/>
           </a:p>
@@ -11052,7 +13230,7 @@
           <a:bodyPr wrap="square" rtlCol="0" anchor="ctr"/>
           <a:lstStyle/>
           <a:p>
-            <a:pPr indent="0" marL="0">
+            <a:pPr marL="0" indent="0">
               <a:buNone/>
             </a:pPr>
             <a:r>
@@ -11093,9 +13271,27 @@
             <a:tbl>
               <a:tblPr/>
               <a:tblGrid>
-                <a:gridCol w="2011680"/>
-                <a:gridCol w="1097280"/>
-                <a:gridCol w="4937760"/>
+                <a:gridCol w="2011680">
+                  <a:extLst>
+                    <a:ext uri="{9D8B030D-6E8A-4147-A177-3AD203B41FA5}">
+                      <a16:colId xmlns:a16="http://schemas.microsoft.com/office/drawing/2014/main" val="20000"/>
+                    </a:ext>
+                  </a:extLst>
+                </a:gridCol>
+                <a:gridCol w="1097280">
+                  <a:extLst>
+                    <a:ext uri="{9D8B030D-6E8A-4147-A177-3AD203B41FA5}">
+                      <a16:colId xmlns:a16="http://schemas.microsoft.com/office/drawing/2014/main" val="20001"/>
+                    </a:ext>
+                  </a:extLst>
+                </a:gridCol>
+                <a:gridCol w="4937760">
+                  <a:extLst>
+                    <a:ext uri="{9D8B030D-6E8A-4147-A177-3AD203B41FA5}">
+                      <a16:colId xmlns:a16="http://schemas.microsoft.com/office/drawing/2014/main" val="20002"/>
+                    </a:ext>
+                  </a:extLst>
+                </a:gridCol>
               </a:tblGrid>
               <a:tr h="374904">
                 <a:tc>
@@ -11103,7 +13299,7 @@
                     <a:bodyPr/>
                     <a:lstStyle/>
                     <a:p>
-                      <a:pPr indent="0" marL="0">
+                      <a:pPr marL="0" indent="0">
                         <a:buNone/>
                       </a:pPr>
                       <a:r>
@@ -11115,7 +13311,7 @@
                           <a:ea typeface="Arial" pitchFamily="34" charset="-122"/>
                           <a:cs typeface="Arial" pitchFamily="34" charset="-120"/>
                         </a:rPr>
-                        <a:t>Nhóm Collection</a:t>
+                        <a:t>Nhóm tiêu biểu</a:t>
                       </a:r>
                       <a:endParaRPr lang="en-US" sz="950" dirty="0">
                         <a:latin typeface="Arial" charset="0"/>
@@ -11124,7 +13320,7 @@
                       </a:endParaRPr>
                     </a:p>
                   </a:txBody>
-                  <a:tcPr marL="91440" marR="91440" marT="45720" marB="45720">
+                  <a:tcPr>
                     <a:lnL w="6350" cap="flat" cmpd="sng" algn="ctr">
                       <a:solidFill>
                         <a:srgbClr val="CBD5E0"/>
@@ -11171,7 +13367,7 @@
                     <a:bodyPr/>
                     <a:lstStyle/>
                     <a:p>
-                      <a:pPr indent="0" marL="0">
+                      <a:pPr marL="0" indent="0">
                         <a:buNone/>
                       </a:pPr>
                       <a:r>
@@ -11192,7 +13388,7 @@
                       </a:endParaRPr>
                     </a:p>
                   </a:txBody>
-                  <a:tcPr marL="91440" marR="91440" marT="45720" marB="45720">
+                  <a:tcPr>
                     <a:lnL w="6350" cap="flat" cmpd="sng" algn="ctr">
                       <a:solidFill>
                         <a:srgbClr val="CBD5E0"/>
@@ -11239,7 +13435,7 @@
                     <a:bodyPr/>
                     <a:lstStyle/>
                     <a:p>
-                      <a:pPr indent="0" marL="0">
+                      <a:pPr marL="0" indent="0">
                         <a:buNone/>
                       </a:pPr>
                       <a:r>
@@ -11260,7 +13456,7 @@
                       </a:endParaRPr>
                     </a:p>
                   </a:txBody>
-                  <a:tcPr marL="91440" marR="91440" marT="45720" marB="45720">
+                  <a:tcPr>
                     <a:lnL w="6350" cap="flat" cmpd="sng" algn="ctr">
                       <a:solidFill>
                         <a:srgbClr val="CBD5E0"/>
@@ -11302,6 +13498,11 @@
                     </a:solidFill>
                   </a:tcPr>
                 </a:tc>
+                <a:extLst>
+                  <a:ext uri="{0D108BD9-81ED-4DB2-BD59-A6C34878D82A}">
+                    <a16:rowId xmlns:a16="http://schemas.microsoft.com/office/drawing/2014/main" val="10000"/>
+                  </a:ext>
+                </a:extLst>
               </a:tr>
               <a:tr h="374904">
                 <a:tc>
@@ -11309,7 +13510,7 @@
                     <a:bodyPr/>
                     <a:lstStyle/>
                     <a:p>
-                      <a:pPr indent="0" marL="0">
+                      <a:pPr marL="0" indent="0">
                         <a:buNone/>
                       </a:pPr>
                       <a:r>
@@ -11330,7 +13531,7 @@
                       </a:endParaRPr>
                     </a:p>
                   </a:txBody>
-                  <a:tcPr marL="91440" marR="91440" marT="45720" marB="45720">
+                  <a:tcPr>
                     <a:lnL w="6350" cap="flat" cmpd="sng" algn="ctr">
                       <a:solidFill>
                         <a:srgbClr val="CBD5E0"/>
@@ -11374,7 +13575,7 @@
                     <a:bodyPr/>
                     <a:lstStyle/>
                     <a:p>
-                      <a:pPr algn="ctr" indent="0" marL="0">
+                      <a:pPr marL="0" indent="0" algn="ctr">
                         <a:buNone/>
                       </a:pPr>
                       <a:r>
@@ -11395,7 +13596,7 @@
                       </a:endParaRPr>
                     </a:p>
                   </a:txBody>
-                  <a:tcPr marL="91440" marR="91440" marT="45720" marB="45720">
+                  <a:tcPr>
                     <a:lnL w="6350" cap="flat" cmpd="sng" algn="ctr">
                       <a:solidFill>
                         <a:srgbClr val="CBD5E0"/>
@@ -11439,7 +13640,7 @@
                     <a:bodyPr/>
                     <a:lstStyle/>
                     <a:p>
-                      <a:pPr indent="0" marL="0">
+                      <a:pPr marL="0" indent="0">
                         <a:buNone/>
                       </a:pPr>
                       <a:r>
@@ -11460,7 +13661,7 @@
                       </a:endParaRPr>
                     </a:p>
                   </a:txBody>
-                  <a:tcPr marL="91440" marR="91440" marT="45720" marB="45720">
+                  <a:tcPr>
                     <a:lnL w="6350" cap="flat" cmpd="sng" algn="ctr">
                       <a:solidFill>
                         <a:srgbClr val="CBD5E0"/>
@@ -11499,6 +13700,11 @@
                     </a:lnB>
                   </a:tcPr>
                 </a:tc>
+                <a:extLst>
+                  <a:ext uri="{0D108BD9-81ED-4DB2-BD59-A6C34878D82A}">
+                    <a16:rowId xmlns:a16="http://schemas.microsoft.com/office/drawing/2014/main" val="10001"/>
+                  </a:ext>
+                </a:extLst>
               </a:tr>
               <a:tr h="374904">
                 <a:tc>
@@ -11506,7 +13712,7 @@
                     <a:bodyPr/>
                     <a:lstStyle/>
                     <a:p>
-                      <a:pPr indent="0" marL="0">
+                      <a:pPr marL="0" indent="0">
                         <a:buNone/>
                       </a:pPr>
                       <a:r>
@@ -11527,7 +13733,7 @@
                       </a:endParaRPr>
                     </a:p>
                   </a:txBody>
-                  <a:tcPr marL="91440" marR="91440" marT="45720" marB="45720">
+                  <a:tcPr>
                     <a:lnL w="6350" cap="flat" cmpd="sng" algn="ctr">
                       <a:solidFill>
                         <a:srgbClr val="CBD5E0"/>
@@ -11571,7 +13777,7 @@
                     <a:bodyPr/>
                     <a:lstStyle/>
                     <a:p>
-                      <a:pPr algn="ctr" indent="0" marL="0">
+                      <a:pPr marL="0" indent="0" algn="ctr">
                         <a:buNone/>
                       </a:pPr>
                       <a:r>
@@ -11592,7 +13798,7 @@
                       </a:endParaRPr>
                     </a:p>
                   </a:txBody>
-                  <a:tcPr marL="91440" marR="91440" marT="45720" marB="45720">
+                  <a:tcPr>
                     <a:lnL w="6350" cap="flat" cmpd="sng" algn="ctr">
                       <a:solidFill>
                         <a:srgbClr val="CBD5E0"/>
@@ -11636,7 +13842,7 @@
                     <a:bodyPr/>
                     <a:lstStyle/>
                     <a:p>
-                      <a:pPr indent="0" marL="0">
+                      <a:pPr marL="0" indent="0">
                         <a:buNone/>
                       </a:pPr>
                       <a:r>
@@ -11657,7 +13863,7 @@
                       </a:endParaRPr>
                     </a:p>
                   </a:txBody>
-                  <a:tcPr marL="91440" marR="91440" marT="45720" marB="45720">
+                  <a:tcPr>
                     <a:lnL w="6350" cap="flat" cmpd="sng" algn="ctr">
                       <a:solidFill>
                         <a:srgbClr val="CBD5E0"/>
@@ -11696,6 +13902,11 @@
                     </a:lnB>
                   </a:tcPr>
                 </a:tc>
+                <a:extLst>
+                  <a:ext uri="{0D108BD9-81ED-4DB2-BD59-A6C34878D82A}">
+                    <a16:rowId xmlns:a16="http://schemas.microsoft.com/office/drawing/2014/main" val="10002"/>
+                  </a:ext>
+                </a:extLst>
               </a:tr>
               <a:tr h="374904">
                 <a:tc>
@@ -11703,7 +13914,7 @@
                     <a:bodyPr/>
                     <a:lstStyle/>
                     <a:p>
-                      <a:pPr indent="0" marL="0">
+                      <a:pPr marL="0" indent="0">
                         <a:buNone/>
                       </a:pPr>
                       <a:r>
@@ -11724,7 +13935,7 @@
                       </a:endParaRPr>
                     </a:p>
                   </a:txBody>
-                  <a:tcPr marL="91440" marR="91440" marT="45720" marB="45720">
+                  <a:tcPr>
                     <a:lnL w="6350" cap="flat" cmpd="sng" algn="ctr">
                       <a:solidFill>
                         <a:srgbClr val="CBD5E0"/>
@@ -11768,7 +13979,7 @@
                     <a:bodyPr/>
                     <a:lstStyle/>
                     <a:p>
-                      <a:pPr algn="ctr" indent="0" marL="0">
+                      <a:pPr marL="0" indent="0" algn="ctr">
                         <a:buNone/>
                       </a:pPr>
                       <a:r>
@@ -11789,7 +14000,7 @@
                       </a:endParaRPr>
                     </a:p>
                   </a:txBody>
-                  <a:tcPr marL="91440" marR="91440" marT="45720" marB="45720">
+                  <a:tcPr>
                     <a:lnL w="6350" cap="flat" cmpd="sng" algn="ctr">
                       <a:solidFill>
                         <a:srgbClr val="CBD5E0"/>
@@ -11833,7 +14044,7 @@
                     <a:bodyPr/>
                     <a:lstStyle/>
                     <a:p>
-                      <a:pPr indent="0" marL="0">
+                      <a:pPr marL="0" indent="0">
                         <a:buNone/>
                       </a:pPr>
                       <a:r>
@@ -11854,7 +14065,7 @@
                       </a:endParaRPr>
                     </a:p>
                   </a:txBody>
-                  <a:tcPr marL="91440" marR="91440" marT="45720" marB="45720">
+                  <a:tcPr>
                     <a:lnL w="6350" cap="flat" cmpd="sng" algn="ctr">
                       <a:solidFill>
                         <a:srgbClr val="CBD5E0"/>
@@ -11893,6 +14104,11 @@
                     </a:lnB>
                   </a:tcPr>
                 </a:tc>
+                <a:extLst>
+                  <a:ext uri="{0D108BD9-81ED-4DB2-BD59-A6C34878D82A}">
+                    <a16:rowId xmlns:a16="http://schemas.microsoft.com/office/drawing/2014/main" val="10003"/>
+                  </a:ext>
+                </a:extLst>
               </a:tr>
               <a:tr h="374904">
                 <a:tc>
@@ -11900,7 +14116,7 @@
                     <a:bodyPr/>
                     <a:lstStyle/>
                     <a:p>
-                      <a:pPr indent="0" marL="0">
+                      <a:pPr marL="0" indent="0">
                         <a:buNone/>
                       </a:pPr>
                       <a:r>
@@ -11921,7 +14137,7 @@
                       </a:endParaRPr>
                     </a:p>
                   </a:txBody>
-                  <a:tcPr marL="91440" marR="91440" marT="45720" marB="45720">
+                  <a:tcPr>
                     <a:lnL w="6350" cap="flat" cmpd="sng" algn="ctr">
                       <a:solidFill>
                         <a:srgbClr val="CBD5E0"/>
@@ -11965,7 +14181,7 @@
                     <a:bodyPr/>
                     <a:lstStyle/>
                     <a:p>
-                      <a:pPr algn="ctr" indent="0" marL="0">
+                      <a:pPr marL="0" indent="0" algn="ctr">
                         <a:buNone/>
                       </a:pPr>
                       <a:r>
@@ -11986,7 +14202,7 @@
                       </a:endParaRPr>
                     </a:p>
                   </a:txBody>
-                  <a:tcPr marL="91440" marR="91440" marT="45720" marB="45720">
+                  <a:tcPr>
                     <a:lnL w="6350" cap="flat" cmpd="sng" algn="ctr">
                       <a:solidFill>
                         <a:srgbClr val="CBD5E0"/>
@@ -12030,7 +14246,7 @@
                     <a:bodyPr/>
                     <a:lstStyle/>
                     <a:p>
-                      <a:pPr indent="0" marL="0">
+                      <a:pPr marL="0" indent="0">
                         <a:buNone/>
                       </a:pPr>
                       <a:r>
@@ -12051,7 +14267,7 @@
                       </a:endParaRPr>
                     </a:p>
                   </a:txBody>
-                  <a:tcPr marL="91440" marR="91440" marT="45720" marB="45720">
+                  <a:tcPr>
                     <a:lnL w="6350" cap="flat" cmpd="sng" algn="ctr">
                       <a:solidFill>
                         <a:srgbClr val="CBD5E0"/>
@@ -12090,6 +14306,11 @@
                     </a:lnB>
                   </a:tcPr>
                 </a:tc>
+                <a:extLst>
+                  <a:ext uri="{0D108BD9-81ED-4DB2-BD59-A6C34878D82A}">
+                    <a16:rowId xmlns:a16="http://schemas.microsoft.com/office/drawing/2014/main" val="10004"/>
+                  </a:ext>
+                </a:extLst>
               </a:tr>
               <a:tr h="374904">
                 <a:tc>
@@ -12097,7 +14318,7 @@
                     <a:bodyPr/>
                     <a:lstStyle/>
                     <a:p>
-                      <a:pPr indent="0" marL="0">
+                      <a:pPr marL="0" indent="0">
                         <a:buNone/>
                       </a:pPr>
                       <a:r>
@@ -12118,7 +14339,7 @@
                       </a:endParaRPr>
                     </a:p>
                   </a:txBody>
-                  <a:tcPr marL="91440" marR="91440" marT="45720" marB="45720">
+                  <a:tcPr>
                     <a:lnL w="6350" cap="flat" cmpd="sng" algn="ctr">
                       <a:solidFill>
                         <a:srgbClr val="CBD5E0"/>
@@ -12162,7 +14383,7 @@
                     <a:bodyPr/>
                     <a:lstStyle/>
                     <a:p>
-                      <a:pPr algn="ctr" indent="0" marL="0">
+                      <a:pPr marL="0" indent="0" algn="ctr">
                         <a:buNone/>
                       </a:pPr>
                       <a:r>
@@ -12183,7 +14404,7 @@
                       </a:endParaRPr>
                     </a:p>
                   </a:txBody>
-                  <a:tcPr marL="91440" marR="91440" marT="45720" marB="45720">
+                  <a:tcPr>
                     <a:lnL w="6350" cap="flat" cmpd="sng" algn="ctr">
                       <a:solidFill>
                         <a:srgbClr val="CBD5E0"/>
@@ -12227,7 +14448,7 @@
                     <a:bodyPr/>
                     <a:lstStyle/>
                     <a:p>
-                      <a:pPr indent="0" marL="0">
+                      <a:pPr marL="0" indent="0">
                         <a:buNone/>
                       </a:pPr>
                       <a:r>
@@ -12248,7 +14469,7 @@
                       </a:endParaRPr>
                     </a:p>
                   </a:txBody>
-                  <a:tcPr marL="91440" marR="91440" marT="45720" marB="45720">
+                  <a:tcPr>
                     <a:lnL w="6350" cap="flat" cmpd="sng" algn="ctr">
                       <a:solidFill>
                         <a:srgbClr val="CBD5E0"/>
@@ -12287,6 +14508,11 @@
                     </a:lnB>
                   </a:tcPr>
                 </a:tc>
+                <a:extLst>
+                  <a:ext uri="{0D108BD9-81ED-4DB2-BD59-A6C34878D82A}">
+                    <a16:rowId xmlns:a16="http://schemas.microsoft.com/office/drawing/2014/main" val="10005"/>
+                  </a:ext>
+                </a:extLst>
               </a:tr>
               <a:tr h="374904">
                 <a:tc>
@@ -12294,7 +14520,7 @@
                     <a:bodyPr/>
                     <a:lstStyle/>
                     <a:p>
-                      <a:pPr indent="0" marL="0">
+                      <a:pPr marL="0" indent="0">
                         <a:buNone/>
                       </a:pPr>
                       <a:r>
@@ -12315,7 +14541,7 @@
                       </a:endParaRPr>
                     </a:p>
                   </a:txBody>
-                  <a:tcPr marL="91440" marR="91440" marT="45720" marB="45720">
+                  <a:tcPr>
                     <a:lnL w="6350" cap="flat" cmpd="sng" algn="ctr">
                       <a:solidFill>
                         <a:srgbClr val="CBD5E0"/>
@@ -12359,7 +14585,7 @@
                     <a:bodyPr/>
                     <a:lstStyle/>
                     <a:p>
-                      <a:pPr algn="ctr" indent="0" marL="0">
+                      <a:pPr marL="0" indent="0" algn="ctr">
                         <a:buNone/>
                       </a:pPr>
                       <a:r>
@@ -12380,7 +14606,7 @@
                       </a:endParaRPr>
                     </a:p>
                   </a:txBody>
-                  <a:tcPr marL="91440" marR="91440" marT="45720" marB="45720">
+                  <a:tcPr>
                     <a:lnL w="6350" cap="flat" cmpd="sng" algn="ctr">
                       <a:solidFill>
                         <a:srgbClr val="CBD5E0"/>
@@ -12424,7 +14650,7 @@
                     <a:bodyPr/>
                     <a:lstStyle/>
                     <a:p>
-                      <a:pPr indent="0" marL="0">
+                      <a:pPr marL="0" indent="0">
                         <a:buNone/>
                       </a:pPr>
                       <a:r>
@@ -12445,7 +14671,7 @@
                       </a:endParaRPr>
                     </a:p>
                   </a:txBody>
-                  <a:tcPr marL="91440" marR="91440" marT="45720" marB="45720">
+                  <a:tcPr>
                     <a:lnL w="6350" cap="flat" cmpd="sng" algn="ctr">
                       <a:solidFill>
                         <a:srgbClr val="CBD5E0"/>
@@ -12484,6 +14710,11 @@
                     </a:lnB>
                   </a:tcPr>
                 </a:tc>
+                <a:extLst>
+                  <a:ext uri="{0D108BD9-81ED-4DB2-BD59-A6C34878D82A}">
+                    <a16:rowId xmlns:a16="http://schemas.microsoft.com/office/drawing/2014/main" val="10006"/>
+                  </a:ext>
+                </a:extLst>
               </a:tr>
               <a:tr h="374904">
                 <a:tc>
@@ -12491,7 +14722,7 @@
                     <a:bodyPr/>
                     <a:lstStyle/>
                     <a:p>
-                      <a:pPr indent="0" marL="0">
+                      <a:pPr marL="0" indent="0">
                         <a:buNone/>
                       </a:pPr>
                       <a:r>
@@ -12512,7 +14743,7 @@
                       </a:endParaRPr>
                     </a:p>
                   </a:txBody>
-                  <a:tcPr marL="91440" marR="91440" marT="45720" marB="45720">
+                  <a:tcPr>
                     <a:lnL w="6350" cap="flat" cmpd="sng" algn="ctr">
                       <a:solidFill>
                         <a:srgbClr val="CBD5E0"/>
@@ -12556,7 +14787,7 @@
                     <a:bodyPr/>
                     <a:lstStyle/>
                     <a:p>
-                      <a:pPr algn="ctr" indent="0" marL="0">
+                      <a:pPr marL="0" indent="0" algn="ctr">
                         <a:buNone/>
                       </a:pPr>
                       <a:r>
@@ -12577,7 +14808,7 @@
                       </a:endParaRPr>
                     </a:p>
                   </a:txBody>
-                  <a:tcPr marL="91440" marR="91440" marT="45720" marB="45720">
+                  <a:tcPr>
                     <a:lnL w="6350" cap="flat" cmpd="sng" algn="ctr">
                       <a:solidFill>
                         <a:srgbClr val="CBD5E0"/>
@@ -12621,7 +14852,7 @@
                     <a:bodyPr/>
                     <a:lstStyle/>
                     <a:p>
-                      <a:pPr indent="0" marL="0">
+                      <a:pPr marL="0" indent="0">
                         <a:buNone/>
                       </a:pPr>
                       <a:r>
@@ -12642,7 +14873,7 @@
                       </a:endParaRPr>
                     </a:p>
                   </a:txBody>
-                  <a:tcPr marL="91440" marR="91440" marT="45720" marB="45720">
+                  <a:tcPr>
                     <a:lnL w="6350" cap="flat" cmpd="sng" algn="ctr">
                       <a:solidFill>
                         <a:srgbClr val="CBD5E0"/>
@@ -12681,6 +14912,11 @@
                     </a:lnB>
                   </a:tcPr>
                 </a:tc>
+                <a:extLst>
+                  <a:ext uri="{0D108BD9-81ED-4DB2-BD59-A6C34878D82A}">
+                    <a16:rowId xmlns:a16="http://schemas.microsoft.com/office/drawing/2014/main" val="10007"/>
+                  </a:ext>
+                </a:extLst>
               </a:tr>
               <a:tr h="374904">
                 <a:tc>
@@ -12688,7 +14924,7 @@
                     <a:bodyPr/>
                     <a:lstStyle/>
                     <a:p>
-                      <a:pPr indent="0" marL="0">
+                      <a:pPr marL="0" indent="0">
                         <a:buNone/>
                       </a:pPr>
                       <a:r>
@@ -12709,7 +14945,7 @@
                       </a:endParaRPr>
                     </a:p>
                   </a:txBody>
-                  <a:tcPr marL="91440" marR="91440" marT="45720" marB="45720">
+                  <a:tcPr>
                     <a:lnL w="6350" cap="flat" cmpd="sng" algn="ctr">
                       <a:solidFill>
                         <a:srgbClr val="CBD5E0"/>
@@ -12753,7 +14989,7 @@
                     <a:bodyPr/>
                     <a:lstStyle/>
                     <a:p>
-                      <a:pPr algn="ctr" indent="0" marL="0">
+                      <a:pPr marL="0" indent="0" algn="ctr">
                         <a:buNone/>
                       </a:pPr>
                       <a:r>
@@ -12774,7 +15010,7 @@
                       </a:endParaRPr>
                     </a:p>
                   </a:txBody>
-                  <a:tcPr marL="91440" marR="91440" marT="45720" marB="45720">
+                  <a:tcPr>
                     <a:lnL w="6350" cap="flat" cmpd="sng" algn="ctr">
                       <a:solidFill>
                         <a:srgbClr val="CBD5E0"/>
@@ -12818,7 +15054,7 @@
                     <a:bodyPr/>
                     <a:lstStyle/>
                     <a:p>
-                      <a:pPr indent="0" marL="0">
+                      <a:pPr marL="0" indent="0">
                         <a:buNone/>
                       </a:pPr>
                       <a:r>
@@ -12839,7 +15075,7 @@
                       </a:endParaRPr>
                     </a:p>
                   </a:txBody>
-                  <a:tcPr marL="91440" marR="91440" marT="45720" marB="45720">
+                  <a:tcPr>
                     <a:lnL w="6350" cap="flat" cmpd="sng" algn="ctr">
                       <a:solidFill>
                         <a:srgbClr val="CBD5E0"/>
@@ -12878,6 +15114,11 @@
                     </a:lnB>
                   </a:tcPr>
                 </a:tc>
+                <a:extLst>
+                  <a:ext uri="{0D108BD9-81ED-4DB2-BD59-A6C34878D82A}">
+                    <a16:rowId xmlns:a16="http://schemas.microsoft.com/office/drawing/2014/main" val="10008"/>
+                  </a:ext>
+                </a:extLst>
               </a:tr>
               <a:tr h="374904">
                 <a:tc>
@@ -12885,7 +15126,7 @@
                     <a:bodyPr/>
                     <a:lstStyle/>
                     <a:p>
-                      <a:pPr indent="0" marL="0">
+                      <a:pPr marL="0" indent="0">
                         <a:buNone/>
                       </a:pPr>
                       <a:r>
@@ -12897,7 +15138,7 @@
                           <a:ea typeface="Arial" pitchFamily="34" charset="-122"/>
                           <a:cs typeface="Arial" pitchFamily="34" charset="-120"/>
                         </a:rPr>
-                        <a:t>edge-workflows</a:t>
+                        <a:t>Toàn collection</a:t>
                       </a:r>
                       <a:endParaRPr lang="en-US" sz="950" dirty="0">
                         <a:latin typeface="Arial" charset="0"/>
@@ -12906,7 +15147,7 @@
                       </a:endParaRPr>
                     </a:p>
                   </a:txBody>
-                  <a:tcPr marL="91440" marR="91440" marT="45720" marB="45720">
+                  <a:tcPr>
                     <a:lnL w="6350" cap="flat" cmpd="sng" algn="ctr">
                       <a:solidFill>
                         <a:srgbClr val="CBD5E0"/>
@@ -12950,7 +15191,7 @@
                     <a:bodyPr/>
                     <a:lstStyle/>
                     <a:p>
-                      <a:pPr algn="ctr" indent="0" marL="0">
+                      <a:pPr marL="0" indent="0" algn="ctr">
                         <a:buNone/>
                       </a:pPr>
                       <a:r>
@@ -12962,7 +15203,7 @@
                           <a:ea typeface="Arial" pitchFamily="34" charset="-122"/>
                           <a:cs typeface="Arial" pitchFamily="34" charset="-120"/>
                         </a:rPr>
-                        <a:t>25</a:t>
+                        <a:t>142</a:t>
                       </a:r>
                       <a:endParaRPr lang="en-US" sz="950" dirty="0">
                         <a:latin typeface="Arial" charset="0"/>
@@ -12971,7 +15212,7 @@
                       </a:endParaRPr>
                     </a:p>
                   </a:txBody>
-                  <a:tcPr marL="91440" marR="91440" marT="45720" marB="45720">
+                  <a:tcPr>
                     <a:lnL w="6350" cap="flat" cmpd="sng" algn="ctr">
                       <a:solidFill>
                         <a:srgbClr val="CBD5E0"/>
@@ -13015,7 +15256,7 @@
                     <a:bodyPr/>
                     <a:lstStyle/>
                     <a:p>
-                      <a:pPr indent="0" marL="0">
+                      <a:pPr marL="0" indent="0">
                         <a:buNone/>
                       </a:pPr>
                       <a:r>
@@ -13027,7 +15268,7 @@
                           <a:ea typeface="Arial" pitchFamily="34" charset="-122"/>
                           <a:cs typeface="Arial" pitchFamily="34" charset="-120"/>
                         </a:rPr>
-                        <a:t>Kiểm thử invalid input, missing resource, forbidden 403</a:t>
+                        <a:t>14 nhóm; 144 file gồm root và environment</a:t>
                       </a:r>
                       <a:endParaRPr lang="en-US" sz="950" dirty="0">
                         <a:latin typeface="Arial" charset="0"/>
@@ -13036,7 +15277,7 @@
                       </a:endParaRPr>
                     </a:p>
                   </a:txBody>
-                  <a:tcPr marL="91440" marR="91440" marT="45720" marB="45720">
+                  <a:tcPr>
                     <a:lnL w="6350" cap="flat" cmpd="sng" algn="ctr">
                       <a:solidFill>
                         <a:srgbClr val="CBD5E0"/>
@@ -13075,6 +15316,11 @@
                     </a:lnB>
                   </a:tcPr>
                 </a:tc>
+                <a:extLst>
+                  <a:ext uri="{0D108BD9-81ED-4DB2-BD59-A6C34878D82A}">
+                    <a16:rowId xmlns:a16="http://schemas.microsoft.com/office/drawing/2014/main" val="10009"/>
+                  </a:ext>
+                </a:extLst>
               </a:tr>
             </a:tbl>
           </a:graphicData>
@@ -13381,4 +15627,319 @@
     </a:ext>
   </a:extLst>
 </a:theme>
+</file>
+
+<file path=ppt/theme/theme2.xml><?xml version="1.0" encoding="utf-8"?>
+<a:theme xmlns:a="http://schemas.openxmlformats.org/drawingml/2006/main" name="Office Theme">
+  <a:themeElements>
+    <a:clrScheme name="Office">
+      <a:dk1>
+        <a:sysClr val="windowText" lastClr="000000"/>
+      </a:dk1>
+      <a:lt1>
+        <a:sysClr val="window" lastClr="FFFFFF"/>
+      </a:lt1>
+      <a:dk2>
+        <a:srgbClr val="0E2841"/>
+      </a:dk2>
+      <a:lt2>
+        <a:srgbClr val="E8E8E8"/>
+      </a:lt2>
+      <a:accent1>
+        <a:srgbClr val="156082"/>
+      </a:accent1>
+      <a:accent2>
+        <a:srgbClr val="E97132"/>
+      </a:accent2>
+      <a:accent3>
+        <a:srgbClr val="196B24"/>
+      </a:accent3>
+      <a:accent4>
+        <a:srgbClr val="0F9ED5"/>
+      </a:accent4>
+      <a:accent5>
+        <a:srgbClr val="A02B93"/>
+      </a:accent5>
+      <a:accent6>
+        <a:srgbClr val="4EA72E"/>
+      </a:accent6>
+      <a:hlink>
+        <a:srgbClr val="467886"/>
+      </a:hlink>
+      <a:folHlink>
+        <a:srgbClr val="96607D"/>
+      </a:folHlink>
+    </a:clrScheme>
+    <a:fontScheme name="Office">
+      <a:majorFont>
+        <a:latin typeface="Aptos Display" panose="02110004020202020204"/>
+        <a:ea typeface=""/>
+        <a:cs typeface=""/>
+        <a:font script="Jpan" typeface="游ゴシック Light"/>
+        <a:font script="Hang" typeface="맑은 고딕"/>
+        <a:font script="Hans" typeface="等线 Light"/>
+        <a:font script="Hant" typeface="新細明體"/>
+        <a:font script="Arab" typeface="Times New Roman"/>
+        <a:font script="Hebr" typeface="Times New Roman"/>
+        <a:font script="Thai" typeface="Angsana New"/>
+        <a:font script="Ethi" typeface="Nyala"/>
+        <a:font script="Beng" typeface="Vrinda"/>
+        <a:font script="Gujr" typeface="Shruti"/>
+        <a:font script="Khmr" typeface="MoolBoran"/>
+        <a:font script="Knda" typeface="Tunga"/>
+        <a:font script="Guru" typeface="Raavi"/>
+        <a:font script="Cans" typeface="Euphemia"/>
+        <a:font script="Cher" typeface="Plantagenet Cherokee"/>
+        <a:font script="Yiii" typeface="Microsoft Yi Baiti"/>
+        <a:font script="Tibt" typeface="Microsoft Himalaya"/>
+        <a:font script="Thaa" typeface="MV Boli"/>
+        <a:font script="Deva" typeface="Mangal"/>
+        <a:font script="Telu" typeface="Gautami"/>
+        <a:font script="Taml" typeface="Latha"/>
+        <a:font script="Syrc" typeface="Estrangelo Edessa"/>
+        <a:font script="Orya" typeface="Kalinga"/>
+        <a:font script="Mlym" typeface="Kartika"/>
+        <a:font script="Laoo" typeface="DokChampa"/>
+        <a:font script="Sinh" typeface="Iskoola Pota"/>
+        <a:font script="Mong" typeface="Mongolian Baiti"/>
+        <a:font script="Viet" typeface="Times New Roman"/>
+        <a:font script="Uigh" typeface="Microsoft Uighur"/>
+        <a:font script="Geor" typeface="Sylfaen"/>
+        <a:font script="Armn" typeface="Arial"/>
+        <a:font script="Bugi" typeface="Leelawadee UI"/>
+        <a:font script="Bopo" typeface="Microsoft JhengHei"/>
+        <a:font script="Java" typeface="Javanese Text"/>
+        <a:font script="Lisu" typeface="Segoe UI"/>
+        <a:font script="Mymr" typeface="Myanmar Text"/>
+        <a:font script="Nkoo" typeface="Ebrima"/>
+        <a:font script="Olck" typeface="Nirmala UI"/>
+        <a:font script="Osma" typeface="Ebrima"/>
+        <a:font script="Phag" typeface="Phagspa"/>
+        <a:font script="Syrn" typeface="Estrangelo Edessa"/>
+        <a:font script="Syrj" typeface="Estrangelo Edessa"/>
+        <a:font script="Syre" typeface="Estrangelo Edessa"/>
+        <a:font script="Sora" typeface="Nirmala UI"/>
+        <a:font script="Tale" typeface="Microsoft Tai Le"/>
+        <a:font script="Talu" typeface="Microsoft New Tai Lue"/>
+        <a:font script="Tfng" typeface="Ebrima"/>
+      </a:majorFont>
+      <a:minorFont>
+        <a:latin typeface="Aptos" panose="02110004020202020204"/>
+        <a:ea typeface=""/>
+        <a:cs typeface=""/>
+        <a:font script="Jpan" typeface="游ゴシック"/>
+        <a:font script="Hang" typeface="맑은 고딕"/>
+        <a:font script="Hans" typeface="等线"/>
+        <a:font script="Hant" typeface="新細明體"/>
+        <a:font script="Arab" typeface="Arial"/>
+        <a:font script="Hebr" typeface="Arial"/>
+        <a:font script="Thai" typeface="Cordia New"/>
+        <a:font script="Ethi" typeface="Nyala"/>
+        <a:font script="Beng" typeface="Vrinda"/>
+        <a:font script="Gujr" typeface="Shruti"/>
+        <a:font script="Khmr" typeface="DaunPenh"/>
+        <a:font script="Knda" typeface="Tunga"/>
+        <a:font script="Guru" typeface="Raavi"/>
+        <a:font script="Cans" typeface="Euphemia"/>
+        <a:font script="Cher" typeface="Plantagenet Cherokee"/>
+        <a:font script="Yiii" typeface="Microsoft Yi Baiti"/>
+        <a:font script="Tibt" typeface="Microsoft Himalaya"/>
+        <a:font script="Thaa" typeface="MV Boli"/>
+        <a:font script="Deva" typeface="Mangal"/>
+        <a:font script="Telu" typeface="Gautami"/>
+        <a:font script="Taml" typeface="Latha"/>
+        <a:font script="Syrc" typeface="Estrangelo Edessa"/>
+        <a:font script="Orya" typeface="Kalinga"/>
+        <a:font script="Mlym" typeface="Kartika"/>
+        <a:font script="Laoo" typeface="DokChampa"/>
+        <a:font script="Sinh" typeface="Iskoola Pota"/>
+        <a:font script="Mong" typeface="Mongolian Baiti"/>
+        <a:font script="Viet" typeface="Arial"/>
+        <a:font script="Uigh" typeface="Microsoft Uighur"/>
+        <a:font script="Geor" typeface="Sylfaen"/>
+        <a:font script="Armn" typeface="Arial"/>
+        <a:font script="Bugi" typeface="Leelawadee UI"/>
+        <a:font script="Bopo" typeface="Microsoft JhengHei"/>
+        <a:font script="Java" typeface="Javanese Text"/>
+        <a:font script="Lisu" typeface="Segoe UI"/>
+        <a:font script="Mymr" typeface="Myanmar Text"/>
+        <a:font script="Nkoo" typeface="Ebrima"/>
+        <a:font script="Olck" typeface="Nirmala UI"/>
+        <a:font script="Osma" typeface="Ebrima"/>
+        <a:font script="Phag" typeface="Phagspa"/>
+        <a:font script="Syrn" typeface="Estrangelo Edessa"/>
+        <a:font script="Syrj" typeface="Estrangelo Edessa"/>
+        <a:font script="Syre" typeface="Estrangelo Edessa"/>
+        <a:font script="Sora" typeface="Nirmala UI"/>
+        <a:font script="Tale" typeface="Microsoft Tai Le"/>
+        <a:font script="Talu" typeface="Microsoft New Tai Lue"/>
+        <a:font script="Tfng" typeface="Ebrima"/>
+      </a:minorFont>
+    </a:fontScheme>
+    <a:fmtScheme name="Office">
+      <a:fillStyleLst>
+        <a:solidFill>
+          <a:schemeClr val="phClr"/>
+        </a:solidFill>
+        <a:gradFill rotWithShape="1">
+          <a:gsLst>
+            <a:gs pos="0">
+              <a:schemeClr val="phClr">
+                <a:lumMod val="110000"/>
+                <a:satMod val="105000"/>
+                <a:tint val="67000"/>
+              </a:schemeClr>
+            </a:gs>
+            <a:gs pos="50000">
+              <a:schemeClr val="phClr">
+                <a:lumMod val="105000"/>
+                <a:satMod val="103000"/>
+                <a:tint val="73000"/>
+              </a:schemeClr>
+            </a:gs>
+            <a:gs pos="100000">
+              <a:schemeClr val="phClr">
+                <a:lumMod val="105000"/>
+                <a:satMod val="109000"/>
+                <a:tint val="81000"/>
+              </a:schemeClr>
+            </a:gs>
+          </a:gsLst>
+          <a:lin ang="5400000" scaled="0"/>
+        </a:gradFill>
+        <a:gradFill rotWithShape="1">
+          <a:gsLst>
+            <a:gs pos="0">
+              <a:schemeClr val="phClr">
+                <a:satMod val="103000"/>
+                <a:lumMod val="102000"/>
+                <a:tint val="94000"/>
+              </a:schemeClr>
+            </a:gs>
+            <a:gs pos="50000">
+              <a:schemeClr val="phClr">
+                <a:satMod val="110000"/>
+                <a:lumMod val="100000"/>
+                <a:shade val="100000"/>
+              </a:schemeClr>
+            </a:gs>
+            <a:gs pos="100000">
+              <a:schemeClr val="phClr">
+                <a:lumMod val="99000"/>
+                <a:satMod val="120000"/>
+                <a:shade val="78000"/>
+              </a:schemeClr>
+            </a:gs>
+          </a:gsLst>
+          <a:lin ang="5400000" scaled="0"/>
+        </a:gradFill>
+      </a:fillStyleLst>
+      <a:lnStyleLst>
+        <a:ln w="12700" cap="flat" cmpd="sng" algn="ctr">
+          <a:solidFill>
+            <a:schemeClr val="phClr"/>
+          </a:solidFill>
+          <a:prstDash val="solid"/>
+          <a:miter lim="800000"/>
+        </a:ln>
+        <a:ln w="19050" cap="flat" cmpd="sng" algn="ctr">
+          <a:solidFill>
+            <a:schemeClr val="phClr"/>
+          </a:solidFill>
+          <a:prstDash val="solid"/>
+          <a:miter lim="800000"/>
+        </a:ln>
+        <a:ln w="25400" cap="flat" cmpd="sng" algn="ctr">
+          <a:solidFill>
+            <a:schemeClr val="phClr"/>
+          </a:solidFill>
+          <a:prstDash val="solid"/>
+          <a:miter lim="800000"/>
+        </a:ln>
+      </a:lnStyleLst>
+      <a:effectStyleLst>
+        <a:effectStyle>
+          <a:effectLst/>
+        </a:effectStyle>
+        <a:effectStyle>
+          <a:effectLst/>
+        </a:effectStyle>
+        <a:effectStyle>
+          <a:effectLst>
+            <a:outerShdw blurRad="57150" dist="19050" dir="5400000" algn="ctr" rotWithShape="0">
+              <a:srgbClr val="000000">
+                <a:alpha val="63000"/>
+              </a:srgbClr>
+            </a:outerShdw>
+          </a:effectLst>
+        </a:effectStyle>
+      </a:effectStyleLst>
+      <a:bgFillStyleLst>
+        <a:solidFill>
+          <a:schemeClr val="phClr"/>
+        </a:solidFill>
+        <a:solidFill>
+          <a:schemeClr val="phClr">
+            <a:tint val="95000"/>
+            <a:satMod val="170000"/>
+          </a:schemeClr>
+        </a:solidFill>
+        <a:gradFill rotWithShape="1">
+          <a:gsLst>
+            <a:gs pos="0">
+              <a:schemeClr val="phClr">
+                <a:tint val="93000"/>
+                <a:satMod val="150000"/>
+                <a:shade val="98000"/>
+                <a:lumMod val="102000"/>
+              </a:schemeClr>
+            </a:gs>
+            <a:gs pos="50000">
+              <a:schemeClr val="phClr">
+                <a:tint val="98000"/>
+                <a:satMod val="130000"/>
+                <a:shade val="90000"/>
+                <a:lumMod val="103000"/>
+              </a:schemeClr>
+            </a:gs>
+            <a:gs pos="100000">
+              <a:schemeClr val="phClr">
+                <a:shade val="63000"/>
+                <a:satMod val="120000"/>
+              </a:schemeClr>
+            </a:gs>
+          </a:gsLst>
+          <a:lin ang="5400000" scaled="0"/>
+        </a:gradFill>
+      </a:bgFillStyleLst>
+    </a:fmtScheme>
+  </a:themeElements>
+  <a:objectDefaults>
+    <a:lnDef>
+      <a:spPr/>
+      <a:bodyPr/>
+      <a:lstStyle/>
+      <a:style>
+        <a:lnRef idx="2">
+          <a:schemeClr val="accent1"/>
+        </a:lnRef>
+        <a:fillRef idx="0">
+          <a:schemeClr val="accent1"/>
+        </a:fillRef>
+        <a:effectRef idx="1">
+          <a:schemeClr val="accent1"/>
+        </a:effectRef>
+        <a:fontRef idx="minor">
+          <a:schemeClr val="tx1"/>
+        </a:fontRef>
+      </a:style>
+    </a:lnDef>
+  </a:objectDefaults>
+  <a:extraClrSchemeLst/>
+  <a:extLst>
+    <a:ext uri="{05A4C25C-085E-4340-85A3-A5531E510DB2}">
+      <thm15:themeFamily xmlns:thm15="http://schemas.microsoft.com/office/thememl/2012/main" name="Office Theme" id="{2E142A2C-CD16-42D6-873A-C26D2A0506FA}" vid="{1BDDFF52-6CD6-40A5-AB3C-68EB2F1E4D0A}"/>
+    </a:ext>
+  </a:extLst>
+</a:theme>
 </file>